--- a/materials/lectures/16-prim/slides.pptx
+++ b/materials/lectures/16-prim/slides.pptx
@@ -7,7 +7,7 @@
     <p:sldMasterId id="2147483668" r:id="rId3"/>
   </p:sldMasterIdLst>
   <p:notesMasterIdLst>
-    <p:notesMasterId r:id="rId43"/>
+    <p:notesMasterId r:id="rId51"/>
   </p:notesMasterIdLst>
   <p:sldIdLst>
     <p:sldId id="256" r:id="rId4"/>
@@ -15,93 +15,89 @@
     <p:sldId id="785" r:id="rId6"/>
     <p:sldId id="812" r:id="rId7"/>
     <p:sldId id="819" r:id="rId8"/>
-    <p:sldId id="813" r:id="rId9"/>
-    <p:sldId id="814" r:id="rId10"/>
-    <p:sldId id="820" r:id="rId11"/>
-    <p:sldId id="815" r:id="rId12"/>
-    <p:sldId id="816" r:id="rId13"/>
-    <p:sldId id="811" r:id="rId14"/>
-    <p:sldId id="821" r:id="rId15"/>
-    <p:sldId id="822" r:id="rId16"/>
-    <p:sldId id="823" r:id="rId17"/>
-    <p:sldId id="824" r:id="rId18"/>
-    <p:sldId id="818" r:id="rId19"/>
-    <p:sldId id="825" r:id="rId20"/>
-    <p:sldId id="827" r:id="rId21"/>
-    <p:sldId id="828" r:id="rId22"/>
-    <p:sldId id="829" r:id="rId23"/>
-    <p:sldId id="830" r:id="rId24"/>
-    <p:sldId id="831" r:id="rId25"/>
-    <p:sldId id="832" r:id="rId26"/>
-    <p:sldId id="899" r:id="rId27"/>
-    <p:sldId id="896" r:id="rId28"/>
-    <p:sldId id="833" r:id="rId29"/>
-    <p:sldId id="835" r:id="rId30"/>
-    <p:sldId id="836" r:id="rId31"/>
-    <p:sldId id="900" r:id="rId32"/>
-    <p:sldId id="834" r:id="rId33"/>
-    <p:sldId id="888" r:id="rId34"/>
-    <p:sldId id="889" r:id="rId35"/>
-    <p:sldId id="890" r:id="rId36"/>
-    <p:sldId id="891" r:id="rId37"/>
-    <p:sldId id="893" r:id="rId38"/>
-    <p:sldId id="894" r:id="rId39"/>
-    <p:sldId id="895" r:id="rId40"/>
-    <p:sldId id="892" r:id="rId41"/>
-    <p:sldId id="826" r:id="rId42"/>
+    <p:sldId id="901" r:id="rId9"/>
+    <p:sldId id="813" r:id="rId10"/>
+    <p:sldId id="902" r:id="rId11"/>
+    <p:sldId id="820" r:id="rId12"/>
+    <p:sldId id="815" r:id="rId13"/>
+    <p:sldId id="816" r:id="rId14"/>
+    <p:sldId id="904" r:id="rId15"/>
+    <p:sldId id="905" r:id="rId16"/>
+    <p:sldId id="811" r:id="rId17"/>
+    <p:sldId id="821" r:id="rId18"/>
+    <p:sldId id="822" r:id="rId19"/>
+    <p:sldId id="823" r:id="rId20"/>
+    <p:sldId id="824" r:id="rId21"/>
+    <p:sldId id="818" r:id="rId22"/>
+    <p:sldId id="825" r:id="rId23"/>
+    <p:sldId id="827" r:id="rId24"/>
+    <p:sldId id="828" r:id="rId25"/>
+    <p:sldId id="829" r:id="rId26"/>
+    <p:sldId id="830" r:id="rId27"/>
+    <p:sldId id="906" r:id="rId28"/>
+    <p:sldId id="831" r:id="rId29"/>
+    <p:sldId id="907" r:id="rId30"/>
+    <p:sldId id="832" r:id="rId31"/>
+    <p:sldId id="899" r:id="rId32"/>
+    <p:sldId id="896" r:id="rId33"/>
+    <p:sldId id="833" r:id="rId34"/>
+    <p:sldId id="835" r:id="rId35"/>
+    <p:sldId id="836" r:id="rId36"/>
+    <p:sldId id="900" r:id="rId37"/>
+    <p:sldId id="834" r:id="rId38"/>
+    <p:sldId id="888" r:id="rId39"/>
+    <p:sldId id="889" r:id="rId40"/>
+    <p:sldId id="890" r:id="rId41"/>
+    <p:sldId id="908" r:id="rId42"/>
+    <p:sldId id="909" r:id="rId43"/>
+    <p:sldId id="891" r:id="rId44"/>
+    <p:sldId id="910" r:id="rId45"/>
+    <p:sldId id="893" r:id="rId46"/>
+    <p:sldId id="894" r:id="rId47"/>
+    <p:sldId id="895" r:id="rId48"/>
+    <p:sldId id="892" r:id="rId49"/>
+    <p:sldId id="826" r:id="rId50"/>
   </p:sldIdLst>
   <p:sldSz cx="12192000" cy="6858000"/>
   <p:notesSz cx="6858000" cy="9144000"/>
   <p:embeddedFontLst>
     <p:embeddedFont>
       <p:font typeface="Arial Nova Cond" panose="020B0506020202020204" pitchFamily="34" charset="0"/>
-      <p:regular r:id="rId44"/>
-      <p:bold r:id="rId45"/>
-      <p:italic r:id="rId46"/>
-      <p:boldItalic r:id="rId47"/>
-    </p:embeddedFont>
-    <p:embeddedFont>
-      <p:font typeface="Bookman Old Style" panose="02050604050505020204" pitchFamily="18" charset="0"/>
-      <p:regular r:id="rId48"/>
-      <p:bold r:id="rId49"/>
-      <p:italic r:id="rId50"/>
-      <p:boldItalic r:id="rId51"/>
-    </p:embeddedFont>
-    <p:embeddedFont>
-      <p:font typeface="Calibri" panose="020F0502020204030204" pitchFamily="34" charset="0"/>
       <p:regular r:id="rId52"/>
       <p:bold r:id="rId53"/>
       <p:italic r:id="rId54"/>
       <p:boldItalic r:id="rId55"/>
     </p:embeddedFont>
     <p:embeddedFont>
-      <p:font typeface="Calibri Light" panose="020F0302020204030204" pitchFamily="34" charset="0"/>
+      <p:font typeface="Bookman Old Style" panose="02050604050505020204" pitchFamily="18" charset="0"/>
       <p:regular r:id="rId56"/>
-      <p:italic r:id="rId57"/>
+      <p:bold r:id="rId57"/>
+      <p:italic r:id="rId58"/>
+      <p:boldItalic r:id="rId59"/>
     </p:embeddedFont>
     <p:embeddedFont>
       <p:font typeface="Cambria Math" panose="02040503050406030204" pitchFamily="18" charset="0"/>
-      <p:regular r:id="rId58"/>
+      <p:regular r:id="rId60"/>
     </p:embeddedFont>
     <p:embeddedFont>
       <p:font typeface="Gill Sans MT" panose="020B0502020104020203" pitchFamily="34" charset="0"/>
-      <p:regular r:id="rId59"/>
-      <p:bold r:id="rId60"/>
-      <p:italic r:id="rId61"/>
-      <p:boldItalic r:id="rId62"/>
+      <p:regular r:id="rId61"/>
+      <p:bold r:id="rId62"/>
+      <p:italic r:id="rId63"/>
+      <p:boldItalic r:id="rId64"/>
     </p:embeddedFont>
     <p:embeddedFont>
       <p:font typeface="Segoe UI Semibold" panose="020B0702040204020203" pitchFamily="34" charset="0"/>
-      <p:bold r:id="rId63"/>
-      <p:boldItalic r:id="rId64"/>
+      <p:bold r:id="rId65"/>
+      <p:boldItalic r:id="rId66"/>
     </p:embeddedFont>
     <p:embeddedFont>
       <p:font typeface="Wingdings 3" panose="05040102010807070707" pitchFamily="18" charset="2"/>
-      <p:regular r:id="rId65"/>
+      <p:regular r:id="rId67"/>
     </p:embeddedFont>
   </p:embeddedFontLst>
   <p:custDataLst>
-    <p:tags r:id="rId66"/>
+    <p:tags r:id="rId68"/>
   </p:custDataLst>
   <p:defaultTextStyle>
     <a:defPPr>
@@ -354,7 +350,7 @@
               <a:pPr>
                 <a:defRPr/>
               </a:pPr>
-              <a:t>5/20/2021</a:t>
+              <a:t>3/1/2025</a:t>
             </a:fld>
             <a:endParaRPr lang="en-US"/>
           </a:p>
@@ -1042,7 +1038,7 @@
               <a:pPr>
                 <a:defRPr/>
               </a:pPr>
-              <a:t>5/20/2021</a:t>
+              <a:t>3/1/2025</a:t>
             </a:fld>
             <a:endParaRPr lang="en-US"/>
           </a:p>
@@ -1286,7 +1282,7 @@
           <a:p>
             <a:fld id="{344494C4-6097-4BA9-B81C-8FE8D10E85BA}" type="datetimeFigureOut">
               <a:rPr lang="en-US" smtClean="0"/>
-              <a:t>5/20/2021</a:t>
+              <a:t>3/1/2025</a:t>
             </a:fld>
             <a:endParaRPr lang="en-US"/>
           </a:p>
@@ -1531,7 +1527,7 @@
           <a:p>
             <a:fld id="{344494C4-6097-4BA9-B81C-8FE8D10E85BA}" type="datetimeFigureOut">
               <a:rPr lang="en-US" smtClean="0"/>
-              <a:t>5/20/2021</a:t>
+              <a:t>3/1/2025</a:t>
             </a:fld>
             <a:endParaRPr lang="en-US"/>
           </a:p>
@@ -1911,7 +1907,7 @@
           <a:p>
             <a:fld id="{344494C4-6097-4BA9-B81C-8FE8D10E85BA}" type="datetimeFigureOut">
               <a:rPr lang="en-US" smtClean="0"/>
-              <a:t>5/20/2021</a:t>
+              <a:t>3/1/2025</a:t>
             </a:fld>
             <a:endParaRPr lang="en-US"/>
           </a:p>
@@ -2044,7 +2040,7 @@
           <a:p>
             <a:fld id="{344494C4-6097-4BA9-B81C-8FE8D10E85BA}" type="datetimeFigureOut">
               <a:rPr lang="en-US" smtClean="0"/>
-              <a:t>5/20/2021</a:t>
+              <a:t>3/1/2025</a:t>
             </a:fld>
             <a:endParaRPr lang="en-US"/>
           </a:p>
@@ -2155,7 +2151,7 @@
           <a:p>
             <a:fld id="{344494C4-6097-4BA9-B81C-8FE8D10E85BA}" type="datetimeFigureOut">
               <a:rPr lang="en-US" smtClean="0"/>
-              <a:t>5/20/2021</a:t>
+              <a:t>3/1/2025</a:t>
             </a:fld>
             <a:endParaRPr lang="en-US"/>
           </a:p>
@@ -2446,7 +2442,7 @@
           <a:p>
             <a:fld id="{344494C4-6097-4BA9-B81C-8FE8D10E85BA}" type="datetimeFigureOut">
               <a:rPr lang="en-US" smtClean="0"/>
-              <a:t>5/20/2021</a:t>
+              <a:t>3/1/2025</a:t>
             </a:fld>
             <a:endParaRPr lang="en-US"/>
           </a:p>
@@ -2714,7 +2710,7 @@
           <a:p>
             <a:fld id="{344494C4-6097-4BA9-B81C-8FE8D10E85BA}" type="datetimeFigureOut">
               <a:rPr lang="en-US" smtClean="0"/>
-              <a:t>5/20/2021</a:t>
+              <a:t>3/1/2025</a:t>
             </a:fld>
             <a:endParaRPr lang="en-US"/>
           </a:p>
@@ -2898,7 +2894,7 @@
           <a:p>
             <a:fld id="{344494C4-6097-4BA9-B81C-8FE8D10E85BA}" type="datetimeFigureOut">
               <a:rPr lang="en-US" smtClean="0"/>
-              <a:t>5/20/2021</a:t>
+              <a:t>3/1/2025</a:t>
             </a:fld>
             <a:endParaRPr lang="en-US"/>
           </a:p>
@@ -3092,7 +3088,7 @@
           <a:p>
             <a:fld id="{344494C4-6097-4BA9-B81C-8FE8D10E85BA}" type="datetimeFigureOut">
               <a:rPr lang="en-US" smtClean="0"/>
-              <a:t>5/20/2021</a:t>
+              <a:t>3/1/2025</a:t>
             </a:fld>
             <a:endParaRPr lang="en-US"/>
           </a:p>
@@ -3290,7 +3286,7 @@
           <a:p>
             <a:fld id="{7BF7D500-1223-4445-9EB2-2C72C770F9EB}" type="datetimeFigureOut">
               <a:rPr lang="en-US" smtClean="0"/>
-              <a:t>5/20/2021</a:t>
+              <a:t>3/1/2025</a:t>
             </a:fld>
             <a:endParaRPr lang="en-US"/>
           </a:p>
@@ -3473,7 +3469,7 @@
               <a:pPr>
                 <a:defRPr/>
               </a:pPr>
-              <a:t>5/20/2021</a:t>
+              <a:t>3/1/2025</a:t>
             </a:fld>
             <a:endParaRPr lang="en-US"/>
           </a:p>
@@ -3627,7 +3623,7 @@
           <a:p>
             <a:fld id="{7BF7D500-1223-4445-9EB2-2C72C770F9EB}" type="datetimeFigureOut">
               <a:rPr lang="en-US" smtClean="0"/>
-              <a:t>5/20/2021</a:t>
+              <a:t>3/1/2025</a:t>
             </a:fld>
             <a:endParaRPr lang="en-US"/>
           </a:p>
@@ -3872,7 +3868,7 @@
           <a:p>
             <a:fld id="{7BF7D500-1223-4445-9EB2-2C72C770F9EB}" type="datetimeFigureOut">
               <a:rPr lang="en-US" smtClean="0"/>
-              <a:t>5/20/2021</a:t>
+              <a:t>3/1/2025</a:t>
             </a:fld>
             <a:endParaRPr lang="en-US"/>
           </a:p>
@@ -4101,7 +4097,7 @@
           <a:p>
             <a:fld id="{7BF7D500-1223-4445-9EB2-2C72C770F9EB}" type="datetimeFigureOut">
               <a:rPr lang="en-US" smtClean="0"/>
-              <a:t>5/20/2021</a:t>
+              <a:t>3/1/2025</a:t>
             </a:fld>
             <a:endParaRPr lang="en-US"/>
           </a:p>
@@ -4465,7 +4461,7 @@
           <a:p>
             <a:fld id="{7BF7D500-1223-4445-9EB2-2C72C770F9EB}" type="datetimeFigureOut">
               <a:rPr lang="en-US" smtClean="0"/>
-              <a:t>5/20/2021</a:t>
+              <a:t>3/1/2025</a:t>
             </a:fld>
             <a:endParaRPr lang="en-US"/>
           </a:p>
@@ -4582,7 +4578,7 @@
           <a:p>
             <a:fld id="{7BF7D500-1223-4445-9EB2-2C72C770F9EB}" type="datetimeFigureOut">
               <a:rPr lang="en-US" smtClean="0"/>
-              <a:t>5/20/2021</a:t>
+              <a:t>3/1/2025</a:t>
             </a:fld>
             <a:endParaRPr lang="en-US"/>
           </a:p>
@@ -4677,7 +4673,7 @@
           <a:p>
             <a:fld id="{7BF7D500-1223-4445-9EB2-2C72C770F9EB}" type="datetimeFigureOut">
               <a:rPr lang="en-US" smtClean="0"/>
-              <a:t>5/20/2021</a:t>
+              <a:t>3/1/2025</a:t>
             </a:fld>
             <a:endParaRPr lang="en-US"/>
           </a:p>
@@ -4952,7 +4948,7 @@
           <a:p>
             <a:fld id="{7BF7D500-1223-4445-9EB2-2C72C770F9EB}" type="datetimeFigureOut">
               <a:rPr lang="en-US" smtClean="0"/>
-              <a:t>5/20/2021</a:t>
+              <a:t>3/1/2025</a:t>
             </a:fld>
             <a:endParaRPr lang="en-US"/>
           </a:p>
@@ -5204,7 +5200,7 @@
           <a:p>
             <a:fld id="{7BF7D500-1223-4445-9EB2-2C72C770F9EB}" type="datetimeFigureOut">
               <a:rPr lang="en-US" smtClean="0"/>
-              <a:t>5/20/2021</a:t>
+              <a:t>3/1/2025</a:t>
             </a:fld>
             <a:endParaRPr lang="en-US"/>
           </a:p>
@@ -5372,7 +5368,7 @@
           <a:p>
             <a:fld id="{7BF7D500-1223-4445-9EB2-2C72C770F9EB}" type="datetimeFigureOut">
               <a:rPr lang="en-US" smtClean="0"/>
-              <a:t>5/20/2021</a:t>
+              <a:t>3/1/2025</a:t>
             </a:fld>
             <a:endParaRPr lang="en-US"/>
           </a:p>
@@ -5550,7 +5546,7 @@
           <a:p>
             <a:fld id="{7BF7D500-1223-4445-9EB2-2C72C770F9EB}" type="datetimeFigureOut">
               <a:rPr lang="en-US" smtClean="0"/>
-              <a:t>5/20/2021</a:t>
+              <a:t>3/1/2025</a:t>
             </a:fld>
             <a:endParaRPr lang="en-US"/>
           </a:p>
@@ -5794,7 +5790,7 @@
               <a:pPr>
                 <a:defRPr/>
               </a:pPr>
-              <a:t>5/20/2021</a:t>
+              <a:t>3/1/2025</a:t>
             </a:fld>
             <a:endParaRPr lang="en-US"/>
           </a:p>
@@ -6144,7 +6140,7 @@
               <a:pPr>
                 <a:defRPr/>
               </a:pPr>
-              <a:t>5/20/2021</a:t>
+              <a:t>3/1/2025</a:t>
             </a:fld>
             <a:endParaRPr lang="en-US"/>
           </a:p>
@@ -6308,7 +6304,7 @@
               <a:pPr>
                 <a:defRPr/>
               </a:pPr>
-              <a:t>5/20/2021</a:t>
+              <a:t>3/1/2025</a:t>
             </a:fld>
             <a:endParaRPr lang="en-US"/>
           </a:p>
@@ -6399,7 +6395,7 @@
               <a:pPr>
                 <a:defRPr/>
               </a:pPr>
-              <a:t>5/20/2021</a:t>
+              <a:t>3/1/2025</a:t>
             </a:fld>
             <a:endParaRPr lang="en-US"/>
           </a:p>
@@ -6508,7 +6504,7 @@
               <a:pPr>
                 <a:defRPr/>
               </a:pPr>
-              <a:t>5/20/2021</a:t>
+              <a:t>3/1/2025</a:t>
             </a:fld>
             <a:endParaRPr lang="en-US"/>
           </a:p>
@@ -6693,7 +6689,7 @@
           <a:p>
             <a:fld id="{344494C4-6097-4BA9-B81C-8FE8D10E85BA}" type="datetimeFigureOut">
               <a:rPr lang="en-US" smtClean="0"/>
-              <a:t>5/20/2021</a:t>
+              <a:t>3/1/2025</a:t>
             </a:fld>
             <a:endParaRPr lang="en-US"/>
           </a:p>
@@ -6877,7 +6873,7 @@
           <a:p>
             <a:fld id="{344494C4-6097-4BA9-B81C-8FE8D10E85BA}" type="datetimeFigureOut">
               <a:rPr lang="en-US" smtClean="0"/>
-              <a:t>5/20/2021</a:t>
+              <a:t>3/1/2025</a:t>
             </a:fld>
             <a:endParaRPr lang="en-US"/>
           </a:p>
@@ -7126,7 +7122,7 @@
               <a:pPr>
                 <a:defRPr/>
               </a:pPr>
-              <a:t>5/20/2021</a:t>
+              <a:t>3/1/2025</a:t>
             </a:fld>
             <a:endParaRPr lang="en-US"/>
           </a:p>
@@ -8380,7 +8376,7 @@
           <a:p>
             <a:fld id="{7BF7D500-1223-4445-9EB2-2C72C770F9EB}" type="datetimeFigureOut">
               <a:rPr lang="en-US" smtClean="0"/>
-              <a:t>5/20/2021</a:t>
+              <a:t>3/1/2025</a:t>
             </a:fld>
             <a:endParaRPr lang="en-US"/>
           </a:p>
@@ -9021,6 +9017,839 @@
           <p:cNvPr id="2" name="Title 1">
             <a:extLst>
               <a:ext uri="{FF2B5EF4-FFF2-40B4-BE49-F238E27FC236}">
+                <a16:creationId xmlns:a16="http://schemas.microsoft.com/office/drawing/2014/main" id="{67070C5B-346D-45CA-B66B-C458D94F4EAD}"/>
+              </a:ext>
+            </a:extLst>
+          </p:cNvPr>
+          <p:cNvSpPr>
+            <a:spLocks noGrp="1"/>
+          </p:cNvSpPr>
+          <p:nvPr>
+            <p:ph type="title"/>
+          </p:nvPr>
+        </p:nvSpPr>
+        <p:spPr/>
+        <p:txBody>
+          <a:bodyPr/>
+          <a:lstStyle/>
+          <a:p>
+            <a:r>
+              <a:rPr lang="en-US" dirty="0"/>
+              <a:t>Minimum spanning tree (MST)</a:t>
+            </a:r>
+          </a:p>
+        </p:txBody>
+      </p:sp>
+      <mc:AlternateContent xmlns:mc="http://schemas.openxmlformats.org/markup-compatibility/2006" xmlns:a14="http://schemas.microsoft.com/office/drawing/2010/main">
+        <mc:Choice Requires="a14">
+          <p:sp>
+            <p:nvSpPr>
+              <p:cNvPr id="3" name="Content Placeholder 2">
+                <a:extLst>
+                  <a:ext uri="{FF2B5EF4-FFF2-40B4-BE49-F238E27FC236}">
+                    <a16:creationId xmlns:a16="http://schemas.microsoft.com/office/drawing/2014/main" id="{7A339A9B-13BF-444A-A85E-74A779CB4C43}"/>
+                  </a:ext>
+                </a:extLst>
+              </p:cNvPr>
+              <p:cNvSpPr>
+                <a:spLocks noGrp="1"/>
+              </p:cNvSpPr>
+              <p:nvPr>
+                <p:ph sz="quarter" idx="1"/>
+              </p:nvPr>
+            </p:nvSpPr>
+            <p:spPr/>
+            <p:txBody>
+              <a:bodyPr/>
+              <a:lstStyle/>
+              <a:p>
+                <a:r>
+                  <a:rPr lang="en-US" sz="2400" dirty="0">
+                    <a:solidFill>
+                      <a:srgbClr val="0070C0"/>
+                    </a:solidFill>
+                  </a:rPr>
+                  <a:t>Weight of spanning tree </a:t>
+                </a:r>
+                <a14:m>
+                  <m:oMath xmlns:m="http://schemas.openxmlformats.org/officeDocument/2006/math">
+                    <m:r>
+                      <a:rPr lang="en-US" sz="2400" i="1">
+                        <a:solidFill>
+                          <a:srgbClr val="0070C0"/>
+                        </a:solidFill>
+                        <a:latin typeface="Cambria Math" panose="02040503050406030204" pitchFamily="18" charset="0"/>
+                      </a:rPr>
+                      <m:t>𝑇</m:t>
+                    </m:r>
+                  </m:oMath>
+                </a14:m>
+                <a:r>
+                  <a:rPr lang="en-US" sz="2400" dirty="0">
+                    <a:solidFill>
+                      <a:srgbClr val="0070C0"/>
+                    </a:solidFill>
+                  </a:rPr>
+                  <a:t> </a:t>
+                </a:r>
+                <a:r>
+                  <a:rPr lang="en-US" sz="2400" dirty="0"/>
+                  <a:t>of a weighted graph </a:t>
+                </a:r>
+                <a14:m>
+                  <m:oMath xmlns:m="http://schemas.openxmlformats.org/officeDocument/2006/math">
+                    <m:r>
+                      <a:rPr lang="en-US" sz="2400" i="1">
+                        <a:latin typeface="Cambria Math" panose="02040503050406030204" pitchFamily="18" charset="0"/>
+                      </a:rPr>
+                      <m:t>𝐺</m:t>
+                    </m:r>
+                    <m:r>
+                      <a:rPr lang="en-US" sz="2400" i="1">
+                        <a:latin typeface="Cambria Math" panose="02040503050406030204" pitchFamily="18" charset="0"/>
+                      </a:rPr>
+                      <m:t>=</m:t>
+                    </m:r>
+                    <m:d>
+                      <m:dPr>
+                        <m:ctrlPr>
+                          <a:rPr lang="en-US" sz="2400" i="1">
+                            <a:latin typeface="Cambria Math" panose="02040503050406030204" pitchFamily="18" charset="0"/>
+                          </a:rPr>
+                        </m:ctrlPr>
+                      </m:dPr>
+                      <m:e>
+                        <m:r>
+                          <a:rPr lang="en-US" sz="2400" i="1">
+                            <a:latin typeface="Cambria Math" panose="02040503050406030204" pitchFamily="18" charset="0"/>
+                          </a:rPr>
+                          <m:t>𝑉</m:t>
+                        </m:r>
+                        <m:r>
+                          <a:rPr lang="en-US" sz="2400" i="1">
+                            <a:latin typeface="Cambria Math" panose="02040503050406030204" pitchFamily="18" charset="0"/>
+                          </a:rPr>
+                          <m:t>, </m:t>
+                        </m:r>
+                        <m:r>
+                          <a:rPr lang="en-US" sz="2400" i="1">
+                            <a:latin typeface="Cambria Math" panose="02040503050406030204" pitchFamily="18" charset="0"/>
+                          </a:rPr>
+                          <m:t>𝐸</m:t>
+                        </m:r>
+                      </m:e>
+                    </m:d>
+                  </m:oMath>
+                </a14:m>
+                <a:r>
+                  <a:rPr lang="en-US" sz="2400" dirty="0"/>
+                  <a:t> is</a:t>
+                </a:r>
+              </a:p>
+              <a:p>
+                <a:pPr lvl="1"/>
+                <a:r>
+                  <a:rPr lang="en-US" sz="2200" dirty="0"/>
+                  <a:t>the total weights of all edges in </a:t>
+                </a:r>
+                <a14:m>
+                  <m:oMath xmlns:m="http://schemas.openxmlformats.org/officeDocument/2006/math">
+                    <m:r>
+                      <a:rPr lang="en-US" sz="2200" i="1">
+                        <a:latin typeface="Cambria Math" panose="02040503050406030204" pitchFamily="18" charset="0"/>
+                      </a:rPr>
+                      <m:t>𝑇</m:t>
+                    </m:r>
+                  </m:oMath>
+                </a14:m>
+                <a:r>
+                  <a:rPr lang="en-US" sz="2200" dirty="0"/>
+                  <a:t>, i.e.,  </a:t>
+                </a:r>
+                <a14:m>
+                  <m:oMath xmlns:m="http://schemas.openxmlformats.org/officeDocument/2006/math">
+                    <m:r>
+                      <a:rPr lang="en-US" sz="2200" i="1">
+                        <a:latin typeface="Cambria Math" panose="02040503050406030204" pitchFamily="18" charset="0"/>
+                      </a:rPr>
+                      <m:t>𝜔</m:t>
+                    </m:r>
+                    <m:d>
+                      <m:dPr>
+                        <m:ctrlPr>
+                          <a:rPr lang="en-US" sz="2200" i="1">
+                            <a:latin typeface="Cambria Math" panose="02040503050406030204" pitchFamily="18" charset="0"/>
+                          </a:rPr>
+                        </m:ctrlPr>
+                      </m:dPr>
+                      <m:e>
+                        <m:r>
+                          <a:rPr lang="en-US" sz="2200" i="1">
+                            <a:latin typeface="Cambria Math" panose="02040503050406030204" pitchFamily="18" charset="0"/>
+                          </a:rPr>
+                          <m:t>𝑇</m:t>
+                        </m:r>
+                      </m:e>
+                    </m:d>
+                    <m:r>
+                      <a:rPr lang="en-US" sz="2200" i="1">
+                        <a:latin typeface="Cambria Math" panose="02040503050406030204" pitchFamily="18" charset="0"/>
+                      </a:rPr>
+                      <m:t>=</m:t>
+                    </m:r>
+                    <m:nary>
+                      <m:naryPr>
+                        <m:chr m:val="∑"/>
+                        <m:supHide m:val="on"/>
+                        <m:ctrlPr>
+                          <a:rPr lang="en-US" sz="2200" i="1">
+                            <a:latin typeface="Cambria Math" panose="02040503050406030204" pitchFamily="18" charset="0"/>
+                          </a:rPr>
+                        </m:ctrlPr>
+                      </m:naryPr>
+                      <m:sub>
+                        <m:r>
+                          <a:rPr lang="en-US" sz="2200" i="1">
+                            <a:latin typeface="Cambria Math" panose="02040503050406030204" pitchFamily="18" charset="0"/>
+                          </a:rPr>
+                          <m:t>𝑒</m:t>
+                        </m:r>
+                        <m:r>
+                          <a:rPr lang="en-US" sz="2200" i="1">
+                            <a:latin typeface="Cambria Math" panose="02040503050406030204" pitchFamily="18" charset="0"/>
+                          </a:rPr>
+                          <m:t>∈</m:t>
+                        </m:r>
+                        <m:r>
+                          <a:rPr lang="en-US" sz="2200" i="1">
+                            <a:latin typeface="Cambria Math" panose="02040503050406030204" pitchFamily="18" charset="0"/>
+                          </a:rPr>
+                          <m:t>𝑇</m:t>
+                        </m:r>
+                      </m:sub>
+                      <m:sup/>
+                      <m:e>
+                        <m:r>
+                          <a:rPr lang="en-US" sz="2200" i="1">
+                            <a:latin typeface="Cambria Math" panose="02040503050406030204" pitchFamily="18" charset="0"/>
+                          </a:rPr>
+                          <m:t>𝜔</m:t>
+                        </m:r>
+                        <m:r>
+                          <a:rPr lang="en-US" sz="2200" i="1">
+                            <a:latin typeface="Cambria Math" panose="02040503050406030204" pitchFamily="18" charset="0"/>
+                          </a:rPr>
+                          <m:t>(</m:t>
+                        </m:r>
+                        <m:r>
+                          <a:rPr lang="en-US" sz="2200" i="1">
+                            <a:latin typeface="Cambria Math" panose="02040503050406030204" pitchFamily="18" charset="0"/>
+                          </a:rPr>
+                          <m:t>𝑒</m:t>
+                        </m:r>
+                        <m:r>
+                          <a:rPr lang="en-US" sz="2200" i="1">
+                            <a:latin typeface="Cambria Math" panose="02040503050406030204" pitchFamily="18" charset="0"/>
+                          </a:rPr>
+                          <m:t>)</m:t>
+                        </m:r>
+                      </m:e>
+                    </m:nary>
+                    <m:r>
+                      <a:rPr lang="en-US" sz="2200">
+                        <a:latin typeface="Cambria Math" panose="02040503050406030204" pitchFamily="18" charset="0"/>
+                      </a:rPr>
+                      <m:t>, </m:t>
+                    </m:r>
+                  </m:oMath>
+                </a14:m>
+                <a:endParaRPr lang="en-US" sz="2200" dirty="0"/>
+              </a:p>
+              <a:p>
+                <a:pPr lvl="1"/>
+                <a:r>
+                  <a:rPr lang="en-US" sz="2200" dirty="0"/>
+                  <a:t>where </a:t>
+                </a:r>
+                <a14:m>
+                  <m:oMath xmlns:m="http://schemas.openxmlformats.org/officeDocument/2006/math">
+                    <m:r>
+                      <a:rPr lang="en-US" sz="2200" i="1">
+                        <a:latin typeface="Cambria Math" panose="02040503050406030204" pitchFamily="18" charset="0"/>
+                      </a:rPr>
+                      <m:t>𝜔</m:t>
+                    </m:r>
+                    <m:r>
+                      <a:rPr lang="en-US" sz="2200" i="1">
+                        <a:latin typeface="Cambria Math" panose="02040503050406030204" pitchFamily="18" charset="0"/>
+                      </a:rPr>
+                      <m:t>:</m:t>
+                    </m:r>
+                    <m:r>
+                      <a:rPr lang="en-US" sz="2200" i="1">
+                        <a:latin typeface="Cambria Math" panose="02040503050406030204" pitchFamily="18" charset="0"/>
+                      </a:rPr>
+                      <m:t>𝐸</m:t>
+                    </m:r>
+                    <m:r>
+                      <a:rPr lang="en-US" sz="2200" i="1">
+                        <a:latin typeface="Cambria Math" panose="02040503050406030204" pitchFamily="18" charset="0"/>
+                      </a:rPr>
+                      <m:t>→</m:t>
+                    </m:r>
+                    <m:r>
+                      <a:rPr lang="en-US" sz="2200" i="1">
+                        <a:latin typeface="Cambria Math" panose="02040503050406030204" pitchFamily="18" charset="0"/>
+                      </a:rPr>
+                      <m:t>𝑅</m:t>
+                    </m:r>
+                  </m:oMath>
+                </a14:m>
+                <a:r>
+                  <a:rPr lang="en-US" sz="2000" dirty="0"/>
+                  <a:t> is the edge weights associated to </a:t>
+                </a:r>
+                <a14:m>
+                  <m:oMath xmlns:m="http://schemas.openxmlformats.org/officeDocument/2006/math">
+                    <m:r>
+                      <a:rPr lang="en-US" sz="2000" i="1">
+                        <a:latin typeface="Cambria Math" panose="02040503050406030204" pitchFamily="18" charset="0"/>
+                      </a:rPr>
+                      <m:t>𝐺</m:t>
+                    </m:r>
+                    <m:r>
+                      <a:rPr lang="en-US" sz="2000" i="1">
+                        <a:latin typeface="Cambria Math" panose="02040503050406030204" pitchFamily="18" charset="0"/>
+                      </a:rPr>
+                      <m:t>. </m:t>
+                    </m:r>
+                  </m:oMath>
+                </a14:m>
+                <a:endParaRPr lang="en-US" sz="2200" dirty="0"/>
+              </a:p>
+              <a:p>
+                <a:pPr lvl="1"/>
+                <a:endParaRPr lang="en-US" sz="1000" dirty="0"/>
+              </a:p>
+              <a:p>
+                <a:r>
+                  <a:rPr lang="en-US" sz="2500" dirty="0"/>
+                  <a:t>A </a:t>
+                </a:r>
+                <a:r>
+                  <a:rPr lang="en-US" sz="2500" dirty="0">
+                    <a:solidFill>
+                      <a:srgbClr val="0070C0"/>
+                    </a:solidFill>
+                  </a:rPr>
+                  <a:t>minimum spanning tree</a:t>
+                </a:r>
+                <a:r>
+                  <a:rPr lang="en-US" sz="2500" dirty="0"/>
+                  <a:t> (</a:t>
+                </a:r>
+                <a:r>
+                  <a:rPr lang="en-US" sz="2500" dirty="0">
+                    <a:solidFill>
+                      <a:srgbClr val="0070C0"/>
+                    </a:solidFill>
+                  </a:rPr>
+                  <a:t>MST</a:t>
+                </a:r>
+                <a:r>
+                  <a:rPr lang="en-US" sz="2500" dirty="0"/>
+                  <a:t>) </a:t>
+                </a:r>
+                <a:r>
+                  <a:rPr lang="en-US" sz="2400" dirty="0"/>
+                  <a:t>of a weighted graph </a:t>
+                </a:r>
+                <a14:m>
+                  <m:oMath xmlns:m="http://schemas.openxmlformats.org/officeDocument/2006/math">
+                    <m:r>
+                      <a:rPr lang="en-US" sz="2400" i="1">
+                        <a:latin typeface="Cambria Math" panose="02040503050406030204" pitchFamily="18" charset="0"/>
+                      </a:rPr>
+                      <m:t>𝐺</m:t>
+                    </m:r>
+                    <m:r>
+                      <a:rPr lang="en-US" sz="2400" i="1">
+                        <a:latin typeface="Cambria Math" panose="02040503050406030204" pitchFamily="18" charset="0"/>
+                      </a:rPr>
+                      <m:t>=</m:t>
+                    </m:r>
+                    <m:d>
+                      <m:dPr>
+                        <m:ctrlPr>
+                          <a:rPr lang="en-US" sz="2400" i="1">
+                            <a:latin typeface="Cambria Math" panose="02040503050406030204" pitchFamily="18" charset="0"/>
+                          </a:rPr>
+                        </m:ctrlPr>
+                      </m:dPr>
+                      <m:e>
+                        <m:r>
+                          <a:rPr lang="en-US" sz="2400" i="1">
+                            <a:latin typeface="Cambria Math" panose="02040503050406030204" pitchFamily="18" charset="0"/>
+                          </a:rPr>
+                          <m:t>𝑉</m:t>
+                        </m:r>
+                        <m:r>
+                          <a:rPr lang="en-US" sz="2400" i="1">
+                            <a:latin typeface="Cambria Math" panose="02040503050406030204" pitchFamily="18" charset="0"/>
+                          </a:rPr>
+                          <m:t>, </m:t>
+                        </m:r>
+                        <m:r>
+                          <a:rPr lang="en-US" sz="2400" i="1">
+                            <a:latin typeface="Cambria Math" panose="02040503050406030204" pitchFamily="18" charset="0"/>
+                          </a:rPr>
+                          <m:t>𝐸</m:t>
+                        </m:r>
+                      </m:e>
+                    </m:d>
+                  </m:oMath>
+                </a14:m>
+                <a:r>
+                  <a:rPr lang="en-US" sz="2400" dirty="0"/>
+                  <a:t> is a spanning tree with smallest possible weight. </a:t>
+                </a:r>
+              </a:p>
+              <a:p>
+                <a:pPr lvl="1"/>
+                <a:endParaRPr lang="en-US" sz="2200" dirty="0"/>
+              </a:p>
+              <a:p>
+                <a:endParaRPr lang="en-US" sz="2500" dirty="0"/>
+              </a:p>
+              <a:p>
+                <a:endParaRPr lang="en-US" sz="2100" dirty="0"/>
+              </a:p>
+              <a:p>
+                <a:endParaRPr lang="en-US" sz="2100" dirty="0"/>
+              </a:p>
+            </p:txBody>
+          </p:sp>
+        </mc:Choice>
+        <mc:Fallback xmlns="">
+          <p:sp>
+            <p:nvSpPr>
+              <p:cNvPr id="3" name="Content Placeholder 2">
+                <a:extLst>
+                  <a:ext uri="{FF2B5EF4-FFF2-40B4-BE49-F238E27FC236}">
+                    <a16:creationId xmlns:a16="http://schemas.microsoft.com/office/drawing/2014/main" id="{7A339A9B-13BF-444A-A85E-74A779CB4C43}"/>
+                  </a:ext>
+                </a:extLst>
+              </p:cNvPr>
+              <p:cNvSpPr>
+                <a:spLocks noGrp="1" noRot="1" noChangeAspect="1" noMove="1" noResize="1" noEditPoints="1" noAdjustHandles="1" noChangeArrowheads="1" noChangeShapeType="1" noTextEdit="1"/>
+              </p:cNvSpPr>
+              <p:nvPr>
+                <p:ph sz="quarter" idx="1"/>
+              </p:nvPr>
+            </p:nvSpPr>
+            <p:spPr>
+              <a:blipFill>
+                <a:blip r:embed="rId2"/>
+                <a:stretch>
+                  <a:fillRect l="-593" t="-2346"/>
+                </a:stretch>
+              </a:blipFill>
+            </p:spPr>
+            <p:txBody>
+              <a:bodyPr/>
+              <a:lstStyle/>
+              <a:p>
+                <a:r>
+                  <a:rPr lang="en-US">
+                    <a:noFill/>
+                  </a:rPr>
+                  <a:t> </a:t>
+                </a:r>
+              </a:p>
+            </p:txBody>
+          </p:sp>
+        </mc:Fallback>
+      </mc:AlternateContent>
+      <p:pic>
+        <p:nvPicPr>
+          <p:cNvPr id="4" name="Picture 3">
+            <a:extLst>
+              <a:ext uri="{FF2B5EF4-FFF2-40B4-BE49-F238E27FC236}">
+                <a16:creationId xmlns:a16="http://schemas.microsoft.com/office/drawing/2014/main" id="{CAEFCEBE-F103-4678-959D-8311653C67CA}"/>
+              </a:ext>
+            </a:extLst>
+          </p:cNvPr>
+          <p:cNvPicPr>
+            <a:picLocks noChangeAspect="1" noChangeArrowheads="1"/>
+          </p:cNvPicPr>
+          <p:nvPr/>
+        </p:nvPicPr>
+        <p:blipFill>
+          <a:blip r:embed="rId3">
+            <a:extLst>
+              <a:ext uri="{28A0092B-C50C-407E-A947-70E740481C1C}">
+                <a14:useLocalDpi xmlns:a14="http://schemas.microsoft.com/office/drawing/2010/main" val="0"/>
+              </a:ext>
+            </a:extLst>
+          </a:blip>
+          <a:srcRect/>
+          <a:stretch>
+            <a:fillRect/>
+          </a:stretch>
+        </p:blipFill>
+        <p:spPr bwMode="auto">
+          <a:xfrm>
+            <a:off x="1676400" y="3646011"/>
+            <a:ext cx="6203950" cy="2887436"/>
+          </a:xfrm>
+          <a:prstGeom prst="rect">
+            <a:avLst/>
+          </a:prstGeom>
+          <a:noFill/>
+          <a:extLst>
+            <a:ext uri="{909E8E84-426E-40DD-AFC4-6F175D3DCCD1}">
+              <a14:hiddenFill xmlns:a14="http://schemas.microsoft.com/office/drawing/2010/main">
+                <a:solidFill>
+                  <a:srgbClr val="FFFFFF"/>
+                </a:solidFill>
+              </a14:hiddenFill>
+            </a:ext>
+          </a:extLst>
+        </p:spPr>
+      </p:pic>
+      <p:sp>
+        <p:nvSpPr>
+          <p:cNvPr id="5" name="TextBox 4">
+            <a:extLst>
+              <a:ext uri="{FF2B5EF4-FFF2-40B4-BE49-F238E27FC236}">
+                <a16:creationId xmlns:a16="http://schemas.microsoft.com/office/drawing/2014/main" id="{C1E6197E-9A25-411F-8690-F061E475FB0A}"/>
+              </a:ext>
+            </a:extLst>
+          </p:cNvPr>
+          <p:cNvSpPr txBox="1"/>
+          <p:nvPr/>
+        </p:nvSpPr>
+        <p:spPr>
+          <a:xfrm>
+            <a:off x="8035378" y="4038601"/>
+            <a:ext cx="2209800" cy="646331"/>
+          </a:xfrm>
+          <a:prstGeom prst="rect">
+            <a:avLst/>
+          </a:prstGeom>
+          <a:noFill/>
+          <a:ln w="15875">
+            <a:solidFill>
+              <a:schemeClr val="tx1"/>
+            </a:solidFill>
+          </a:ln>
+        </p:spPr>
+        <p:txBody>
+          <a:bodyPr wrap="square" rtlCol="0">
+            <a:spAutoFit/>
+          </a:bodyPr>
+          <a:lstStyle/>
+          <a:p>
+            <a:r>
+              <a:rPr lang="en-US" dirty="0"/>
+              <a:t>Weight of this spanning tree:  43</a:t>
+            </a:r>
+          </a:p>
+        </p:txBody>
+      </p:sp>
+      <p:sp>
+        <p:nvSpPr>
+          <p:cNvPr id="6" name="TextBox 5">
+            <a:extLst>
+              <a:ext uri="{FF2B5EF4-FFF2-40B4-BE49-F238E27FC236}">
+                <a16:creationId xmlns:a16="http://schemas.microsoft.com/office/drawing/2014/main" id="{CE0051AE-C1BA-4DDA-A532-3F89D1F3FCAF}"/>
+              </a:ext>
+            </a:extLst>
+          </p:cNvPr>
+          <p:cNvSpPr txBox="1"/>
+          <p:nvPr/>
+        </p:nvSpPr>
+        <p:spPr>
+          <a:xfrm>
+            <a:off x="8035378" y="5131939"/>
+            <a:ext cx="2209800" cy="923330"/>
+          </a:xfrm>
+          <a:prstGeom prst="rect">
+            <a:avLst/>
+          </a:prstGeom>
+          <a:noFill/>
+          <a:ln w="15875">
+            <a:solidFill>
+              <a:schemeClr val="tx1"/>
+            </a:solidFill>
+          </a:ln>
+        </p:spPr>
+        <p:txBody>
+          <a:bodyPr wrap="square" rtlCol="0">
+            <a:spAutoFit/>
+          </a:bodyPr>
+          <a:lstStyle/>
+          <a:p>
+            <a:r>
+              <a:rPr lang="en-US" dirty="0"/>
+              <a:t>Turns out this is also a minimum spanning tree. </a:t>
+            </a:r>
+          </a:p>
+        </p:txBody>
+      </p:sp>
+    </p:spTree>
+    <p:extLst>
+      <p:ext uri="{BB962C8B-B14F-4D97-AF65-F5344CB8AC3E}">
+        <p14:creationId xmlns:p14="http://schemas.microsoft.com/office/powerpoint/2010/main" val="2401366680"/>
+      </p:ext>
+    </p:extLst>
+  </p:cSld>
+  <p:clrMapOvr>
+    <a:masterClrMapping/>
+  </p:clrMapOvr>
+  <p:timing>
+    <p:tnLst>
+      <p:par>
+        <p:cTn id="1" dur="indefinite" restart="never" nodeType="tmRoot">
+          <p:childTnLst>
+            <p:seq concurrent="1" nextAc="seek">
+              <p:cTn id="2" dur="indefinite" nodeType="mainSeq">
+                <p:childTnLst>
+                  <p:par>
+                    <p:cTn id="3" fill="hold">
+                      <p:stCondLst>
+                        <p:cond delay="indefinite"/>
+                      </p:stCondLst>
+                      <p:childTnLst>
+                        <p:par>
+                          <p:cTn id="4" fill="hold">
+                            <p:stCondLst>
+                              <p:cond delay="0"/>
+                            </p:stCondLst>
+                            <p:childTnLst>
+                              <p:par>
+                                <p:cTn id="5" presetID="1" presetClass="entr" presetSubtype="0" fill="hold" nodeType="clickEffect">
+                                  <p:stCondLst>
+                                    <p:cond delay="0"/>
+                                  </p:stCondLst>
+                                  <p:childTnLst>
+                                    <p:set>
+                                      <p:cBhvr>
+                                        <p:cTn id="6" dur="1" fill="hold">
+                                          <p:stCondLst>
+                                            <p:cond delay="0"/>
+                                          </p:stCondLst>
+                                        </p:cTn>
+                                        <p:tgtEl>
+                                          <p:spTgt spid="4"/>
+                                        </p:tgtEl>
+                                        <p:attrNameLst>
+                                          <p:attrName>style.visibility</p:attrName>
+                                        </p:attrNameLst>
+                                      </p:cBhvr>
+                                      <p:to>
+                                        <p:strVal val="visible"/>
+                                      </p:to>
+                                    </p:set>
+                                  </p:childTnLst>
+                                </p:cTn>
+                              </p:par>
+                            </p:childTnLst>
+                          </p:cTn>
+                        </p:par>
+                      </p:childTnLst>
+                    </p:cTn>
+                  </p:par>
+                  <p:par>
+                    <p:cTn id="7" fill="hold">
+                      <p:stCondLst>
+                        <p:cond delay="indefinite"/>
+                      </p:stCondLst>
+                      <p:childTnLst>
+                        <p:par>
+                          <p:cTn id="8" fill="hold">
+                            <p:stCondLst>
+                              <p:cond delay="0"/>
+                            </p:stCondLst>
+                            <p:childTnLst>
+                              <p:par>
+                                <p:cTn id="9" presetID="1" presetClass="entr" presetSubtype="0" fill="hold" grpId="0" nodeType="clickEffect">
+                                  <p:stCondLst>
+                                    <p:cond delay="0"/>
+                                  </p:stCondLst>
+                                  <p:childTnLst>
+                                    <p:set>
+                                      <p:cBhvr>
+                                        <p:cTn id="10" dur="1" fill="hold">
+                                          <p:stCondLst>
+                                            <p:cond delay="0"/>
+                                          </p:stCondLst>
+                                        </p:cTn>
+                                        <p:tgtEl>
+                                          <p:spTgt spid="5"/>
+                                        </p:tgtEl>
+                                        <p:attrNameLst>
+                                          <p:attrName>style.visibility</p:attrName>
+                                        </p:attrNameLst>
+                                      </p:cBhvr>
+                                      <p:to>
+                                        <p:strVal val="visible"/>
+                                      </p:to>
+                                    </p:set>
+                                  </p:childTnLst>
+                                </p:cTn>
+                              </p:par>
+                            </p:childTnLst>
+                          </p:cTn>
+                        </p:par>
+                      </p:childTnLst>
+                    </p:cTn>
+                  </p:par>
+                  <p:par>
+                    <p:cTn id="11" fill="hold">
+                      <p:stCondLst>
+                        <p:cond delay="indefinite"/>
+                      </p:stCondLst>
+                      <p:childTnLst>
+                        <p:par>
+                          <p:cTn id="12" fill="hold">
+                            <p:stCondLst>
+                              <p:cond delay="0"/>
+                            </p:stCondLst>
+                            <p:childTnLst>
+                              <p:par>
+                                <p:cTn id="13" presetID="1" presetClass="entr" presetSubtype="0" fill="hold" nodeType="clickEffect">
+                                  <p:stCondLst>
+                                    <p:cond delay="0"/>
+                                  </p:stCondLst>
+                                  <p:childTnLst>
+                                    <p:set>
+                                      <p:cBhvr>
+                                        <p:cTn id="14" dur="1" fill="hold">
+                                          <p:stCondLst>
+                                            <p:cond delay="0"/>
+                                          </p:stCondLst>
+                                        </p:cTn>
+                                        <p:tgtEl>
+                                          <p:spTgt spid="3">
+                                            <p:txEl>
+                                              <p:pRg st="4" end="4"/>
+                                            </p:txEl>
+                                          </p:spTgt>
+                                        </p:tgtEl>
+                                        <p:attrNameLst>
+                                          <p:attrName>style.visibility</p:attrName>
+                                        </p:attrNameLst>
+                                      </p:cBhvr>
+                                      <p:to>
+                                        <p:strVal val="visible"/>
+                                      </p:to>
+                                    </p:set>
+                                  </p:childTnLst>
+                                </p:cTn>
+                              </p:par>
+                            </p:childTnLst>
+                          </p:cTn>
+                        </p:par>
+                      </p:childTnLst>
+                    </p:cTn>
+                  </p:par>
+                  <p:par>
+                    <p:cTn id="15" fill="hold">
+                      <p:stCondLst>
+                        <p:cond delay="indefinite"/>
+                      </p:stCondLst>
+                      <p:childTnLst>
+                        <p:par>
+                          <p:cTn id="16" fill="hold">
+                            <p:stCondLst>
+                              <p:cond delay="0"/>
+                            </p:stCondLst>
+                            <p:childTnLst>
+                              <p:par>
+                                <p:cTn id="17" presetID="1" presetClass="entr" presetSubtype="0" fill="hold" grpId="0" nodeType="clickEffect">
+                                  <p:stCondLst>
+                                    <p:cond delay="0"/>
+                                  </p:stCondLst>
+                                  <p:childTnLst>
+                                    <p:set>
+                                      <p:cBhvr>
+                                        <p:cTn id="18" dur="1" fill="hold">
+                                          <p:stCondLst>
+                                            <p:cond delay="0"/>
+                                          </p:stCondLst>
+                                        </p:cTn>
+                                        <p:tgtEl>
+                                          <p:spTgt spid="6"/>
+                                        </p:tgtEl>
+                                        <p:attrNameLst>
+                                          <p:attrName>style.visibility</p:attrName>
+                                        </p:attrNameLst>
+                                      </p:cBhvr>
+                                      <p:to>
+                                        <p:strVal val="visible"/>
+                                      </p:to>
+                                    </p:set>
+                                  </p:childTnLst>
+                                </p:cTn>
+                              </p:par>
+                            </p:childTnLst>
+                          </p:cTn>
+                        </p:par>
+                      </p:childTnLst>
+                    </p:cTn>
+                  </p:par>
+                </p:childTnLst>
+              </p:cTn>
+              <p:prevCondLst>
+                <p:cond evt="onPrev" delay="0">
+                  <p:tgtEl>
+                    <p:sldTgt/>
+                  </p:tgtEl>
+                </p:cond>
+              </p:prevCondLst>
+              <p:nextCondLst>
+                <p:cond evt="onNext" delay="0">
+                  <p:tgtEl>
+                    <p:sldTgt/>
+                  </p:tgtEl>
+                </p:cond>
+              </p:nextCondLst>
+            </p:seq>
+          </p:childTnLst>
+        </p:cTn>
+      </p:par>
+    </p:tnLst>
+    <p:bldLst>
+      <p:bldP spid="5" grpId="0" animBg="1"/>
+      <p:bldP spid="6" grpId="0" animBg="1"/>
+    </p:bldLst>
+  </p:timing>
+</p:sld>
+</file>
+
+<file path=ppt/slides/slide11.xml><?xml version="1.0" encoding="utf-8"?>
+<p:sld xmlns:a="http://schemas.openxmlformats.org/drawingml/2006/main" xmlns:r="http://schemas.openxmlformats.org/officeDocument/2006/relationships" xmlns:p="http://schemas.openxmlformats.org/presentationml/2006/main">
+  <p:cSld>
+    <p:spTree>
+      <p:nvGrpSpPr>
+        <p:cNvPr id="1" name=""/>
+        <p:cNvGrpSpPr/>
+        <p:nvPr/>
+      </p:nvGrpSpPr>
+      <p:grpSpPr>
+        <a:xfrm>
+          <a:off x="0" y="0"/>
+          <a:ext cx="0" cy="0"/>
+          <a:chOff x="0" y="0"/>
+          <a:chExt cx="0" cy="0"/>
+        </a:xfrm>
+      </p:grpSpPr>
+      <p:sp>
+        <p:nvSpPr>
+          <p:cNvPr id="2" name="Title 1">
+            <a:extLst>
+              <a:ext uri="{FF2B5EF4-FFF2-40B4-BE49-F238E27FC236}">
                 <a16:creationId xmlns:a16="http://schemas.microsoft.com/office/drawing/2014/main" id="{FE07100F-9C2E-4E04-9F1C-236354D54E91}"/>
               </a:ext>
             </a:extLst>
@@ -9207,124 +10036,6 @@
                 <a:blip r:embed="rId2"/>
                 <a:stretch>
                   <a:fillRect l="-667" t="-1111" r="-1333"/>
-                </a:stretch>
-              </a:blipFill>
-            </p:spPr>
-            <p:txBody>
-              <a:bodyPr/>
-              <a:lstStyle/>
-              <a:p>
-                <a:r>
-                  <a:rPr lang="en-US">
-                    <a:noFill/>
-                  </a:rPr>
-                  <a:t> </a:t>
-                </a:r>
-              </a:p>
-            </p:txBody>
-          </p:sp>
-        </mc:Fallback>
-      </mc:AlternateContent>
-      <mc:AlternateContent xmlns:mc="http://schemas.openxmlformats.org/markup-compatibility/2006">
-        <mc:Choice xmlns:a14="http://schemas.microsoft.com/office/drawing/2010/main" Requires="a14">
-          <p:sp>
-            <p:nvSpPr>
-              <p:cNvPr id="4" name="Rectangle 3">
-                <a:extLst>
-                  <a:ext uri="{FF2B5EF4-FFF2-40B4-BE49-F238E27FC236}">
-                    <a16:creationId xmlns:a16="http://schemas.microsoft.com/office/drawing/2014/main" id="{257A6813-1191-4CAD-9663-C08DB0761805}"/>
-                  </a:ext>
-                </a:extLst>
-              </p:cNvPr>
-              <p:cNvSpPr/>
-              <p:nvPr/>
-            </p:nvSpPr>
-            <p:spPr>
-              <a:xfrm>
-                <a:off x="2514600" y="5242560"/>
-                <a:ext cx="7162800" cy="990600"/>
-              </a:xfrm>
-              <a:prstGeom prst="rect">
-                <a:avLst/>
-              </a:prstGeom>
-            </p:spPr>
-            <p:style>
-              <a:lnRef idx="2">
-                <a:schemeClr val="accent1">
-                  <a:shade val="50000"/>
-                </a:schemeClr>
-              </a:lnRef>
-              <a:fillRef idx="1">
-                <a:schemeClr val="accent1"/>
-              </a:fillRef>
-              <a:effectRef idx="0">
-                <a:schemeClr val="accent1"/>
-              </a:effectRef>
-              <a:fontRef idx="minor">
-                <a:schemeClr val="lt1"/>
-              </a:fontRef>
-            </p:style>
-            <p:txBody>
-              <a:bodyPr rtlCol="0" anchor="ctr"/>
-              <a:lstStyle/>
-              <a:p>
-                <a:pPr algn="ctr"/>
-                <a:r>
-                  <a:rPr lang="en-US" sz="2400" dirty="0"/>
-                  <a:t>Exercise:  </a:t>
-                </a:r>
-              </a:p>
-              <a:p>
-                <a:pPr algn="ctr"/>
-                <a:r>
-                  <a:rPr lang="en-US" sz="2200" dirty="0"/>
-                  <a:t>Design an algorithm to compute an MST for a graph where all edges have weight </a:t>
-                </a:r>
-                <a14:m>
-                  <m:oMath xmlns:m="http://schemas.openxmlformats.org/officeDocument/2006/math">
-                    <m:r>
-                      <a:rPr lang="en-US" sz="2200" i="1">
-                        <a:latin typeface="Cambria Math" panose="02040503050406030204" pitchFamily="18" charset="0"/>
-                      </a:rPr>
-                      <m:t>1</m:t>
-                    </m:r>
-                  </m:oMath>
-                </a14:m>
-                <a:r>
-                  <a:rPr lang="en-US" sz="2200" dirty="0"/>
-                  <a:t>  </a:t>
-                </a:r>
-              </a:p>
-            </p:txBody>
-          </p:sp>
-        </mc:Choice>
-        <mc:Fallback>
-          <p:sp>
-            <p:nvSpPr>
-              <p:cNvPr id="4" name="Rectangle 3">
-                <a:extLst>
-                  <a:ext uri="{FF2B5EF4-FFF2-40B4-BE49-F238E27FC236}">
-                    <a16:creationId xmlns:a16="http://schemas.microsoft.com/office/drawing/2014/main" id="{257A6813-1191-4CAD-9663-C08DB0761805}"/>
-                  </a:ext>
-                </a:extLst>
-              </p:cNvPr>
-              <p:cNvSpPr>
-                <a:spLocks noRot="1" noChangeAspect="1" noMove="1" noResize="1" noEditPoints="1" noAdjustHandles="1" noChangeArrowheads="1" noChangeShapeType="1" noTextEdit="1"/>
-              </p:cNvSpPr>
-              <p:nvPr/>
-            </p:nvSpPr>
-            <p:spPr>
-              <a:xfrm>
-                <a:off x="2514600" y="5242560"/>
-                <a:ext cx="7162800" cy="990600"/>
-              </a:xfrm>
-              <a:prstGeom prst="rect">
-                <a:avLst/>
-              </a:prstGeom>
-              <a:blipFill>
-                <a:blip r:embed="rId3"/>
-                <a:stretch>
-                  <a:fillRect t="-10843" b="-17470"/>
                 </a:stretch>
               </a:blipFill>
             </p:spPr>
@@ -9539,51 +10250,6 @@
                       </p:childTnLst>
                     </p:cTn>
                   </p:par>
-                  <p:par>
-                    <p:cTn id="17" fill="hold">
-                      <p:stCondLst>
-                        <p:cond delay="indefinite"/>
-                      </p:stCondLst>
-                      <p:childTnLst>
-                        <p:par>
-                          <p:cTn id="18" fill="hold">
-                            <p:stCondLst>
-                              <p:cond delay="0"/>
-                            </p:stCondLst>
-                            <p:childTnLst>
-                              <p:par>
-                                <p:cTn id="19" presetID="1" presetClass="entr" presetSubtype="0" fill="hold" grpId="0" nodeType="clickEffect">
-                                  <p:stCondLst>
-                                    <p:cond delay="0"/>
-                                  </p:stCondLst>
-                                  <p:childTnLst>
-                                    <p:set>
-                                      <p:cBhvr>
-                                        <p:cTn id="20" dur="1" fill="hold">
-                                          <p:stCondLst>
-                                            <p:cond delay="0"/>
-                                          </p:stCondLst>
-                                        </p:cTn>
-                                        <p:tgtEl>
-                                          <p:spTgt spid="4"/>
-                                        </p:tgtEl>
-                                        <p:attrNameLst>
-                                          <p:attrName>style.visibility</p:attrName>
-                                        </p:attrNameLst>
-                                      </p:cBhvr>
-                                      <p:to>
-                                        <p:strVal val="visible"/>
-                                      </p:to>
-                                    </p:set>
-                                  </p:childTnLst>
-                                </p:cTn>
-                              </p:par>
-                            </p:childTnLst>
-                          </p:cTn>
-                        </p:par>
-                      </p:childTnLst>
-                    </p:cTn>
-                  </p:par>
                 </p:childTnLst>
               </p:cTn>
               <p:prevCondLst>
@@ -9605,14 +10271,750 @@
         </p:cTn>
       </p:par>
     </p:tnLst>
-    <p:bldLst>
-      <p:bldP spid="4" grpId="0" animBg="1"/>
-    </p:bldLst>
   </p:timing>
 </p:sld>
 </file>
 
-<file path=ppt/slides/slide11.xml><?xml version="1.0" encoding="utf-8"?>
+<file path=ppt/slides/slide12.xml><?xml version="1.0" encoding="utf-8"?>
+<p:sld xmlns:a="http://schemas.openxmlformats.org/drawingml/2006/main" xmlns:r="http://schemas.openxmlformats.org/officeDocument/2006/relationships" xmlns:p="http://schemas.openxmlformats.org/presentationml/2006/main">
+  <p:cSld>
+    <p:spTree>
+      <p:nvGrpSpPr>
+        <p:cNvPr id="1" name=""/>
+        <p:cNvGrpSpPr/>
+        <p:nvPr/>
+      </p:nvGrpSpPr>
+      <p:grpSpPr>
+        <a:xfrm>
+          <a:off x="0" y="0"/>
+          <a:ext cx="0" cy="0"/>
+          <a:chOff x="0" y="0"/>
+          <a:chExt cx="0" cy="0"/>
+        </a:xfrm>
+      </p:grpSpPr>
+      <p:sp>
+        <p:nvSpPr>
+          <p:cNvPr id="2" name="Title 1">
+            <a:extLst>
+              <a:ext uri="{FF2B5EF4-FFF2-40B4-BE49-F238E27FC236}">
+                <a16:creationId xmlns:a16="http://schemas.microsoft.com/office/drawing/2014/main" id="{CABF4D65-7A91-F9FD-355F-FF7199017CB1}"/>
+              </a:ext>
+            </a:extLst>
+          </p:cNvPr>
+          <p:cNvSpPr>
+            <a:spLocks noGrp="1"/>
+          </p:cNvSpPr>
+          <p:nvPr>
+            <p:ph type="title"/>
+          </p:nvPr>
+        </p:nvSpPr>
+        <p:spPr/>
+        <p:txBody>
+          <a:bodyPr/>
+          <a:lstStyle/>
+          <a:p>
+            <a:endParaRPr lang="en-US"/>
+          </a:p>
+        </p:txBody>
+      </p:sp>
+      <mc:AlternateContent xmlns:mc="http://schemas.openxmlformats.org/markup-compatibility/2006">
+        <mc:Choice xmlns:a14="http://schemas.microsoft.com/office/drawing/2010/main" Requires="a14">
+          <p:sp>
+            <p:nvSpPr>
+              <p:cNvPr id="3" name="Content Placeholder 2">
+                <a:extLst>
+                  <a:ext uri="{FF2B5EF4-FFF2-40B4-BE49-F238E27FC236}">
+                    <a16:creationId xmlns:a16="http://schemas.microsoft.com/office/drawing/2014/main" id="{29112830-963F-F89B-43C6-06BF47F29DA9}"/>
+                  </a:ext>
+                </a:extLst>
+              </p:cNvPr>
+              <p:cNvSpPr>
+                <a:spLocks noGrp="1"/>
+              </p:cNvSpPr>
+              <p:nvPr>
+                <p:ph sz="quarter" idx="1"/>
+              </p:nvPr>
+            </p:nvSpPr>
+            <p:spPr>
+              <a:xfrm>
+                <a:off x="597159" y="2133600"/>
+                <a:ext cx="10972800" cy="1600200"/>
+              </a:xfrm>
+              <a:ln w="22225">
+                <a:solidFill>
+                  <a:schemeClr val="accent1"/>
+                </a:solidFill>
+              </a:ln>
+            </p:spPr>
+            <p:txBody>
+              <a:bodyPr/>
+              <a:lstStyle/>
+              <a:p>
+                <a:pPr marL="0" indent="0" algn="ctr">
+                  <a:buNone/>
+                </a:pPr>
+                <a:r>
+                  <a:rPr lang="en-US" sz="3600" b="1" dirty="0">
+                    <a:solidFill>
+                      <a:srgbClr val="0070C0"/>
+                    </a:solidFill>
+                  </a:rPr>
+                  <a:t>Exercise: </a:t>
+                </a:r>
+              </a:p>
+              <a:p>
+                <a:pPr marL="0" indent="0" algn="ctr">
+                  <a:buNone/>
+                </a:pPr>
+                <a:r>
+                  <a:rPr lang="en-US" dirty="0"/>
+                  <a:t>Design </a:t>
+                </a:r>
+                <a:r>
+                  <a:rPr lang="en-US" sz="2800" dirty="0"/>
+                  <a:t>an efficient algorithm to compute an MST for a graph where all edges have weight </a:t>
+                </a:r>
+                <a14:m>
+                  <m:oMath xmlns:m="http://schemas.openxmlformats.org/officeDocument/2006/math">
+                    <m:r>
+                      <a:rPr lang="en-US" sz="2800" i="1">
+                        <a:latin typeface="Cambria Math" panose="02040503050406030204" pitchFamily="18" charset="0"/>
+                      </a:rPr>
+                      <m:t>1</m:t>
+                    </m:r>
+                  </m:oMath>
+                </a14:m>
+                <a:r>
+                  <a:rPr lang="en-US" dirty="0"/>
+                  <a:t> </a:t>
+                </a:r>
+              </a:p>
+            </p:txBody>
+          </p:sp>
+        </mc:Choice>
+        <mc:Fallback>
+          <p:sp>
+            <p:nvSpPr>
+              <p:cNvPr id="3" name="Content Placeholder 2">
+                <a:extLst>
+                  <a:ext uri="{FF2B5EF4-FFF2-40B4-BE49-F238E27FC236}">
+                    <a16:creationId xmlns:a16="http://schemas.microsoft.com/office/drawing/2014/main" id="{29112830-963F-F89B-43C6-06BF47F29DA9}"/>
+                  </a:ext>
+                </a:extLst>
+              </p:cNvPr>
+              <p:cNvSpPr>
+                <a:spLocks noGrp="1" noRot="1" noChangeAspect="1" noMove="1" noResize="1" noEditPoints="1" noAdjustHandles="1" noChangeArrowheads="1" noChangeShapeType="1" noTextEdit="1"/>
+              </p:cNvSpPr>
+              <p:nvPr>
+                <p:ph sz="quarter" idx="1"/>
+              </p:nvPr>
+            </p:nvSpPr>
+            <p:spPr>
+              <a:xfrm>
+                <a:off x="597159" y="2133600"/>
+                <a:ext cx="10972800" cy="1600200"/>
+              </a:xfrm>
+              <a:blipFill>
+                <a:blip r:embed="rId2"/>
+                <a:stretch>
+                  <a:fillRect t="-4869" b="-7865"/>
+                </a:stretch>
+              </a:blipFill>
+              <a:ln w="22225">
+                <a:solidFill>
+                  <a:schemeClr val="accent1"/>
+                </a:solidFill>
+              </a:ln>
+            </p:spPr>
+            <p:txBody>
+              <a:bodyPr/>
+              <a:lstStyle/>
+              <a:p>
+                <a:r>
+                  <a:rPr lang="en-US">
+                    <a:noFill/>
+                  </a:rPr>
+                  <a:t> </a:t>
+                </a:r>
+              </a:p>
+            </p:txBody>
+          </p:sp>
+        </mc:Fallback>
+      </mc:AlternateContent>
+    </p:spTree>
+    <p:extLst>
+      <p:ext uri="{BB962C8B-B14F-4D97-AF65-F5344CB8AC3E}">
+        <p14:creationId xmlns:p14="http://schemas.microsoft.com/office/powerpoint/2010/main" val="1150495077"/>
+      </p:ext>
+    </p:extLst>
+  </p:cSld>
+  <p:clrMapOvr>
+    <a:masterClrMapping/>
+  </p:clrMapOvr>
+</p:sld>
+</file>
+
+<file path=ppt/slides/slide13.xml><?xml version="1.0" encoding="utf-8"?>
+<p:sld xmlns:a="http://schemas.openxmlformats.org/drawingml/2006/main" xmlns:r="http://schemas.openxmlformats.org/officeDocument/2006/relationships" xmlns:p="http://schemas.openxmlformats.org/presentationml/2006/main">
+  <p:cSld>
+    <p:spTree>
+      <p:nvGrpSpPr>
+        <p:cNvPr id="1" name="">
+          <a:extLst>
+            <a:ext uri="{FF2B5EF4-FFF2-40B4-BE49-F238E27FC236}">
+              <a16:creationId xmlns:a16="http://schemas.microsoft.com/office/drawing/2014/main" id="{9C93977D-0943-6011-C179-90F62CB97F8B}"/>
+            </a:ext>
+          </a:extLst>
+        </p:cNvPr>
+        <p:cNvGrpSpPr/>
+        <p:nvPr/>
+      </p:nvGrpSpPr>
+      <p:grpSpPr>
+        <a:xfrm>
+          <a:off x="0" y="0"/>
+          <a:ext cx="0" cy="0"/>
+          <a:chOff x="0" y="0"/>
+          <a:chExt cx="0" cy="0"/>
+        </a:xfrm>
+      </p:grpSpPr>
+      <p:sp>
+        <p:nvSpPr>
+          <p:cNvPr id="2" name="Title 1">
+            <a:extLst>
+              <a:ext uri="{FF2B5EF4-FFF2-40B4-BE49-F238E27FC236}">
+                <a16:creationId xmlns:a16="http://schemas.microsoft.com/office/drawing/2014/main" id="{979361FF-E032-0233-658A-F59EF47C0008}"/>
+              </a:ext>
+            </a:extLst>
+          </p:cNvPr>
+          <p:cNvSpPr>
+            <a:spLocks noGrp="1"/>
+          </p:cNvSpPr>
+          <p:nvPr>
+            <p:ph type="title"/>
+          </p:nvPr>
+        </p:nvSpPr>
+        <p:spPr/>
+        <p:txBody>
+          <a:bodyPr/>
+          <a:lstStyle/>
+          <a:p>
+            <a:endParaRPr lang="en-US"/>
+          </a:p>
+        </p:txBody>
+      </p:sp>
+      <mc:AlternateContent xmlns:mc="http://schemas.openxmlformats.org/markup-compatibility/2006">
+        <mc:Choice xmlns:a14="http://schemas.microsoft.com/office/drawing/2010/main" Requires="a14">
+          <p:sp>
+            <p:nvSpPr>
+              <p:cNvPr id="3" name="Content Placeholder 2">
+                <a:extLst>
+                  <a:ext uri="{FF2B5EF4-FFF2-40B4-BE49-F238E27FC236}">
+                    <a16:creationId xmlns:a16="http://schemas.microsoft.com/office/drawing/2014/main" id="{055B7C2D-AC03-96C9-43EF-04CA30213470}"/>
+                  </a:ext>
+                </a:extLst>
+              </p:cNvPr>
+              <p:cNvSpPr>
+                <a:spLocks noGrp="1"/>
+              </p:cNvSpPr>
+              <p:nvPr>
+                <p:ph sz="quarter" idx="1"/>
+              </p:nvPr>
+            </p:nvSpPr>
+            <p:spPr>
+              <a:xfrm>
+                <a:off x="597159" y="2133600"/>
+                <a:ext cx="10972800" cy="1600200"/>
+              </a:xfrm>
+              <a:ln w="22225">
+                <a:solidFill>
+                  <a:schemeClr val="accent1"/>
+                </a:solidFill>
+              </a:ln>
+            </p:spPr>
+            <p:txBody>
+              <a:bodyPr/>
+              <a:lstStyle/>
+              <a:p>
+                <a:pPr marL="0" indent="0" algn="ctr">
+                  <a:buNone/>
+                </a:pPr>
+                <a:r>
+                  <a:rPr lang="en-US" sz="3600" b="1" dirty="0">
+                    <a:solidFill>
+                      <a:srgbClr val="0070C0"/>
+                    </a:solidFill>
+                  </a:rPr>
+                  <a:t>Exercise: </a:t>
+                </a:r>
+              </a:p>
+              <a:p>
+                <a:pPr marL="0" indent="0" algn="ctr">
+                  <a:buNone/>
+                </a:pPr>
+                <a:r>
+                  <a:rPr lang="en-US" dirty="0"/>
+                  <a:t>Design </a:t>
+                </a:r>
+                <a:r>
+                  <a:rPr lang="en-US" sz="2800" dirty="0"/>
+                  <a:t>an efficient algorithm to compute an MST for a graph where all edges have weight </a:t>
+                </a:r>
+                <a14:m>
+                  <m:oMath xmlns:m="http://schemas.openxmlformats.org/officeDocument/2006/math">
+                    <m:r>
+                      <a:rPr lang="en-US" sz="2800" i="1">
+                        <a:latin typeface="Cambria Math" panose="02040503050406030204" pitchFamily="18" charset="0"/>
+                      </a:rPr>
+                      <m:t>1</m:t>
+                    </m:r>
+                  </m:oMath>
+                </a14:m>
+                <a:r>
+                  <a:rPr lang="en-US" dirty="0"/>
+                  <a:t> </a:t>
+                </a:r>
+              </a:p>
+            </p:txBody>
+          </p:sp>
+        </mc:Choice>
+        <mc:Fallback>
+          <p:sp>
+            <p:nvSpPr>
+              <p:cNvPr id="3" name="Content Placeholder 2">
+                <a:extLst>
+                  <a:ext uri="{FF2B5EF4-FFF2-40B4-BE49-F238E27FC236}">
+                    <a16:creationId xmlns:a16="http://schemas.microsoft.com/office/drawing/2014/main" id="{055B7C2D-AC03-96C9-43EF-04CA30213470}"/>
+                  </a:ext>
+                </a:extLst>
+              </p:cNvPr>
+              <p:cNvSpPr>
+                <a:spLocks noGrp="1" noRot="1" noChangeAspect="1" noMove="1" noResize="1" noEditPoints="1" noAdjustHandles="1" noChangeArrowheads="1" noChangeShapeType="1" noTextEdit="1"/>
+              </p:cNvSpPr>
+              <p:nvPr>
+                <p:ph sz="quarter" idx="1"/>
+              </p:nvPr>
+            </p:nvSpPr>
+            <p:spPr>
+              <a:xfrm>
+                <a:off x="597159" y="2133600"/>
+                <a:ext cx="10972800" cy="1600200"/>
+              </a:xfrm>
+              <a:blipFill>
+                <a:blip r:embed="rId2"/>
+                <a:stretch>
+                  <a:fillRect t="-4869" b="-7865"/>
+                </a:stretch>
+              </a:blipFill>
+              <a:ln w="22225">
+                <a:solidFill>
+                  <a:schemeClr val="accent1"/>
+                </a:solidFill>
+              </a:ln>
+            </p:spPr>
+            <p:txBody>
+              <a:bodyPr/>
+              <a:lstStyle/>
+              <a:p>
+                <a:r>
+                  <a:rPr lang="en-US">
+                    <a:noFill/>
+                  </a:rPr>
+                  <a:t> </a:t>
+                </a:r>
+              </a:p>
+            </p:txBody>
+          </p:sp>
+        </mc:Fallback>
+      </mc:AlternateContent>
+      <mc:AlternateContent xmlns:mc="http://schemas.openxmlformats.org/markup-compatibility/2006">
+        <mc:Choice xmlns:a14="http://schemas.microsoft.com/office/drawing/2010/main" Requires="a14">
+          <p:sp>
+            <p:nvSpPr>
+              <p:cNvPr id="4" name="Content Placeholder 2">
+                <a:extLst>
+                  <a:ext uri="{FF2B5EF4-FFF2-40B4-BE49-F238E27FC236}">
+                    <a16:creationId xmlns:a16="http://schemas.microsoft.com/office/drawing/2014/main" id="{CE10F974-C8D0-CDCA-A0B2-9B4731E3048E}"/>
+                  </a:ext>
+                </a:extLst>
+              </p:cNvPr>
+              <p:cNvSpPr txBox="1">
+                <a:spLocks/>
+              </p:cNvSpPr>
+              <p:nvPr/>
+            </p:nvSpPr>
+            <p:spPr bwMode="auto">
+              <a:xfrm>
+                <a:off x="1905000" y="4800600"/>
+                <a:ext cx="8674359" cy="533400"/>
+              </a:xfrm>
+              <a:prstGeom prst="rect">
+                <a:avLst/>
+              </a:prstGeom>
+              <a:noFill/>
+              <a:ln w="22225">
+                <a:solidFill>
+                  <a:schemeClr val="accent1"/>
+                </a:solidFill>
+                <a:miter lim="800000"/>
+                <a:headEnd/>
+                <a:tailEnd/>
+              </a:ln>
+            </p:spPr>
+            <p:txBody>
+              <a:bodyPr vert="horz" wrap="square" lIns="91440" tIns="45720" rIns="91440" bIns="45720" numCol="1" anchor="t" anchorCtr="0" compatLnSpc="1">
+                <a:prstTxWarp prst="textNoShape">
+                  <a:avLst/>
+                </a:prstTxWarp>
+              </a:bodyPr>
+              <a:lstStyle>
+                <a:lvl1pPr marL="273050" indent="-273050" algn="l" rtl="0" eaLnBrk="0" fontAlgn="base" hangingPunct="0">
+                  <a:spcBef>
+                    <a:spcPts val="600"/>
+                  </a:spcBef>
+                  <a:spcAft>
+                    <a:spcPct val="0"/>
+                  </a:spcAft>
+                  <a:buClr>
+                    <a:schemeClr val="accent1"/>
+                  </a:buClr>
+                  <a:buSzPct val="76000"/>
+                  <a:buFont typeface="Wingdings 3" pitchFamily="18" charset="2"/>
+                  <a:buChar char=""/>
+                  <a:defRPr sz="2600" kern="1200">
+                    <a:solidFill>
+                      <a:schemeClr val="tx1"/>
+                    </a:solidFill>
+                    <a:latin typeface="+mn-lt"/>
+                    <a:ea typeface="+mn-ea"/>
+                    <a:cs typeface="+mn-cs"/>
+                  </a:defRPr>
+                </a:lvl1pPr>
+                <a:lvl2pPr marL="547688" indent="-273050" algn="l" rtl="0" eaLnBrk="0" fontAlgn="base" hangingPunct="0">
+                  <a:spcBef>
+                    <a:spcPts val="500"/>
+                  </a:spcBef>
+                  <a:spcAft>
+                    <a:spcPct val="0"/>
+                  </a:spcAft>
+                  <a:buClr>
+                    <a:schemeClr val="accent2"/>
+                  </a:buClr>
+                  <a:buSzPct val="76000"/>
+                  <a:buFont typeface="Wingdings 3" pitchFamily="18" charset="2"/>
+                  <a:buChar char=""/>
+                  <a:defRPr sz="2300" kern="1200">
+                    <a:solidFill>
+                      <a:schemeClr val="tx2"/>
+                    </a:solidFill>
+                    <a:latin typeface="+mn-lt"/>
+                    <a:ea typeface="+mn-ea"/>
+                    <a:cs typeface="+mn-cs"/>
+                  </a:defRPr>
+                </a:lvl2pPr>
+                <a:lvl3pPr marL="822325" indent="-228600" algn="l" rtl="0" eaLnBrk="0" fontAlgn="base" hangingPunct="0">
+                  <a:spcBef>
+                    <a:spcPts val="500"/>
+                  </a:spcBef>
+                  <a:spcAft>
+                    <a:spcPct val="0"/>
+                  </a:spcAft>
+                  <a:buClr>
+                    <a:srgbClr val="BCBCBC"/>
+                  </a:buClr>
+                  <a:buSzPct val="76000"/>
+                  <a:buFont typeface="Wingdings 3" pitchFamily="18" charset="2"/>
+                  <a:buChar char=""/>
+                  <a:defRPr sz="2000" kern="1200">
+                    <a:solidFill>
+                      <a:schemeClr val="tx1"/>
+                    </a:solidFill>
+                    <a:latin typeface="+mn-lt"/>
+                    <a:ea typeface="+mn-ea"/>
+                    <a:cs typeface="+mn-cs"/>
+                  </a:defRPr>
+                </a:lvl3pPr>
+                <a:lvl4pPr marL="1096963" indent="-228600" algn="l" rtl="0" eaLnBrk="0" fontAlgn="base" hangingPunct="0">
+                  <a:spcBef>
+                    <a:spcPts val="400"/>
+                  </a:spcBef>
+                  <a:spcAft>
+                    <a:spcPct val="0"/>
+                  </a:spcAft>
+                  <a:buClr>
+                    <a:srgbClr val="8BA2B4"/>
+                  </a:buClr>
+                  <a:buSzPct val="70000"/>
+                  <a:buFont typeface="Wingdings" pitchFamily="2" charset="2"/>
+                  <a:buChar char=""/>
+                  <a:defRPr sz="2000" kern="1200">
+                    <a:solidFill>
+                      <a:schemeClr val="tx1"/>
+                    </a:solidFill>
+                    <a:latin typeface="+mn-lt"/>
+                    <a:ea typeface="+mn-ea"/>
+                    <a:cs typeface="+mn-cs"/>
+                  </a:defRPr>
+                </a:lvl4pPr>
+                <a:lvl5pPr marL="1371600" indent="-228600" algn="l" rtl="0" eaLnBrk="0" fontAlgn="base" hangingPunct="0">
+                  <a:spcBef>
+                    <a:spcPts val="300"/>
+                  </a:spcBef>
+                  <a:spcAft>
+                    <a:spcPct val="0"/>
+                  </a:spcAft>
+                  <a:buClr>
+                    <a:schemeClr val="accent2"/>
+                  </a:buClr>
+                  <a:buSzPct val="70000"/>
+                  <a:buFont typeface="Wingdings" pitchFamily="2" charset="2"/>
+                  <a:buChar char=""/>
+                  <a:defRPr sz="1600" kern="1200">
+                    <a:solidFill>
+                      <a:schemeClr val="tx1"/>
+                    </a:solidFill>
+                    <a:latin typeface="+mn-lt"/>
+                    <a:ea typeface="+mn-ea"/>
+                    <a:cs typeface="+mn-cs"/>
+                  </a:defRPr>
+                </a:lvl5pPr>
+                <a:lvl6pPr marL="1645920" indent="-182880" algn="l" rtl="0" eaLnBrk="1" latinLnBrk="0" hangingPunct="1">
+                  <a:spcBef>
+                    <a:spcPts val="300"/>
+                  </a:spcBef>
+                  <a:buClr>
+                    <a:srgbClr val="9FB8CD">
+                      <a:shade val="75000"/>
+                    </a:srgbClr>
+                  </a:buClr>
+                  <a:buSzPct val="75000"/>
+                  <a:buFont typeface="Wingdings 3"/>
+                  <a:buChar char=""/>
+                  <a:defRPr kumimoji="0" lang="en-US" sz="1600" kern="1200" smtClean="0">
+                    <a:solidFill>
+                      <a:schemeClr val="tx1"/>
+                    </a:solidFill>
+                    <a:latin typeface="+mn-lt"/>
+                    <a:ea typeface="+mn-ea"/>
+                    <a:cs typeface="+mn-cs"/>
+                  </a:defRPr>
+                </a:lvl6pPr>
+                <a:lvl7pPr marL="1828800" indent="-182880" algn="l" rtl="0" eaLnBrk="1" latinLnBrk="0" hangingPunct="1">
+                  <a:spcBef>
+                    <a:spcPts val="300"/>
+                  </a:spcBef>
+                  <a:buClr>
+                    <a:srgbClr val="727CA3">
+                      <a:shade val="75000"/>
+                    </a:srgbClr>
+                  </a:buClr>
+                  <a:buSzPct val="75000"/>
+                  <a:buFont typeface="Wingdings 3"/>
+                  <a:buChar char=""/>
+                  <a:defRPr kumimoji="0" lang="en-US" sz="1400" kern="1200" smtClean="0">
+                    <a:solidFill>
+                      <a:schemeClr val="tx1"/>
+                    </a:solidFill>
+                    <a:latin typeface="+mn-lt"/>
+                    <a:ea typeface="+mn-ea"/>
+                    <a:cs typeface="+mn-cs"/>
+                  </a:defRPr>
+                </a:lvl7pPr>
+                <a:lvl8pPr marL="2011680" indent="-182880" algn="l" rtl="0" eaLnBrk="1" latinLnBrk="0" hangingPunct="1">
+                  <a:spcBef>
+                    <a:spcPts val="300"/>
+                  </a:spcBef>
+                  <a:buClr>
+                    <a:prstClr val="white">
+                      <a:shade val="50000"/>
+                    </a:prstClr>
+                  </a:buClr>
+                  <a:buSzPct val="75000"/>
+                  <a:buFont typeface="Wingdings 3"/>
+                  <a:buChar char=""/>
+                  <a:defRPr kumimoji="0" lang="en-US" sz="1400" kern="1200" smtClean="0">
+                    <a:solidFill>
+                      <a:schemeClr val="tx1"/>
+                    </a:solidFill>
+                    <a:latin typeface="+mn-lt"/>
+                    <a:ea typeface="+mn-ea"/>
+                    <a:cs typeface="+mn-cs"/>
+                  </a:defRPr>
+                </a:lvl8pPr>
+                <a:lvl9pPr marL="2194560" indent="-182880" algn="l" rtl="0" eaLnBrk="1" latinLnBrk="0" hangingPunct="1">
+                  <a:spcBef>
+                    <a:spcPts val="300"/>
+                  </a:spcBef>
+                  <a:buClr>
+                    <a:srgbClr val="9FB8CD"/>
+                  </a:buClr>
+                  <a:buSzPct val="75000"/>
+                  <a:buFont typeface="Wingdings 3"/>
+                  <a:buChar char=""/>
+                  <a:defRPr kumimoji="0" lang="en-US" sz="1200" kern="1200" smtClean="0">
+                    <a:solidFill>
+                      <a:schemeClr val="tx1"/>
+                    </a:solidFill>
+                    <a:latin typeface="+mn-lt"/>
+                    <a:ea typeface="+mn-ea"/>
+                    <a:cs typeface="+mn-cs"/>
+                  </a:defRPr>
+                </a:lvl9pPr>
+              </a:lstStyle>
+              <a:p>
+                <a:pPr marL="0" indent="0" algn="ctr">
+                  <a:buFont typeface="Wingdings 3" pitchFamily="18" charset="2"/>
+                  <a:buNone/>
+                </a:pPr>
+                <a:r>
+                  <a:rPr lang="en-US" dirty="0"/>
+                  <a:t>This can be done in time </a:t>
+                </a:r>
+                <a14:m>
+                  <m:oMath xmlns:m="http://schemas.openxmlformats.org/officeDocument/2006/math">
+                    <m:r>
+                      <m:rPr>
+                        <m:sty m:val="p"/>
+                      </m:rPr>
+                      <a:rPr lang="en-US" b="0" i="0" smtClean="0">
+                        <a:latin typeface="Cambria Math" panose="02040503050406030204" pitchFamily="18" charset="0"/>
+                      </a:rPr>
+                      <m:t>Θ</m:t>
+                    </m:r>
+                    <m:d>
+                      <m:dPr>
+                        <m:ctrlPr>
+                          <a:rPr lang="en-US" b="0" i="1" smtClean="0">
+                            <a:latin typeface="Cambria Math" panose="02040503050406030204" pitchFamily="18" charset="0"/>
+                          </a:rPr>
+                        </m:ctrlPr>
+                      </m:dPr>
+                      <m:e>
+                        <m:d>
+                          <m:dPr>
+                            <m:begChr m:val="|"/>
+                            <m:endChr m:val="|"/>
+                            <m:ctrlPr>
+                              <a:rPr lang="en-US" b="0" i="1" smtClean="0">
+                                <a:latin typeface="Cambria Math" panose="02040503050406030204" pitchFamily="18" charset="0"/>
+                              </a:rPr>
+                            </m:ctrlPr>
+                          </m:dPr>
+                          <m:e>
+                            <m:r>
+                              <a:rPr lang="en-US" b="0" i="1" smtClean="0">
+                                <a:latin typeface="Cambria Math" panose="02040503050406030204" pitchFamily="18" charset="0"/>
+                              </a:rPr>
+                              <m:t>𝑉</m:t>
+                            </m:r>
+                          </m:e>
+                        </m:d>
+                        <m:r>
+                          <a:rPr lang="en-US" b="0" i="1" smtClean="0">
+                            <a:latin typeface="Cambria Math" panose="02040503050406030204" pitchFamily="18" charset="0"/>
+                          </a:rPr>
+                          <m:t>+</m:t>
+                        </m:r>
+                        <m:d>
+                          <m:dPr>
+                            <m:begChr m:val="|"/>
+                            <m:endChr m:val="|"/>
+                            <m:ctrlPr>
+                              <a:rPr lang="en-US" b="0" i="1" smtClean="0">
+                                <a:latin typeface="Cambria Math" panose="02040503050406030204" pitchFamily="18" charset="0"/>
+                              </a:rPr>
+                            </m:ctrlPr>
+                          </m:dPr>
+                          <m:e>
+                            <m:r>
+                              <a:rPr lang="en-US" b="0" i="1" smtClean="0">
+                                <a:latin typeface="Cambria Math" panose="02040503050406030204" pitchFamily="18" charset="0"/>
+                              </a:rPr>
+                              <m:t>𝐸</m:t>
+                            </m:r>
+                          </m:e>
+                        </m:d>
+                      </m:e>
+                    </m:d>
+                    <m:r>
+                      <a:rPr lang="en-US" b="0" i="1" smtClean="0">
+                        <a:latin typeface="Cambria Math" panose="02040503050406030204" pitchFamily="18" charset="0"/>
+                      </a:rPr>
+                      <m:t> !</m:t>
+                    </m:r>
+                  </m:oMath>
+                </a14:m>
+                <a:endParaRPr lang="en-US" dirty="0"/>
+              </a:p>
+            </p:txBody>
+          </p:sp>
+        </mc:Choice>
+        <mc:Fallback>
+          <p:sp>
+            <p:nvSpPr>
+              <p:cNvPr id="4" name="Content Placeholder 2">
+                <a:extLst>
+                  <a:ext uri="{FF2B5EF4-FFF2-40B4-BE49-F238E27FC236}">
+                    <a16:creationId xmlns:a16="http://schemas.microsoft.com/office/drawing/2014/main" id="{CE10F974-C8D0-CDCA-A0B2-9B4731E3048E}"/>
+                  </a:ext>
+                </a:extLst>
+              </p:cNvPr>
+              <p:cNvSpPr txBox="1">
+                <a:spLocks noRot="1" noChangeAspect="1" noMove="1" noResize="1" noEditPoints="1" noAdjustHandles="1" noChangeArrowheads="1" noChangeShapeType="1" noTextEdit="1"/>
+              </p:cNvSpPr>
+              <p:nvPr/>
+            </p:nvSpPr>
+            <p:spPr bwMode="auto">
+              <a:xfrm>
+                <a:off x="1905000" y="4800600"/>
+                <a:ext cx="8674359" cy="533400"/>
+              </a:xfrm>
+              <a:prstGeom prst="rect">
+                <a:avLst/>
+              </a:prstGeom>
+              <a:blipFill>
+                <a:blip r:embed="rId3"/>
+                <a:stretch>
+                  <a:fillRect t="-8791" b="-17582"/>
+                </a:stretch>
+              </a:blipFill>
+              <a:ln w="22225">
+                <a:solidFill>
+                  <a:schemeClr val="accent1"/>
+                </a:solidFill>
+                <a:miter lim="800000"/>
+                <a:headEnd/>
+                <a:tailEnd/>
+              </a:ln>
+            </p:spPr>
+            <p:txBody>
+              <a:bodyPr/>
+              <a:lstStyle/>
+              <a:p>
+                <a:r>
+                  <a:rPr lang="en-US">
+                    <a:noFill/>
+                  </a:rPr>
+                  <a:t> </a:t>
+                </a:r>
+              </a:p>
+            </p:txBody>
+          </p:sp>
+        </mc:Fallback>
+      </mc:AlternateContent>
+    </p:spTree>
+    <p:extLst>
+      <p:ext uri="{BB962C8B-B14F-4D97-AF65-F5344CB8AC3E}">
+        <p14:creationId xmlns:p14="http://schemas.microsoft.com/office/powerpoint/2010/main" val="4038233576"/>
+      </p:ext>
+    </p:extLst>
+  </p:cSld>
+  <p:clrMapOvr>
+    <a:masterClrMapping/>
+  </p:clrMapOvr>
+</p:sld>
+</file>
+
+<file path=ppt/slides/slide14.xml><?xml version="1.0" encoding="utf-8"?>
 <p:sld xmlns:a="http://schemas.openxmlformats.org/drawingml/2006/main" xmlns:r="http://schemas.openxmlformats.org/officeDocument/2006/relationships" xmlns:p="http://schemas.openxmlformats.org/presentationml/2006/main">
   <p:cSld>
     <p:spTree>
@@ -9676,7 +11078,7 @@
 </p:sld>
 </file>
 
-<file path=ppt/slides/slide12.xml><?xml version="1.0" encoding="utf-8"?>
+<file path=ppt/slides/slide15.xml><?xml version="1.0" encoding="utf-8"?>
 <p:sld xmlns:a="http://schemas.openxmlformats.org/drawingml/2006/main" xmlns:r="http://schemas.openxmlformats.org/officeDocument/2006/relationships" xmlns:p="http://schemas.openxmlformats.org/presentationml/2006/main">
   <p:cSld>
     <p:spTree>
@@ -9890,7 +11292,7 @@
 </p:sld>
 </file>
 
-<file path=ppt/slides/slide13.xml><?xml version="1.0" encoding="utf-8"?>
+<file path=ppt/slides/slide16.xml><?xml version="1.0" encoding="utf-8"?>
 <p:sld xmlns:a="http://schemas.openxmlformats.org/drawingml/2006/main" xmlns:r="http://schemas.openxmlformats.org/officeDocument/2006/relationships" xmlns:p="http://schemas.openxmlformats.org/presentationml/2006/main">
   <p:cSld>
     <p:spTree>
@@ -10183,7 +11585,7 @@
 </p:sld>
 </file>
 
-<file path=ppt/slides/slide14.xml><?xml version="1.0" encoding="utf-8"?>
+<file path=ppt/slides/slide17.xml><?xml version="1.0" encoding="utf-8"?>
 <p:sld xmlns:a="http://schemas.openxmlformats.org/drawingml/2006/main" xmlns:r="http://schemas.openxmlformats.org/officeDocument/2006/relationships" xmlns:p="http://schemas.openxmlformats.org/presentationml/2006/main">
   <p:cSld>
     <p:spTree>
@@ -10228,8 +11630,8 @@
           </a:p>
         </p:txBody>
       </p:sp>
-      <mc:AlternateContent xmlns:mc="http://schemas.openxmlformats.org/markup-compatibility/2006">
-        <mc:Choice xmlns:a14="http://schemas.microsoft.com/office/drawing/2010/main" Requires="a14">
+      <mc:AlternateContent xmlns:mc="http://schemas.openxmlformats.org/markup-compatibility/2006" xmlns:a14="http://schemas.microsoft.com/office/drawing/2010/main">
+        <mc:Choice Requires="a14">
           <p:sp>
             <p:nvSpPr>
               <p:cNvPr id="3" name="Content Placeholder 2">
@@ -10505,7 +11907,7 @@
             </p:txBody>
           </p:sp>
         </mc:Choice>
-        <mc:Fallback>
+        <mc:Fallback xmlns="">
           <p:sp>
             <p:nvSpPr>
               <p:cNvPr id="3" name="Content Placeholder 2">
@@ -10778,7 +12180,7 @@
 </p:sld>
 </file>
 
-<file path=ppt/slides/slide15.xml><?xml version="1.0" encoding="utf-8"?>
+<file path=ppt/slides/slide18.xml><?xml version="1.0" encoding="utf-8"?>
 <p:sld xmlns:a="http://schemas.openxmlformats.org/drawingml/2006/main" xmlns:r="http://schemas.openxmlformats.org/officeDocument/2006/relationships" xmlns:p="http://schemas.openxmlformats.org/presentationml/2006/main">
   <p:cSld>
     <p:spTree>
@@ -10823,8 +12225,8 @@
           </a:p>
         </p:txBody>
       </p:sp>
-      <mc:AlternateContent xmlns:mc="http://schemas.openxmlformats.org/markup-compatibility/2006">
-        <mc:Choice xmlns:a14="http://schemas.microsoft.com/office/drawing/2010/main" Requires="a14">
+      <mc:AlternateContent xmlns:mc="http://schemas.openxmlformats.org/markup-compatibility/2006" xmlns:a14="http://schemas.microsoft.com/office/drawing/2010/main">
+        <mc:Choice Requires="a14">
           <p:sp>
             <p:nvSpPr>
               <p:cNvPr id="3" name="Content Placeholder 2">
@@ -11103,7 +12505,7 @@
             </p:txBody>
           </p:sp>
         </mc:Choice>
-        <mc:Fallback>
+        <mc:Fallback xmlns="">
           <p:sp>
             <p:nvSpPr>
               <p:cNvPr id="3" name="Content Placeholder 2">
@@ -11152,8 +12554,8 @@
           </p:sp>
         </mc:Fallback>
       </mc:AlternateContent>
-      <mc:AlternateContent xmlns:mc="http://schemas.openxmlformats.org/markup-compatibility/2006">
-        <mc:Choice xmlns:a14="http://schemas.microsoft.com/office/drawing/2010/main" Requires="a14">
+      <mc:AlternateContent xmlns:mc="http://schemas.openxmlformats.org/markup-compatibility/2006" xmlns:a14="http://schemas.microsoft.com/office/drawing/2010/main">
+        <mc:Choice Requires="a14">
           <p:sp>
             <p:nvSpPr>
               <p:cNvPr id="6" name="Content Placeholder 2">
@@ -11734,7 +13136,7 @@
             </p:txBody>
           </p:sp>
         </mc:Choice>
-        <mc:Fallback>
+        <mc:Fallback xmlns="">
           <p:sp>
             <p:nvSpPr>
               <p:cNvPr id="6" name="Content Placeholder 2">
@@ -11939,7 +13341,7 @@
 </p:sld>
 </file>
 
-<file path=ppt/slides/slide16.xml><?xml version="1.0" encoding="utf-8"?>
+<file path=ppt/slides/slide19.xml><?xml version="1.0" encoding="utf-8"?>
 <p:sld xmlns:a="http://schemas.openxmlformats.org/drawingml/2006/main" xmlns:r="http://schemas.openxmlformats.org/officeDocument/2006/relationships" xmlns:p="http://schemas.openxmlformats.org/presentationml/2006/main">
   <p:cSld>
     <p:spTree>
@@ -12003,7 +13405,174 @@
 </p:sld>
 </file>
 
-<file path=ppt/slides/slide17.xml><?xml version="1.0" encoding="utf-8"?>
+<file path=ppt/slides/slide2.xml><?xml version="1.0" encoding="utf-8"?>
+<p:sld xmlns:a="http://schemas.openxmlformats.org/drawingml/2006/main" xmlns:r="http://schemas.openxmlformats.org/officeDocument/2006/relationships" xmlns:p="http://schemas.openxmlformats.org/presentationml/2006/main">
+  <p:cSld>
+    <p:spTree>
+      <p:nvGrpSpPr>
+        <p:cNvPr id="1" name=""/>
+        <p:cNvGrpSpPr/>
+        <p:nvPr/>
+      </p:nvGrpSpPr>
+      <p:grpSpPr>
+        <a:xfrm>
+          <a:off x="0" y="0"/>
+          <a:ext cx="0" cy="0"/>
+          <a:chOff x="0" y="0"/>
+          <a:chExt cx="0" cy="0"/>
+        </a:xfrm>
+      </p:grpSpPr>
+      <p:sp>
+        <p:nvSpPr>
+          <p:cNvPr id="2" name="Title 1">
+            <a:extLst>
+              <a:ext uri="{FF2B5EF4-FFF2-40B4-BE49-F238E27FC236}">
+                <a16:creationId xmlns:a16="http://schemas.microsoft.com/office/drawing/2014/main" id="{603F6649-5A64-45D6-A6CA-8E8A3A6B0CDE}"/>
+              </a:ext>
+            </a:extLst>
+          </p:cNvPr>
+          <p:cNvSpPr>
+            <a:spLocks noGrp="1"/>
+          </p:cNvSpPr>
+          <p:nvPr>
+            <p:ph type="title"/>
+          </p:nvPr>
+        </p:nvSpPr>
+        <p:spPr/>
+        <p:txBody>
+          <a:bodyPr/>
+          <a:lstStyle/>
+          <a:p>
+            <a:r>
+              <a:rPr lang="en-US" dirty="0"/>
+              <a:t>Previously </a:t>
+            </a:r>
+          </a:p>
+        </p:txBody>
+      </p:sp>
+      <p:sp>
+        <p:nvSpPr>
+          <p:cNvPr id="3" name="Content Placeholder 2">
+            <a:extLst>
+              <a:ext uri="{FF2B5EF4-FFF2-40B4-BE49-F238E27FC236}">
+                <a16:creationId xmlns:a16="http://schemas.microsoft.com/office/drawing/2014/main" id="{1C494781-9569-4BCE-B3A3-2C8EB0F996BF}"/>
+              </a:ext>
+            </a:extLst>
+          </p:cNvPr>
+          <p:cNvSpPr>
+            <a:spLocks noGrp="1"/>
+          </p:cNvSpPr>
+          <p:nvPr>
+            <p:ph sz="quarter" idx="1"/>
+          </p:nvPr>
+        </p:nvSpPr>
+        <p:spPr/>
+        <p:txBody>
+          <a:bodyPr/>
+          <a:lstStyle/>
+          <a:p>
+            <a:r>
+              <a:rPr lang="en-US" dirty="0"/>
+              <a:t>Given directed or undirected graphs</a:t>
+            </a:r>
+          </a:p>
+          <a:p>
+            <a:pPr lvl="1"/>
+            <a:r>
+              <a:rPr lang="en-US" dirty="0"/>
+              <a:t>Graph search / traversal strategies (DFS / BFS)</a:t>
+            </a:r>
+          </a:p>
+          <a:p>
+            <a:pPr lvl="1"/>
+            <a:r>
+              <a:rPr lang="en-US" dirty="0"/>
+              <a:t>Single source shortest paths in weighted graphs </a:t>
+            </a:r>
+          </a:p>
+          <a:p>
+            <a:pPr lvl="2"/>
+            <a:r>
+              <a:rPr lang="en-US" dirty="0"/>
+              <a:t>Bellman-Ford algorithm for general graphs </a:t>
+            </a:r>
+          </a:p>
+          <a:p>
+            <a:pPr lvl="2"/>
+            <a:r>
+              <a:rPr lang="en-US" dirty="0"/>
+              <a:t>Dijkstra algorithm for graphs with positive edge weights </a:t>
+            </a:r>
+          </a:p>
+          <a:p>
+            <a:pPr lvl="2"/>
+            <a:endParaRPr lang="en-US" dirty="0"/>
+          </a:p>
+          <a:p>
+            <a:pPr lvl="2"/>
+            <a:endParaRPr lang="en-US" dirty="0"/>
+          </a:p>
+          <a:p>
+            <a:r>
+              <a:rPr lang="en-US" dirty="0"/>
+              <a:t>Today: </a:t>
+            </a:r>
+          </a:p>
+          <a:p>
+            <a:pPr lvl="1"/>
+            <a:r>
+              <a:rPr lang="en-US" dirty="0"/>
+              <a:t>Computing a </a:t>
+            </a:r>
+            <a:r>
+              <a:rPr lang="en-US" dirty="0">
+                <a:solidFill>
+                  <a:srgbClr val="0070C0"/>
+                </a:solidFill>
+              </a:rPr>
+              <a:t>minimum spanning tree</a:t>
+            </a:r>
+            <a:r>
+              <a:rPr lang="en-US" dirty="0"/>
+              <a:t> (</a:t>
+            </a:r>
+            <a:r>
+              <a:rPr lang="en-US" dirty="0">
+                <a:solidFill>
+                  <a:srgbClr val="0070C0"/>
+                </a:solidFill>
+              </a:rPr>
+              <a:t>MST</a:t>
+            </a:r>
+            <a:r>
+              <a:rPr lang="en-US" dirty="0"/>
+              <a:t>) of </a:t>
+            </a:r>
+            <a:r>
+              <a:rPr lang="en-US" dirty="0">
+                <a:solidFill>
+                  <a:srgbClr val="C00000"/>
+                </a:solidFill>
+              </a:rPr>
+              <a:t>an undirected graph </a:t>
+            </a:r>
+          </a:p>
+        </p:txBody>
+      </p:sp>
+    </p:spTree>
+    <p:extLst>
+      <p:ext uri="{BB962C8B-B14F-4D97-AF65-F5344CB8AC3E}">
+        <p14:creationId xmlns:p14="http://schemas.microsoft.com/office/powerpoint/2010/main" val="2750505869"/>
+      </p:ext>
+    </p:extLst>
+  </p:cSld>
+  <p:clrMapOvr>
+    <a:masterClrMapping/>
+  </p:clrMapOvr>
+</p:sld>
+</file>
+
+<file path=ppt/slides/slide20.xml><?xml version="1.0" encoding="utf-8"?>
 <p:sld xmlns:a="http://schemas.openxmlformats.org/drawingml/2006/main" xmlns:r="http://schemas.openxmlformats.org/officeDocument/2006/relationships" xmlns:p="http://schemas.openxmlformats.org/presentationml/2006/main">
   <p:cSld>
     <p:spTree>
@@ -12048,8 +13617,8 @@
           </a:p>
         </p:txBody>
       </p:sp>
-      <mc:AlternateContent xmlns:mc="http://schemas.openxmlformats.org/markup-compatibility/2006">
-        <mc:Choice xmlns:a14="http://schemas.microsoft.com/office/drawing/2010/main" Requires="a14">
+      <mc:AlternateContent xmlns:mc="http://schemas.openxmlformats.org/markup-compatibility/2006" xmlns:a14="http://schemas.microsoft.com/office/drawing/2010/main">
+        <mc:Choice Requires="a14">
           <p:sp>
             <p:nvSpPr>
               <p:cNvPr id="3" name="Content Placeholder 2">
@@ -12228,7 +13797,7 @@
             </p:txBody>
           </p:sp>
         </mc:Choice>
-        <mc:Fallback>
+        <mc:Fallback xmlns="">
           <p:sp>
             <p:nvSpPr>
               <p:cNvPr id="3" name="Content Placeholder 2">
@@ -12272,8 +13841,8 @@
           </p:sp>
         </mc:Fallback>
       </mc:AlternateContent>
-      <mc:AlternateContent xmlns:mc="http://schemas.openxmlformats.org/markup-compatibility/2006">
-        <mc:Choice xmlns:a14="http://schemas.microsoft.com/office/drawing/2010/main" Requires="a14">
+      <mc:AlternateContent xmlns:mc="http://schemas.openxmlformats.org/markup-compatibility/2006" xmlns:a14="http://schemas.microsoft.com/office/drawing/2010/main">
+        <mc:Choice Requires="a14">
           <p:sp>
             <p:nvSpPr>
               <p:cNvPr id="4" name="Content Placeholder 2">
@@ -12589,7 +14158,7 @@
             </p:txBody>
           </p:sp>
         </mc:Choice>
-        <mc:Fallback>
+        <mc:Fallback xmlns="">
           <p:sp>
             <p:nvSpPr>
               <p:cNvPr id="4" name="Content Placeholder 2">
@@ -12812,7 +14381,7 @@
 </p:sld>
 </file>
 
-<file path=ppt/slides/slide18.xml><?xml version="1.0" encoding="utf-8"?>
+<file path=ppt/slides/slide21.xml><?xml version="1.0" encoding="utf-8"?>
 <p:sld xmlns:a="http://schemas.openxmlformats.org/drawingml/2006/main" xmlns:r="http://schemas.openxmlformats.org/officeDocument/2006/relationships" xmlns:p="http://schemas.openxmlformats.org/presentationml/2006/main">
   <p:cSld>
     <p:spTree>
@@ -12983,7 +14552,7 @@
 </p:sld>
 </file>
 
-<file path=ppt/slides/slide19.xml><?xml version="1.0" encoding="utf-8"?>
+<file path=ppt/slides/slide22.xml><?xml version="1.0" encoding="utf-8"?>
 <p:sld xmlns:a="http://schemas.openxmlformats.org/drawingml/2006/main" xmlns:r="http://schemas.openxmlformats.org/officeDocument/2006/relationships" xmlns:p="http://schemas.openxmlformats.org/presentationml/2006/main">
   <p:cSld>
     <p:spTree>
@@ -13120,174 +14689,7 @@
 </p:sld>
 </file>
 
-<file path=ppt/slides/slide2.xml><?xml version="1.0" encoding="utf-8"?>
-<p:sld xmlns:a="http://schemas.openxmlformats.org/drawingml/2006/main" xmlns:r="http://schemas.openxmlformats.org/officeDocument/2006/relationships" xmlns:p="http://schemas.openxmlformats.org/presentationml/2006/main">
-  <p:cSld>
-    <p:spTree>
-      <p:nvGrpSpPr>
-        <p:cNvPr id="1" name=""/>
-        <p:cNvGrpSpPr/>
-        <p:nvPr/>
-      </p:nvGrpSpPr>
-      <p:grpSpPr>
-        <a:xfrm>
-          <a:off x="0" y="0"/>
-          <a:ext cx="0" cy="0"/>
-          <a:chOff x="0" y="0"/>
-          <a:chExt cx="0" cy="0"/>
-        </a:xfrm>
-      </p:grpSpPr>
-      <p:sp>
-        <p:nvSpPr>
-          <p:cNvPr id="2" name="Title 1">
-            <a:extLst>
-              <a:ext uri="{FF2B5EF4-FFF2-40B4-BE49-F238E27FC236}">
-                <a16:creationId xmlns:a16="http://schemas.microsoft.com/office/drawing/2014/main" id="{603F6649-5A64-45D6-A6CA-8E8A3A6B0CDE}"/>
-              </a:ext>
-            </a:extLst>
-          </p:cNvPr>
-          <p:cNvSpPr>
-            <a:spLocks noGrp="1"/>
-          </p:cNvSpPr>
-          <p:nvPr>
-            <p:ph type="title"/>
-          </p:nvPr>
-        </p:nvSpPr>
-        <p:spPr/>
-        <p:txBody>
-          <a:bodyPr/>
-          <a:lstStyle/>
-          <a:p>
-            <a:r>
-              <a:rPr lang="en-US" dirty="0"/>
-              <a:t>Previously </a:t>
-            </a:r>
-          </a:p>
-        </p:txBody>
-      </p:sp>
-      <p:sp>
-        <p:nvSpPr>
-          <p:cNvPr id="3" name="Content Placeholder 2">
-            <a:extLst>
-              <a:ext uri="{FF2B5EF4-FFF2-40B4-BE49-F238E27FC236}">
-                <a16:creationId xmlns:a16="http://schemas.microsoft.com/office/drawing/2014/main" id="{1C494781-9569-4BCE-B3A3-2C8EB0F996BF}"/>
-              </a:ext>
-            </a:extLst>
-          </p:cNvPr>
-          <p:cNvSpPr>
-            <a:spLocks noGrp="1"/>
-          </p:cNvSpPr>
-          <p:nvPr>
-            <p:ph sz="quarter" idx="1"/>
-          </p:nvPr>
-        </p:nvSpPr>
-        <p:spPr/>
-        <p:txBody>
-          <a:bodyPr/>
-          <a:lstStyle/>
-          <a:p>
-            <a:r>
-              <a:rPr lang="en-US" dirty="0"/>
-              <a:t>Given directed or undirected graphs</a:t>
-            </a:r>
-          </a:p>
-          <a:p>
-            <a:pPr lvl="1"/>
-            <a:r>
-              <a:rPr lang="en-US" dirty="0"/>
-              <a:t>Graph search / traversal strategies (DFS / BFS)</a:t>
-            </a:r>
-          </a:p>
-          <a:p>
-            <a:pPr lvl="1"/>
-            <a:r>
-              <a:rPr lang="en-US" dirty="0"/>
-              <a:t>Single source shortest paths in weighted graphs </a:t>
-            </a:r>
-          </a:p>
-          <a:p>
-            <a:pPr lvl="2"/>
-            <a:r>
-              <a:rPr lang="en-US" dirty="0"/>
-              <a:t>Bellman-Ford algorithm for general graphs </a:t>
-            </a:r>
-          </a:p>
-          <a:p>
-            <a:pPr lvl="2"/>
-            <a:r>
-              <a:rPr lang="en-US" dirty="0"/>
-              <a:t>Dijkstra algorithm for graphs with positive edge weights </a:t>
-            </a:r>
-          </a:p>
-          <a:p>
-            <a:pPr lvl="2"/>
-            <a:endParaRPr lang="en-US" dirty="0"/>
-          </a:p>
-          <a:p>
-            <a:pPr lvl="2"/>
-            <a:endParaRPr lang="en-US" dirty="0"/>
-          </a:p>
-          <a:p>
-            <a:r>
-              <a:rPr lang="en-US" dirty="0"/>
-              <a:t>Today: </a:t>
-            </a:r>
-          </a:p>
-          <a:p>
-            <a:pPr lvl="1"/>
-            <a:r>
-              <a:rPr lang="en-US" dirty="0"/>
-              <a:t>Computing a </a:t>
-            </a:r>
-            <a:r>
-              <a:rPr lang="en-US" dirty="0">
-                <a:solidFill>
-                  <a:srgbClr val="0070C0"/>
-                </a:solidFill>
-              </a:rPr>
-              <a:t>minimum spanning tree</a:t>
-            </a:r>
-            <a:r>
-              <a:rPr lang="en-US" dirty="0"/>
-              <a:t> (</a:t>
-            </a:r>
-            <a:r>
-              <a:rPr lang="en-US" dirty="0">
-                <a:solidFill>
-                  <a:srgbClr val="0070C0"/>
-                </a:solidFill>
-              </a:rPr>
-              <a:t>MST</a:t>
-            </a:r>
-            <a:r>
-              <a:rPr lang="en-US" dirty="0"/>
-              <a:t>) of </a:t>
-            </a:r>
-            <a:r>
-              <a:rPr lang="en-US" dirty="0">
-                <a:solidFill>
-                  <a:srgbClr val="C00000"/>
-                </a:solidFill>
-              </a:rPr>
-              <a:t>an undirected graph </a:t>
-            </a:r>
-          </a:p>
-        </p:txBody>
-      </p:sp>
-    </p:spTree>
-    <p:extLst>
-      <p:ext uri="{BB962C8B-B14F-4D97-AF65-F5344CB8AC3E}">
-        <p14:creationId xmlns:p14="http://schemas.microsoft.com/office/powerpoint/2010/main" val="2750505869"/>
-      </p:ext>
-    </p:extLst>
-  </p:cSld>
-  <p:clrMapOvr>
-    <a:masterClrMapping/>
-  </p:clrMapOvr>
-</p:sld>
-</file>
-
-<file path=ppt/slides/slide20.xml><?xml version="1.0" encoding="utf-8"?>
+<file path=ppt/slides/slide23.xml><?xml version="1.0" encoding="utf-8"?>
 <p:sld xmlns:a="http://schemas.openxmlformats.org/drawingml/2006/main" xmlns:r="http://schemas.openxmlformats.org/officeDocument/2006/relationships" xmlns:p="http://schemas.openxmlformats.org/presentationml/2006/main">
   <p:cSld>
     <p:spTree>
@@ -13332,8 +14734,8 @@
           </a:p>
         </p:txBody>
       </p:sp>
-      <mc:AlternateContent xmlns:mc="http://schemas.openxmlformats.org/markup-compatibility/2006">
-        <mc:Choice xmlns:a14="http://schemas.microsoft.com/office/drawing/2010/main" Requires="a14">
+      <mc:AlternateContent xmlns:mc="http://schemas.openxmlformats.org/markup-compatibility/2006" xmlns:a14="http://schemas.microsoft.com/office/drawing/2010/main">
+        <mc:Choice Requires="a14">
           <p:sp>
             <p:nvSpPr>
               <p:cNvPr id="3" name="Content Placeholder 2">
@@ -13770,7 +15172,7 @@
             </p:txBody>
           </p:sp>
         </mc:Choice>
-        <mc:Fallback>
+        <mc:Fallback xmlns="">
           <p:sp>
             <p:nvSpPr>
               <p:cNvPr id="3" name="Content Placeholder 2">
@@ -13814,8 +15216,8 @@
           </p:sp>
         </mc:Fallback>
       </mc:AlternateContent>
-      <mc:AlternateContent xmlns:mc="http://schemas.openxmlformats.org/markup-compatibility/2006">
-        <mc:Choice xmlns:a14="http://schemas.microsoft.com/office/drawing/2010/main" Requires="a14">
+      <mc:AlternateContent xmlns:mc="http://schemas.openxmlformats.org/markup-compatibility/2006" xmlns:a14="http://schemas.microsoft.com/office/drawing/2010/main">
+        <mc:Choice Requires="a14">
           <p:sp>
             <p:nvSpPr>
               <p:cNvPr id="4" name="Content Placeholder 2">
@@ -14198,7 +15600,7 @@
             </p:txBody>
           </p:sp>
         </mc:Choice>
-        <mc:Fallback>
+        <mc:Fallback xmlns="">
           <p:sp>
             <p:nvSpPr>
               <p:cNvPr id="4" name="Content Placeholder 2">
@@ -14264,7 +15666,7 @@
 </p:sld>
 </file>
 
-<file path=ppt/slides/slide21.xml><?xml version="1.0" encoding="utf-8"?>
+<file path=ppt/slides/slide24.xml><?xml version="1.0" encoding="utf-8"?>
 <p:sld xmlns:a="http://schemas.openxmlformats.org/drawingml/2006/main" xmlns:r="http://schemas.openxmlformats.org/officeDocument/2006/relationships" xmlns:p="http://schemas.openxmlformats.org/presentationml/2006/main">
   <p:cSld>
     <p:spTree>
@@ -14339,8 +15741,8 @@
           </a:p>
         </p:txBody>
       </p:sp>
-      <mc:AlternateContent xmlns:mc="http://schemas.openxmlformats.org/markup-compatibility/2006">
-        <mc:Choice xmlns:a14="http://schemas.microsoft.com/office/drawing/2010/main" Requires="a14">
+      <mc:AlternateContent xmlns:mc="http://schemas.openxmlformats.org/markup-compatibility/2006" xmlns:a14="http://schemas.microsoft.com/office/drawing/2010/main">
+        <mc:Choice Requires="a14">
           <p:sp>
             <p:nvSpPr>
               <p:cNvPr id="4" name="Content Placeholder 2">
@@ -14630,7 +16032,7 @@
             </p:txBody>
           </p:sp>
         </mc:Choice>
-        <mc:Fallback>
+        <mc:Fallback xmlns="">
           <p:sp>
             <p:nvSpPr>
               <p:cNvPr id="4" name="Content Placeholder 2">
@@ -14681,12 +16083,448 @@
           </p:sp>
         </mc:Fallback>
       </mc:AlternateContent>
+    </p:spTree>
+    <p:extLst>
+      <p:ext uri="{BB962C8B-B14F-4D97-AF65-F5344CB8AC3E}">
+        <p14:creationId xmlns:p14="http://schemas.microsoft.com/office/powerpoint/2010/main" val="1399481931"/>
+      </p:ext>
+    </p:extLst>
+  </p:cSld>
+  <p:clrMapOvr>
+    <a:masterClrMapping/>
+  </p:clrMapOvr>
+</p:sld>
+</file>
+
+<file path=ppt/slides/slide25.xml><?xml version="1.0" encoding="utf-8"?>
+<p:sld xmlns:a="http://schemas.openxmlformats.org/drawingml/2006/main" xmlns:r="http://schemas.openxmlformats.org/officeDocument/2006/relationships" xmlns:p="http://schemas.openxmlformats.org/presentationml/2006/main">
+  <p:cSld>
+    <p:spTree>
+      <p:nvGrpSpPr>
+        <p:cNvPr id="1" name="">
+          <a:extLst>
+            <a:ext uri="{FF2B5EF4-FFF2-40B4-BE49-F238E27FC236}">
+              <a16:creationId xmlns:a16="http://schemas.microsoft.com/office/drawing/2014/main" id="{D531D90F-90F8-DC45-D454-867A4608B0B6}"/>
+            </a:ext>
+          </a:extLst>
+        </p:cNvPr>
+        <p:cNvGrpSpPr/>
+        <p:nvPr/>
+      </p:nvGrpSpPr>
+      <p:grpSpPr>
+        <a:xfrm>
+          <a:off x="0" y="0"/>
+          <a:ext cx="0" cy="0"/>
+          <a:chOff x="0" y="0"/>
+          <a:chExt cx="0" cy="0"/>
+        </a:xfrm>
+      </p:grpSpPr>
+      <p:pic>
+        <p:nvPicPr>
+          <p:cNvPr id="8" name="Picture 7">
+            <a:extLst>
+              <a:ext uri="{FF2B5EF4-FFF2-40B4-BE49-F238E27FC236}">
+                <a16:creationId xmlns:a16="http://schemas.microsoft.com/office/drawing/2014/main" id="{205A7DB6-E8AA-54DB-2B50-1B2D9EC18F97}"/>
+              </a:ext>
+            </a:extLst>
+          </p:cNvPr>
+          <p:cNvPicPr>
+            <a:picLocks noChangeAspect="1"/>
+          </p:cNvPicPr>
+          <p:nvPr/>
+        </p:nvPicPr>
+        <p:blipFill>
+          <a:blip r:embed="rId2"/>
+          <a:stretch>
+            <a:fillRect/>
+          </a:stretch>
+        </p:blipFill>
+        <p:spPr>
+          <a:xfrm>
+            <a:off x="2057400" y="1371601"/>
+            <a:ext cx="8153400" cy="3960825"/>
+          </a:xfrm>
+          <a:prstGeom prst="rect">
+            <a:avLst/>
+          </a:prstGeom>
+        </p:spPr>
+      </p:pic>
+      <p:sp>
+        <p:nvSpPr>
+          <p:cNvPr id="2" name="Title 1">
+            <a:extLst>
+              <a:ext uri="{FF2B5EF4-FFF2-40B4-BE49-F238E27FC236}">
+                <a16:creationId xmlns:a16="http://schemas.microsoft.com/office/drawing/2014/main" id="{E115982C-9A80-F68E-1E46-BBA7D5B572E0}"/>
+              </a:ext>
+            </a:extLst>
+          </p:cNvPr>
+          <p:cNvSpPr>
+            <a:spLocks noGrp="1"/>
+          </p:cNvSpPr>
+          <p:nvPr>
+            <p:ph type="title"/>
+          </p:nvPr>
+        </p:nvSpPr>
+        <p:spPr/>
+        <p:txBody>
+          <a:bodyPr/>
+          <a:lstStyle/>
+          <a:p>
+            <a:r>
+              <a:rPr lang="en-US" dirty="0"/>
+              <a:t>High level outline (not code)</a:t>
+            </a:r>
+          </a:p>
+        </p:txBody>
+      </p:sp>
+      <mc:AlternateContent xmlns:mc="http://schemas.openxmlformats.org/markup-compatibility/2006">
+        <mc:Choice xmlns:a14="http://schemas.microsoft.com/office/drawing/2010/main" Requires="a14">
+          <p:sp>
+            <p:nvSpPr>
+              <p:cNvPr id="4" name="Content Placeholder 2">
+                <a:extLst>
+                  <a:ext uri="{FF2B5EF4-FFF2-40B4-BE49-F238E27FC236}">
+                    <a16:creationId xmlns:a16="http://schemas.microsoft.com/office/drawing/2014/main" id="{36409CF2-B55C-ED77-FFA0-7AD741B7D9DE}"/>
+                  </a:ext>
+                </a:extLst>
+              </p:cNvPr>
+              <p:cNvSpPr txBox="1">
+                <a:spLocks/>
+              </p:cNvSpPr>
+              <p:nvPr/>
+            </p:nvSpPr>
+            <p:spPr bwMode="auto">
+              <a:xfrm>
+                <a:off x="2057400" y="5486400"/>
+                <a:ext cx="7772400" cy="914400"/>
+              </a:xfrm>
+              <a:prstGeom prst="rect">
+                <a:avLst/>
+              </a:prstGeom>
+              <a:noFill/>
+              <a:ln w="9525">
+                <a:noFill/>
+                <a:miter lim="800000"/>
+                <a:headEnd/>
+                <a:tailEnd/>
+              </a:ln>
+            </p:spPr>
+            <p:txBody>
+              <a:bodyPr vert="horz" wrap="square" lIns="91440" tIns="45720" rIns="91440" bIns="45720" numCol="1" anchor="t" anchorCtr="0" compatLnSpc="1">
+                <a:prstTxWarp prst="textNoShape">
+                  <a:avLst/>
+                </a:prstTxWarp>
+              </a:bodyPr>
+              <a:lstStyle>
+                <a:lvl1pPr marL="273050" indent="-273050" algn="l" rtl="0" eaLnBrk="0" fontAlgn="base" hangingPunct="0">
+                  <a:spcBef>
+                    <a:spcPts val="600"/>
+                  </a:spcBef>
+                  <a:spcAft>
+                    <a:spcPct val="0"/>
+                  </a:spcAft>
+                  <a:buClr>
+                    <a:schemeClr val="accent1"/>
+                  </a:buClr>
+                  <a:buSzPct val="76000"/>
+                  <a:buFont typeface="Wingdings 3" pitchFamily="18" charset="2"/>
+                  <a:buChar char=""/>
+                  <a:defRPr sz="2600" kern="1200">
+                    <a:solidFill>
+                      <a:schemeClr val="tx1"/>
+                    </a:solidFill>
+                    <a:latin typeface="+mn-lt"/>
+                    <a:ea typeface="+mn-ea"/>
+                    <a:cs typeface="+mn-cs"/>
+                  </a:defRPr>
+                </a:lvl1pPr>
+                <a:lvl2pPr marL="547688" indent="-273050" algn="l" rtl="0" eaLnBrk="0" fontAlgn="base" hangingPunct="0">
+                  <a:spcBef>
+                    <a:spcPts val="500"/>
+                  </a:spcBef>
+                  <a:spcAft>
+                    <a:spcPct val="0"/>
+                  </a:spcAft>
+                  <a:buClr>
+                    <a:schemeClr val="accent2"/>
+                  </a:buClr>
+                  <a:buSzPct val="76000"/>
+                  <a:buFont typeface="Wingdings 3" pitchFamily="18" charset="2"/>
+                  <a:buChar char=""/>
+                  <a:defRPr sz="2300" kern="1200">
+                    <a:solidFill>
+                      <a:schemeClr val="tx2"/>
+                    </a:solidFill>
+                    <a:latin typeface="+mn-lt"/>
+                    <a:ea typeface="+mn-ea"/>
+                    <a:cs typeface="+mn-cs"/>
+                  </a:defRPr>
+                </a:lvl2pPr>
+                <a:lvl3pPr marL="822325" indent="-228600" algn="l" rtl="0" eaLnBrk="0" fontAlgn="base" hangingPunct="0">
+                  <a:spcBef>
+                    <a:spcPts val="500"/>
+                  </a:spcBef>
+                  <a:spcAft>
+                    <a:spcPct val="0"/>
+                  </a:spcAft>
+                  <a:buClr>
+                    <a:srgbClr val="BCBCBC"/>
+                  </a:buClr>
+                  <a:buSzPct val="76000"/>
+                  <a:buFont typeface="Wingdings 3" pitchFamily="18" charset="2"/>
+                  <a:buChar char=""/>
+                  <a:defRPr sz="2000" kern="1200">
+                    <a:solidFill>
+                      <a:schemeClr val="tx1"/>
+                    </a:solidFill>
+                    <a:latin typeface="+mn-lt"/>
+                    <a:ea typeface="+mn-ea"/>
+                    <a:cs typeface="+mn-cs"/>
+                  </a:defRPr>
+                </a:lvl3pPr>
+                <a:lvl4pPr marL="1096963" indent="-228600" algn="l" rtl="0" eaLnBrk="0" fontAlgn="base" hangingPunct="0">
+                  <a:spcBef>
+                    <a:spcPts val="400"/>
+                  </a:spcBef>
+                  <a:spcAft>
+                    <a:spcPct val="0"/>
+                  </a:spcAft>
+                  <a:buClr>
+                    <a:srgbClr val="8BA2B4"/>
+                  </a:buClr>
+                  <a:buSzPct val="70000"/>
+                  <a:buFont typeface="Wingdings" pitchFamily="2" charset="2"/>
+                  <a:buChar char=""/>
+                  <a:defRPr sz="2000" kern="1200">
+                    <a:solidFill>
+                      <a:schemeClr val="tx1"/>
+                    </a:solidFill>
+                    <a:latin typeface="+mn-lt"/>
+                    <a:ea typeface="+mn-ea"/>
+                    <a:cs typeface="+mn-cs"/>
+                  </a:defRPr>
+                </a:lvl4pPr>
+                <a:lvl5pPr marL="1371600" indent="-228600" algn="l" rtl="0" eaLnBrk="0" fontAlgn="base" hangingPunct="0">
+                  <a:spcBef>
+                    <a:spcPts val="300"/>
+                  </a:spcBef>
+                  <a:spcAft>
+                    <a:spcPct val="0"/>
+                  </a:spcAft>
+                  <a:buClr>
+                    <a:schemeClr val="accent2"/>
+                  </a:buClr>
+                  <a:buSzPct val="70000"/>
+                  <a:buFont typeface="Wingdings" pitchFamily="2" charset="2"/>
+                  <a:buChar char=""/>
+                  <a:defRPr sz="1600" kern="1200">
+                    <a:solidFill>
+                      <a:schemeClr val="tx1"/>
+                    </a:solidFill>
+                    <a:latin typeface="+mn-lt"/>
+                    <a:ea typeface="+mn-ea"/>
+                    <a:cs typeface="+mn-cs"/>
+                  </a:defRPr>
+                </a:lvl5pPr>
+                <a:lvl6pPr marL="1645920" indent="-182880" algn="l" rtl="0" eaLnBrk="1" latinLnBrk="0" hangingPunct="1">
+                  <a:spcBef>
+                    <a:spcPts val="300"/>
+                  </a:spcBef>
+                  <a:buClr>
+                    <a:srgbClr val="9FB8CD">
+                      <a:shade val="75000"/>
+                    </a:srgbClr>
+                  </a:buClr>
+                  <a:buSzPct val="75000"/>
+                  <a:buFont typeface="Wingdings 3"/>
+                  <a:buChar char=""/>
+                  <a:defRPr kumimoji="0" lang="en-US" sz="1600" kern="1200" smtClean="0">
+                    <a:solidFill>
+                      <a:schemeClr val="tx1"/>
+                    </a:solidFill>
+                    <a:latin typeface="+mn-lt"/>
+                    <a:ea typeface="+mn-ea"/>
+                    <a:cs typeface="+mn-cs"/>
+                  </a:defRPr>
+                </a:lvl6pPr>
+                <a:lvl7pPr marL="1828800" indent="-182880" algn="l" rtl="0" eaLnBrk="1" latinLnBrk="0" hangingPunct="1">
+                  <a:spcBef>
+                    <a:spcPts val="300"/>
+                  </a:spcBef>
+                  <a:buClr>
+                    <a:srgbClr val="727CA3">
+                      <a:shade val="75000"/>
+                    </a:srgbClr>
+                  </a:buClr>
+                  <a:buSzPct val="75000"/>
+                  <a:buFont typeface="Wingdings 3"/>
+                  <a:buChar char=""/>
+                  <a:defRPr kumimoji="0" lang="en-US" sz="1400" kern="1200" smtClean="0">
+                    <a:solidFill>
+                      <a:schemeClr val="tx1"/>
+                    </a:solidFill>
+                    <a:latin typeface="+mn-lt"/>
+                    <a:ea typeface="+mn-ea"/>
+                    <a:cs typeface="+mn-cs"/>
+                  </a:defRPr>
+                </a:lvl7pPr>
+                <a:lvl8pPr marL="2011680" indent="-182880" algn="l" rtl="0" eaLnBrk="1" latinLnBrk="0" hangingPunct="1">
+                  <a:spcBef>
+                    <a:spcPts val="300"/>
+                  </a:spcBef>
+                  <a:buClr>
+                    <a:prstClr val="white">
+                      <a:shade val="50000"/>
+                    </a:prstClr>
+                  </a:buClr>
+                  <a:buSzPct val="75000"/>
+                  <a:buFont typeface="Wingdings 3"/>
+                  <a:buChar char=""/>
+                  <a:defRPr kumimoji="0" lang="en-US" sz="1400" kern="1200" smtClean="0">
+                    <a:solidFill>
+                      <a:schemeClr val="tx1"/>
+                    </a:solidFill>
+                    <a:latin typeface="+mn-lt"/>
+                    <a:ea typeface="+mn-ea"/>
+                    <a:cs typeface="+mn-cs"/>
+                  </a:defRPr>
+                </a:lvl8pPr>
+                <a:lvl9pPr marL="2194560" indent="-182880" algn="l" rtl="0" eaLnBrk="1" latinLnBrk="0" hangingPunct="1">
+                  <a:spcBef>
+                    <a:spcPts val="300"/>
+                  </a:spcBef>
+                  <a:buClr>
+                    <a:srgbClr val="9FB8CD"/>
+                  </a:buClr>
+                  <a:buSzPct val="75000"/>
+                  <a:buFont typeface="Wingdings 3"/>
+                  <a:buChar char=""/>
+                  <a:defRPr kumimoji="0" lang="en-US" sz="1200" kern="1200" smtClean="0">
+                    <a:solidFill>
+                      <a:schemeClr val="tx1"/>
+                    </a:solidFill>
+                    <a:latin typeface="+mn-lt"/>
+                    <a:ea typeface="+mn-ea"/>
+                    <a:cs typeface="+mn-cs"/>
+                  </a:defRPr>
+                </a:lvl9pPr>
+              </a:lstStyle>
+              <a:p>
+                <a14:m>
+                  <m:oMath xmlns:m="http://schemas.openxmlformats.org/officeDocument/2006/math">
+                    <m:r>
+                      <a:rPr lang="en-US" sz="2400" i="1" dirty="0">
+                        <a:latin typeface="Cambria Math"/>
+                      </a:rPr>
+                      <m:t>𝑈</m:t>
+                    </m:r>
+                  </m:oMath>
+                </a14:m>
+                <a:r>
+                  <a:rPr lang="en-US" sz="2400" dirty="0"/>
+                  <a:t> : unconnected vertices</a:t>
+                </a:r>
+              </a:p>
+              <a:p>
+                <a14:m>
+                  <m:oMath xmlns:m="http://schemas.openxmlformats.org/officeDocument/2006/math">
+                    <m:r>
+                      <a:rPr lang="en-US" sz="2400" i="1" dirty="0">
+                        <a:latin typeface="Cambria Math"/>
+                      </a:rPr>
+                      <m:t>𝑆</m:t>
+                    </m:r>
+                    <m:r>
+                      <a:rPr lang="en-US" sz="2400" i="1" dirty="0">
+                        <a:latin typeface="Cambria Math"/>
+                      </a:rPr>
+                      <m:t> = </m:t>
+                    </m:r>
+                    <m:r>
+                      <a:rPr lang="en-US" sz="2400" i="1" dirty="0">
+                        <a:latin typeface="Cambria Math"/>
+                      </a:rPr>
+                      <m:t>𝑉</m:t>
+                    </m:r>
+                    <m:r>
+                      <a:rPr lang="en-US" sz="2400" i="1" dirty="0">
+                        <a:latin typeface="Cambria Math"/>
+                      </a:rPr>
+                      <m:t> – </m:t>
+                    </m:r>
+                    <m:r>
+                      <a:rPr lang="en-US" sz="2400" i="1" dirty="0">
+                        <a:latin typeface="Cambria Math"/>
+                      </a:rPr>
+                      <m:t>𝑈</m:t>
+                    </m:r>
+                  </m:oMath>
+                </a14:m>
+                <a:r>
+                  <a:rPr lang="en-US" sz="2400" dirty="0"/>
+                  <a:t>: vertices connected by current partial tree</a:t>
+                </a:r>
+              </a:p>
+            </p:txBody>
+          </p:sp>
+        </mc:Choice>
+        <mc:Fallback>
+          <p:sp>
+            <p:nvSpPr>
+              <p:cNvPr id="4" name="Content Placeholder 2">
+                <a:extLst>
+                  <a:ext uri="{FF2B5EF4-FFF2-40B4-BE49-F238E27FC236}">
+                    <a16:creationId xmlns:a16="http://schemas.microsoft.com/office/drawing/2014/main" id="{36409CF2-B55C-ED77-FFA0-7AD741B7D9DE}"/>
+                  </a:ext>
+                </a:extLst>
+              </p:cNvPr>
+              <p:cNvSpPr txBox="1">
+                <a:spLocks noRot="1" noChangeAspect="1" noMove="1" noResize="1" noEditPoints="1" noAdjustHandles="1" noChangeArrowheads="1" noChangeShapeType="1" noTextEdit="1"/>
+              </p:cNvSpPr>
+              <p:nvPr/>
+            </p:nvSpPr>
+            <p:spPr bwMode="auto">
+              <a:xfrm>
+                <a:off x="2057400" y="5486400"/>
+                <a:ext cx="7772400" cy="914400"/>
+              </a:xfrm>
+              <a:prstGeom prst="rect">
+                <a:avLst/>
+              </a:prstGeom>
+              <a:blipFill>
+                <a:blip r:embed="rId3"/>
+                <a:stretch>
+                  <a:fillRect l="-549" t="-5333" b="-14000"/>
+                </a:stretch>
+              </a:blipFill>
+              <a:ln w="9525">
+                <a:noFill/>
+                <a:miter lim="800000"/>
+                <a:headEnd/>
+                <a:tailEnd/>
+              </a:ln>
+            </p:spPr>
+            <p:txBody>
+              <a:bodyPr/>
+              <a:lstStyle/>
+              <a:p>
+                <a:r>
+                  <a:rPr lang="en-US">
+                    <a:noFill/>
+                  </a:rPr>
+                  <a:t> </a:t>
+                </a:r>
+              </a:p>
+            </p:txBody>
+          </p:sp>
+        </mc:Fallback>
+      </mc:AlternateContent>
       <p:sp>
         <p:nvSpPr>
           <p:cNvPr id="6" name="Rectangle 34">
             <a:extLst>
               <a:ext uri="{FF2B5EF4-FFF2-40B4-BE49-F238E27FC236}">
-                <a16:creationId xmlns:a16="http://schemas.microsoft.com/office/drawing/2014/main" id="{AB459EAE-DEC8-44D4-91AF-9DE715DE0CD2}"/>
+                <a16:creationId xmlns:a16="http://schemas.microsoft.com/office/drawing/2014/main" id="{389E7E17-22E8-199D-09AE-A3684156FDFF}"/>
               </a:ext>
             </a:extLst>
           </p:cNvPr>
@@ -14732,7 +16570,7 @@
           <p:cNvPr id="7" name="Rectangle 34">
             <a:extLst>
               <a:ext uri="{FF2B5EF4-FFF2-40B4-BE49-F238E27FC236}">
-                <a16:creationId xmlns:a16="http://schemas.microsoft.com/office/drawing/2014/main" id="{24A1EC50-92BD-4E35-88F7-99BCC89E52AF}"/>
+                <a16:creationId xmlns:a16="http://schemas.microsoft.com/office/drawing/2014/main" id="{9B7E4175-6E75-508E-DC5B-68DA24BC6849}"/>
               </a:ext>
             </a:extLst>
           </p:cNvPr>
@@ -14776,7 +16614,7 @@
     </p:spTree>
     <p:extLst>
       <p:ext uri="{BB962C8B-B14F-4D97-AF65-F5344CB8AC3E}">
-        <p14:creationId xmlns:p14="http://schemas.microsoft.com/office/powerpoint/2010/main" val="1399481931"/>
+        <p14:creationId xmlns:p14="http://schemas.microsoft.com/office/powerpoint/2010/main" val="3051309809"/>
       </p:ext>
     </p:extLst>
   </p:cSld>
@@ -14910,7 +16748,7 @@
 </p:sld>
 </file>
 
-<file path=ppt/slides/slide22.xml><?xml version="1.0" encoding="utf-8"?>
+<file path=ppt/slides/slide26.xml><?xml version="1.0" encoding="utf-8"?>
 <p:sld xmlns:a="http://schemas.openxmlformats.org/drawingml/2006/main" xmlns:r="http://schemas.openxmlformats.org/officeDocument/2006/relationships" xmlns:p="http://schemas.openxmlformats.org/presentationml/2006/main">
   <p:cSld>
     <p:spTree>
@@ -15015,6 +16853,240 @@
           </a:p>
         </p:txBody>
       </p:sp>
+      <mc:AlternateContent xmlns:mc="http://schemas.openxmlformats.org/markup-compatibility/2006" xmlns:a14="http://schemas.microsoft.com/office/drawing/2010/main">
+        <mc:Choice Requires="a14">
+          <p:sp>
+            <p:nvSpPr>
+              <p:cNvPr id="3" name="Content Placeholder 2">
+                <a:extLst>
+                  <a:ext uri="{FF2B5EF4-FFF2-40B4-BE49-F238E27FC236}">
+                    <a16:creationId xmlns:a16="http://schemas.microsoft.com/office/drawing/2014/main" id="{3621DE4B-0F8E-451E-8D12-2F1860D3D0E4}"/>
+                  </a:ext>
+                </a:extLst>
+              </p:cNvPr>
+              <p:cNvSpPr>
+                <a:spLocks noGrp="1"/>
+              </p:cNvSpPr>
+              <p:nvPr>
+                <p:ph sz="quarter" idx="1"/>
+              </p:nvPr>
+            </p:nvSpPr>
+            <p:spPr>
+              <a:xfrm>
+                <a:off x="1981200" y="5410200"/>
+                <a:ext cx="8229600" cy="746760"/>
+              </a:xfrm>
+            </p:spPr>
+            <p:txBody>
+              <a:bodyPr/>
+              <a:lstStyle/>
+              <a:p>
+                <a:r>
+                  <a:rPr lang="en-US" dirty="0"/>
+                  <a:t>Suppose we grow the tree starting from </a:t>
+                </a:r>
+                <a14:m>
+                  <m:oMath xmlns:m="http://schemas.openxmlformats.org/officeDocument/2006/math">
+                    <m:sSub>
+                      <m:sSubPr>
+                        <m:ctrlPr>
+                          <a:rPr lang="en-US" b="0" i="1" smtClean="0">
+                            <a:latin typeface="Cambria Math" panose="02040503050406030204" pitchFamily="18" charset="0"/>
+                          </a:rPr>
+                        </m:ctrlPr>
+                      </m:sSubPr>
+                      <m:e>
+                        <m:r>
+                          <a:rPr lang="en-US" b="0" i="1" smtClean="0">
+                            <a:latin typeface="Cambria Math" panose="02040503050406030204" pitchFamily="18" charset="0"/>
+                          </a:rPr>
+                          <m:t>𝑣</m:t>
+                        </m:r>
+                      </m:e>
+                      <m:sub>
+                        <m:r>
+                          <a:rPr lang="en-US" b="0" i="1" smtClean="0">
+                            <a:latin typeface="Cambria Math" panose="02040503050406030204" pitchFamily="18" charset="0"/>
+                          </a:rPr>
+                          <m:t>1</m:t>
+                        </m:r>
+                      </m:sub>
+                    </m:sSub>
+                  </m:oMath>
+                </a14:m>
+                <a:endParaRPr lang="en-US" dirty="0"/>
+              </a:p>
+            </p:txBody>
+          </p:sp>
+        </mc:Choice>
+        <mc:Fallback xmlns="">
+          <p:sp>
+            <p:nvSpPr>
+              <p:cNvPr id="3" name="Content Placeholder 2">
+                <a:extLst>
+                  <a:ext uri="{FF2B5EF4-FFF2-40B4-BE49-F238E27FC236}">
+                    <a16:creationId xmlns:a16="http://schemas.microsoft.com/office/drawing/2014/main" id="{3621DE4B-0F8E-451E-8D12-2F1860D3D0E4}"/>
+                  </a:ext>
+                </a:extLst>
+              </p:cNvPr>
+              <p:cNvSpPr>
+                <a:spLocks noGrp="1" noRot="1" noChangeAspect="1" noMove="1" noResize="1" noEditPoints="1" noAdjustHandles="1" noChangeArrowheads="1" noChangeShapeType="1" noTextEdit="1"/>
+              </p:cNvSpPr>
+              <p:nvPr>
+                <p:ph sz="quarter" idx="1"/>
+              </p:nvPr>
+            </p:nvSpPr>
+            <p:spPr>
+              <a:xfrm>
+                <a:off x="1981200" y="5410200"/>
+                <a:ext cx="8229600" cy="746760"/>
+              </a:xfrm>
+              <a:blipFill>
+                <a:blip r:embed="rId3"/>
+                <a:stretch>
+                  <a:fillRect l="-667" t="-8197"/>
+                </a:stretch>
+              </a:blipFill>
+            </p:spPr>
+            <p:txBody>
+              <a:bodyPr/>
+              <a:lstStyle/>
+              <a:p>
+                <a:r>
+                  <a:rPr lang="en-US">
+                    <a:noFill/>
+                  </a:rPr>
+                  <a:t> </a:t>
+                </a:r>
+              </a:p>
+            </p:txBody>
+          </p:sp>
+        </mc:Fallback>
+      </mc:AlternateContent>
+    </p:spTree>
+    <p:extLst>
+      <p:ext uri="{BB962C8B-B14F-4D97-AF65-F5344CB8AC3E}">
+        <p14:creationId xmlns:p14="http://schemas.microsoft.com/office/powerpoint/2010/main" val="4057071970"/>
+      </p:ext>
+    </p:extLst>
+  </p:cSld>
+  <p:clrMapOvr>
+    <a:masterClrMapping/>
+  </p:clrMapOvr>
+</p:sld>
+</file>
+
+<file path=ppt/slides/slide27.xml><?xml version="1.0" encoding="utf-8"?>
+<p:sld xmlns:a="http://schemas.openxmlformats.org/drawingml/2006/main" xmlns:r="http://schemas.openxmlformats.org/officeDocument/2006/relationships" xmlns:p="http://schemas.openxmlformats.org/presentationml/2006/main">
+  <p:cSld>
+    <p:spTree>
+      <p:nvGrpSpPr>
+        <p:cNvPr id="1" name="">
+          <a:extLst>
+            <a:ext uri="{FF2B5EF4-FFF2-40B4-BE49-F238E27FC236}">
+              <a16:creationId xmlns:a16="http://schemas.microsoft.com/office/drawing/2014/main" id="{DE56A549-5280-D49A-CC5A-54548214B7B4}"/>
+            </a:ext>
+          </a:extLst>
+        </p:cNvPr>
+        <p:cNvGrpSpPr/>
+        <p:nvPr/>
+      </p:nvGrpSpPr>
+      <p:grpSpPr>
+        <a:xfrm>
+          <a:off x="0" y="0"/>
+          <a:ext cx="0" cy="0"/>
+          <a:chOff x="0" y="0"/>
+          <a:chExt cx="0" cy="0"/>
+        </a:xfrm>
+      </p:grpSpPr>
+      <p:pic>
+        <p:nvPicPr>
+          <p:cNvPr id="4" name="Picture 2">
+            <a:extLst>
+              <a:ext uri="{FF2B5EF4-FFF2-40B4-BE49-F238E27FC236}">
+                <a16:creationId xmlns:a16="http://schemas.microsoft.com/office/drawing/2014/main" id="{AA41687D-8983-D4DD-F5BE-51C9778D2935}"/>
+              </a:ext>
+            </a:extLst>
+          </p:cNvPr>
+          <p:cNvPicPr>
+            <a:picLocks noChangeAspect="1" noChangeArrowheads="1"/>
+          </p:cNvPicPr>
+          <p:nvPr/>
+        </p:nvPicPr>
+        <p:blipFill>
+          <a:blip r:embed="rId2">
+            <a:extLst>
+              <a:ext uri="{28A0092B-C50C-407E-A947-70E740481C1C}">
+                <a14:useLocalDpi xmlns:a14="http://schemas.microsoft.com/office/drawing/2010/main" val="0"/>
+              </a:ext>
+            </a:extLst>
+          </a:blip>
+          <a:srcRect/>
+          <a:stretch>
+            <a:fillRect/>
+          </a:stretch>
+        </p:blipFill>
+        <p:spPr bwMode="auto">
+          <a:xfrm>
+            <a:off x="1981201" y="1143000"/>
+            <a:ext cx="8315325" cy="4038600"/>
+          </a:xfrm>
+          <a:prstGeom prst="rect">
+            <a:avLst/>
+          </a:prstGeom>
+          <a:noFill/>
+          <a:ln>
+            <a:noFill/>
+          </a:ln>
+          <a:extLst>
+            <a:ext uri="{909E8E84-426E-40DD-AFC4-6F175D3DCCD1}">
+              <a14:hiddenFill xmlns:a14="http://schemas.microsoft.com/office/drawing/2010/main">
+                <a:solidFill>
+                  <a:schemeClr val="accent1"/>
+                </a:solidFill>
+              </a14:hiddenFill>
+            </a:ext>
+            <a:ext uri="{91240B29-F687-4F45-9708-019B960494DF}">
+              <a14:hiddenLine xmlns:a14="http://schemas.microsoft.com/office/drawing/2010/main" w="9525">
+                <a:solidFill>
+                  <a:schemeClr val="tx1"/>
+                </a:solidFill>
+                <a:miter lim="800000"/>
+                <a:headEnd/>
+                <a:tailEnd/>
+              </a14:hiddenLine>
+            </a:ext>
+          </a:extLst>
+        </p:spPr>
+      </p:pic>
+      <p:sp>
+        <p:nvSpPr>
+          <p:cNvPr id="2" name="Title 1">
+            <a:extLst>
+              <a:ext uri="{FF2B5EF4-FFF2-40B4-BE49-F238E27FC236}">
+                <a16:creationId xmlns:a16="http://schemas.microsoft.com/office/drawing/2014/main" id="{5C27560F-16C5-17BC-313A-93A1B67EAFDE}"/>
+              </a:ext>
+            </a:extLst>
+          </p:cNvPr>
+          <p:cNvSpPr>
+            <a:spLocks noGrp="1"/>
+          </p:cNvSpPr>
+          <p:nvPr>
+            <p:ph type="title"/>
+          </p:nvPr>
+        </p:nvSpPr>
+        <p:spPr/>
+        <p:txBody>
+          <a:bodyPr/>
+          <a:lstStyle/>
+          <a:p>
+            <a:r>
+              <a:rPr lang="en-US" dirty="0"/>
+              <a:t>Example</a:t>
+            </a:r>
+          </a:p>
+        </p:txBody>
+      </p:sp>
       <mc:AlternateContent xmlns:mc="http://schemas.openxmlformats.org/markup-compatibility/2006">
         <mc:Choice xmlns:a14="http://schemas.microsoft.com/office/drawing/2010/main" Requires="a14">
           <p:sp>
@@ -15022,7 +17094,7 @@
               <p:cNvPr id="3" name="Content Placeholder 2">
                 <a:extLst>
                   <a:ext uri="{FF2B5EF4-FFF2-40B4-BE49-F238E27FC236}">
-                    <a16:creationId xmlns:a16="http://schemas.microsoft.com/office/drawing/2014/main" id="{3621DE4B-0F8E-451E-8D12-2F1860D3D0E4}"/>
+                    <a16:creationId xmlns:a16="http://schemas.microsoft.com/office/drawing/2014/main" id="{25F2971A-2241-0321-EE80-6DBE8619E457}"/>
                   </a:ext>
                 </a:extLst>
               </p:cNvPr>
@@ -15087,7 +17159,7 @@
               <p:cNvPr id="3" name="Content Placeholder 2">
                 <a:extLst>
                   <a:ext uri="{FF2B5EF4-FFF2-40B4-BE49-F238E27FC236}">
-                    <a16:creationId xmlns:a16="http://schemas.microsoft.com/office/drawing/2014/main" id="{3621DE4B-0F8E-451E-8D12-2F1860D3D0E4}"/>
+                    <a16:creationId xmlns:a16="http://schemas.microsoft.com/office/drawing/2014/main" id="{25F2971A-2241-0321-EE80-6DBE8619E457}"/>
                   </a:ext>
                 </a:extLst>
               </p:cNvPr>
@@ -15130,7 +17202,7 @@
           <p:cNvPr id="5" name="Group 4">
             <a:extLst>
               <a:ext uri="{FF2B5EF4-FFF2-40B4-BE49-F238E27FC236}">
-                <a16:creationId xmlns:a16="http://schemas.microsoft.com/office/drawing/2014/main" id="{14E0AD3E-B433-472E-872E-A98AECFC151F}"/>
+                <a16:creationId xmlns:a16="http://schemas.microsoft.com/office/drawing/2014/main" id="{15CA195C-6229-8F96-E19A-523F630ECE19}"/>
               </a:ext>
             </a:extLst>
           </p:cNvPr>
@@ -15150,7 +17222,7 @@
             <p:cNvPr id="6" name="Straight Connector 5">
               <a:extLst>
                 <a:ext uri="{FF2B5EF4-FFF2-40B4-BE49-F238E27FC236}">
-                  <a16:creationId xmlns:a16="http://schemas.microsoft.com/office/drawing/2014/main" id="{813574D4-0318-41FD-B46E-FAA1B366CC2A}"/>
+                  <a16:creationId xmlns:a16="http://schemas.microsoft.com/office/drawing/2014/main" id="{251E5860-06CA-274F-B690-8A642A64A3D7}"/>
                 </a:ext>
               </a:extLst>
             </p:cNvPr>
@@ -15190,7 +17262,7 @@
             <p:cNvPr id="7" name="Straight Connector 6">
               <a:extLst>
                 <a:ext uri="{FF2B5EF4-FFF2-40B4-BE49-F238E27FC236}">
-                  <a16:creationId xmlns:a16="http://schemas.microsoft.com/office/drawing/2014/main" id="{807C787B-F261-4EA5-A089-6FE98F792BE8}"/>
+                  <a16:creationId xmlns:a16="http://schemas.microsoft.com/office/drawing/2014/main" id="{F76A22F2-6D02-BB99-8DC7-82F35FAA3B53}"/>
                 </a:ext>
               </a:extLst>
             </p:cNvPr>
@@ -15230,7 +17302,7 @@
             <p:cNvPr id="8" name="Straight Connector 7">
               <a:extLst>
                 <a:ext uri="{FF2B5EF4-FFF2-40B4-BE49-F238E27FC236}">
-                  <a16:creationId xmlns:a16="http://schemas.microsoft.com/office/drawing/2014/main" id="{17484657-E575-49B0-95A9-FFBD375BE2F0}"/>
+                  <a16:creationId xmlns:a16="http://schemas.microsoft.com/office/drawing/2014/main" id="{26ECF015-FEB8-AE1B-5F12-F7FADF2E2743}"/>
                 </a:ext>
               </a:extLst>
             </p:cNvPr>
@@ -15270,7 +17342,7 @@
             <p:cNvPr id="9" name="Straight Connector 8">
               <a:extLst>
                 <a:ext uri="{FF2B5EF4-FFF2-40B4-BE49-F238E27FC236}">
-                  <a16:creationId xmlns:a16="http://schemas.microsoft.com/office/drawing/2014/main" id="{7BD6B4C6-3037-4489-A0F4-FD53CF436DCD}"/>
+                  <a16:creationId xmlns:a16="http://schemas.microsoft.com/office/drawing/2014/main" id="{728FC76F-6A5A-F568-228C-92584456DAAB}"/>
                 </a:ext>
               </a:extLst>
             </p:cNvPr>
@@ -15310,7 +17382,7 @@
             <p:cNvPr id="10" name="Straight Connector 9">
               <a:extLst>
                 <a:ext uri="{FF2B5EF4-FFF2-40B4-BE49-F238E27FC236}">
-                  <a16:creationId xmlns:a16="http://schemas.microsoft.com/office/drawing/2014/main" id="{01D29B7E-32DB-4BE9-82EB-E9F5EC47AB15}"/>
+                  <a16:creationId xmlns:a16="http://schemas.microsoft.com/office/drawing/2014/main" id="{9945B0F7-AEE9-D13B-7213-8B79BFDE3F85}"/>
                 </a:ext>
               </a:extLst>
             </p:cNvPr>
@@ -15350,7 +17422,7 @@
             <p:cNvPr id="11" name="Straight Connector 10">
               <a:extLst>
                 <a:ext uri="{FF2B5EF4-FFF2-40B4-BE49-F238E27FC236}">
-                  <a16:creationId xmlns:a16="http://schemas.microsoft.com/office/drawing/2014/main" id="{016D5C39-778C-4A52-B7A8-7DC8E6F849F3}"/>
+                  <a16:creationId xmlns:a16="http://schemas.microsoft.com/office/drawing/2014/main" id="{6F5FD302-63B2-45FE-A07A-8E8F853AC884}"/>
                 </a:ext>
               </a:extLst>
             </p:cNvPr>
@@ -15390,7 +17462,7 @@
             <p:cNvPr id="12" name="Straight Connector 11">
               <a:extLst>
                 <a:ext uri="{FF2B5EF4-FFF2-40B4-BE49-F238E27FC236}">
-                  <a16:creationId xmlns:a16="http://schemas.microsoft.com/office/drawing/2014/main" id="{875DCF93-BD03-4C00-B390-27AE10D9526E}"/>
+                  <a16:creationId xmlns:a16="http://schemas.microsoft.com/office/drawing/2014/main" id="{21AF08C5-F908-BF06-E283-66CD29AA30F0}"/>
                 </a:ext>
               </a:extLst>
             </p:cNvPr>
@@ -15430,7 +17502,7 @@
             <p:cNvPr id="13" name="Straight Connector 12">
               <a:extLst>
                 <a:ext uri="{FF2B5EF4-FFF2-40B4-BE49-F238E27FC236}">
-                  <a16:creationId xmlns:a16="http://schemas.microsoft.com/office/drawing/2014/main" id="{E949F5CC-4E78-47B0-AB54-8E7EB8150E0C}"/>
+                  <a16:creationId xmlns:a16="http://schemas.microsoft.com/office/drawing/2014/main" id="{9F7AF70D-C32B-0F58-F0B1-1822F36F6402}"/>
                 </a:ext>
               </a:extLst>
             </p:cNvPr>
@@ -15469,7 +17541,7 @@
     </p:spTree>
     <p:extLst>
       <p:ext uri="{BB962C8B-B14F-4D97-AF65-F5344CB8AC3E}">
-        <p14:creationId xmlns:p14="http://schemas.microsoft.com/office/powerpoint/2010/main" val="4057071970"/>
+        <p14:creationId xmlns:p14="http://schemas.microsoft.com/office/powerpoint/2010/main" val="2850784916"/>
       </p:ext>
     </p:extLst>
   </p:cSld>
@@ -15554,7 +17626,7 @@
 </p:sld>
 </file>
 
-<file path=ppt/slides/slide23.xml><?xml version="1.0" encoding="utf-8"?>
+<file path=ppt/slides/slide28.xml><?xml version="1.0" encoding="utf-8"?>
 <p:sld xmlns:a="http://schemas.openxmlformats.org/drawingml/2006/main" xmlns:r="http://schemas.openxmlformats.org/officeDocument/2006/relationships" xmlns:p="http://schemas.openxmlformats.org/presentationml/2006/main">
   <p:cSld>
     <p:spTree>
@@ -15740,8 +17812,8 @@
           </a:p>
         </p:txBody>
       </p:sp>
-      <mc:AlternateContent xmlns:mc="http://schemas.openxmlformats.org/markup-compatibility/2006">
-        <mc:Choice xmlns:a14="http://schemas.microsoft.com/office/drawing/2010/main" Requires="a14">
+      <mc:AlternateContent xmlns:mc="http://schemas.openxmlformats.org/markup-compatibility/2006" xmlns:a14="http://schemas.microsoft.com/office/drawing/2010/main">
+        <mc:Choice Requires="a14">
           <p:sp>
             <p:nvSpPr>
               <p:cNvPr id="5" name="Rectangle 34">
@@ -15932,7 +18004,7 @@
             </p:txBody>
           </p:sp>
         </mc:Choice>
-        <mc:Fallback>
+        <mc:Fallback xmlns="">
           <p:sp>
             <p:nvSpPr>
               <p:cNvPr id="5" name="Rectangle 34">
@@ -15999,7 +18071,7 @@
 </p:sld>
 </file>
 
-<file path=ppt/slides/slide24.xml><?xml version="1.0" encoding="utf-8"?>
+<file path=ppt/slides/slide29.xml><?xml version="1.0" encoding="utf-8"?>
 <p:sld xmlns:a="http://schemas.openxmlformats.org/drawingml/2006/main" xmlns:r="http://schemas.openxmlformats.org/officeDocument/2006/relationships" xmlns:p="http://schemas.openxmlformats.org/presentationml/2006/main">
   <p:cSld>
     <p:spTree>
@@ -16996,7 +19068,71 @@
 </p:sld>
 </file>
 
-<file path=ppt/slides/slide25.xml><?xml version="1.0" encoding="utf-8"?>
+<file path=ppt/slides/slide3.xml><?xml version="1.0" encoding="utf-8"?>
+<p:sld xmlns:a="http://schemas.openxmlformats.org/drawingml/2006/main" xmlns:r="http://schemas.openxmlformats.org/officeDocument/2006/relationships" xmlns:p="http://schemas.openxmlformats.org/presentationml/2006/main">
+  <p:cSld>
+    <p:spTree>
+      <p:nvGrpSpPr>
+        <p:cNvPr id="1" name=""/>
+        <p:cNvGrpSpPr/>
+        <p:nvPr/>
+      </p:nvGrpSpPr>
+      <p:grpSpPr>
+        <a:xfrm>
+          <a:off x="0" y="0"/>
+          <a:ext cx="0" cy="0"/>
+          <a:chOff x="0" y="0"/>
+          <a:chExt cx="0" cy="0"/>
+        </a:xfrm>
+      </p:grpSpPr>
+      <p:sp>
+        <p:nvSpPr>
+          <p:cNvPr id="2" name="Title 1">
+            <a:extLst>
+              <a:ext uri="{FF2B5EF4-FFF2-40B4-BE49-F238E27FC236}">
+                <a16:creationId xmlns:a16="http://schemas.microsoft.com/office/drawing/2014/main" id="{764AD14C-6D94-4048-8030-AF3B00C6ADBA}"/>
+              </a:ext>
+            </a:extLst>
+          </p:cNvPr>
+          <p:cNvSpPr>
+            <a:spLocks noGrp="1"/>
+          </p:cNvSpPr>
+          <p:nvPr>
+            <p:ph type="title"/>
+          </p:nvPr>
+        </p:nvSpPr>
+        <p:spPr>
+          <a:xfrm>
+            <a:off x="1905000" y="2590800"/>
+            <a:ext cx="8229600" cy="990600"/>
+          </a:xfrm>
+        </p:spPr>
+        <p:txBody>
+          <a:bodyPr/>
+          <a:lstStyle/>
+          <a:p>
+            <a:pPr algn="ctr"/>
+            <a:r>
+              <a:rPr lang="en-US" dirty="0"/>
+              <a:t>Trees, spanning trees, and minimum spanning tree </a:t>
+            </a:r>
+          </a:p>
+        </p:txBody>
+      </p:sp>
+    </p:spTree>
+    <p:extLst>
+      <p:ext uri="{BB962C8B-B14F-4D97-AF65-F5344CB8AC3E}">
+        <p14:creationId xmlns:p14="http://schemas.microsoft.com/office/powerpoint/2010/main" val="1929170631"/>
+      </p:ext>
+    </p:extLst>
+  </p:cSld>
+  <p:clrMapOvr>
+    <a:masterClrMapping/>
+  </p:clrMapOvr>
+</p:sld>
+</file>
+
+<file path=ppt/slides/slide30.xml><?xml version="1.0" encoding="utf-8"?>
 <p:sld xmlns:a="http://schemas.openxmlformats.org/drawingml/2006/main" xmlns:r="http://schemas.openxmlformats.org/officeDocument/2006/relationships" xmlns:p="http://schemas.openxmlformats.org/presentationml/2006/main">
   <p:cSld>
     <p:spTree>
@@ -17060,7 +19196,7 @@
 </p:sld>
 </file>
 
-<file path=ppt/slides/slide26.xml><?xml version="1.0" encoding="utf-8"?>
+<file path=ppt/slides/slide31.xml><?xml version="1.0" encoding="utf-8"?>
 <p:sld xmlns:a="http://schemas.openxmlformats.org/drawingml/2006/main" xmlns:r="http://schemas.openxmlformats.org/officeDocument/2006/relationships" xmlns:p="http://schemas.openxmlformats.org/presentationml/2006/main">
   <p:cSld>
     <p:spTree>
@@ -17140,8 +19276,8 @@
           </a:p>
         </p:txBody>
       </p:sp>
-      <mc:AlternateContent xmlns:mc="http://schemas.openxmlformats.org/markup-compatibility/2006">
-        <mc:Choice xmlns:a14="http://schemas.microsoft.com/office/drawing/2010/main" Requires="a14">
+      <mc:AlternateContent xmlns:mc="http://schemas.openxmlformats.org/markup-compatibility/2006" xmlns:a14="http://schemas.microsoft.com/office/drawing/2010/main">
+        <mc:Choice Requires="a14">
           <p:sp>
             <p:nvSpPr>
               <p:cNvPr id="4" name="Content Placeholder 2">
@@ -17496,7 +19632,7 @@
             </p:txBody>
           </p:sp>
         </mc:Choice>
-        <mc:Fallback>
+        <mc:Fallback xmlns="">
           <p:sp>
             <p:nvSpPr>
               <p:cNvPr id="4" name="Content Placeholder 2">
@@ -17782,7 +19918,7 @@
 </p:sld>
 </file>
 
-<file path=ppt/slides/slide27.xml><?xml version="1.0" encoding="utf-8"?>
+<file path=ppt/slides/slide32.xml><?xml version="1.0" encoding="utf-8"?>
 <p:sld xmlns:a="http://schemas.openxmlformats.org/drawingml/2006/main" xmlns:r="http://schemas.openxmlformats.org/officeDocument/2006/relationships" xmlns:p="http://schemas.openxmlformats.org/presentationml/2006/main">
   <p:cSld>
     <p:spTree>
@@ -18074,7 +20210,7 @@
 </p:sld>
 </file>
 
-<file path=ppt/slides/slide28.xml><?xml version="1.0" encoding="utf-8"?>
+<file path=ppt/slides/slide33.xml><?xml version="1.0" encoding="utf-8"?>
 <p:sld xmlns:a="http://schemas.openxmlformats.org/drawingml/2006/main" xmlns:r="http://schemas.openxmlformats.org/officeDocument/2006/relationships" xmlns:p="http://schemas.openxmlformats.org/presentationml/2006/main">
   <p:cSld>
     <p:spTree>
@@ -18378,7 +20514,7 @@
 </p:sld>
 </file>
 
-<file path=ppt/slides/slide29.xml><?xml version="1.0" encoding="utf-8"?>
+<file path=ppt/slides/slide34.xml><?xml version="1.0" encoding="utf-8"?>
 <p:sld xmlns:a="http://schemas.openxmlformats.org/drawingml/2006/main" xmlns:r="http://schemas.openxmlformats.org/officeDocument/2006/relationships" xmlns:p="http://schemas.openxmlformats.org/presentationml/2006/main">
   <p:cSld>
     <p:spTree>
@@ -18420,8 +20556,8 @@
           </a:p>
         </p:txBody>
       </p:sp>
-      <mc:AlternateContent xmlns:mc="http://schemas.openxmlformats.org/markup-compatibility/2006">
-        <mc:Choice xmlns:a14="http://schemas.microsoft.com/office/drawing/2010/main" Requires="a14">
+      <mc:AlternateContent xmlns:mc="http://schemas.openxmlformats.org/markup-compatibility/2006" xmlns:a14="http://schemas.microsoft.com/office/drawing/2010/main">
+        <mc:Choice Requires="a14">
           <p:sp>
             <p:nvSpPr>
               <p:cNvPr id="3" name="Content Placeholder 2">
@@ -18781,7 +20917,7 @@
             </p:txBody>
           </p:sp>
         </mc:Choice>
-        <mc:Fallback>
+        <mc:Fallback xmlns="">
           <p:sp>
             <p:nvSpPr>
               <p:cNvPr id="3" name="Content Placeholder 2">
@@ -18834,71 +20970,7 @@
 </p:sld>
 </file>
 
-<file path=ppt/slides/slide3.xml><?xml version="1.0" encoding="utf-8"?>
-<p:sld xmlns:a="http://schemas.openxmlformats.org/drawingml/2006/main" xmlns:r="http://schemas.openxmlformats.org/officeDocument/2006/relationships" xmlns:p="http://schemas.openxmlformats.org/presentationml/2006/main">
-  <p:cSld>
-    <p:spTree>
-      <p:nvGrpSpPr>
-        <p:cNvPr id="1" name=""/>
-        <p:cNvGrpSpPr/>
-        <p:nvPr/>
-      </p:nvGrpSpPr>
-      <p:grpSpPr>
-        <a:xfrm>
-          <a:off x="0" y="0"/>
-          <a:ext cx="0" cy="0"/>
-          <a:chOff x="0" y="0"/>
-          <a:chExt cx="0" cy="0"/>
-        </a:xfrm>
-      </p:grpSpPr>
-      <p:sp>
-        <p:nvSpPr>
-          <p:cNvPr id="2" name="Title 1">
-            <a:extLst>
-              <a:ext uri="{FF2B5EF4-FFF2-40B4-BE49-F238E27FC236}">
-                <a16:creationId xmlns:a16="http://schemas.microsoft.com/office/drawing/2014/main" id="{764AD14C-6D94-4048-8030-AF3B00C6ADBA}"/>
-              </a:ext>
-            </a:extLst>
-          </p:cNvPr>
-          <p:cNvSpPr>
-            <a:spLocks noGrp="1"/>
-          </p:cNvSpPr>
-          <p:nvPr>
-            <p:ph type="title"/>
-          </p:nvPr>
-        </p:nvSpPr>
-        <p:spPr>
-          <a:xfrm>
-            <a:off x="1905000" y="2590800"/>
-            <a:ext cx="8229600" cy="990600"/>
-          </a:xfrm>
-        </p:spPr>
-        <p:txBody>
-          <a:bodyPr/>
-          <a:lstStyle/>
-          <a:p>
-            <a:pPr algn="ctr"/>
-            <a:r>
-              <a:rPr lang="en-US" dirty="0"/>
-              <a:t>Trees, spanning trees, and minimum spanning tree </a:t>
-            </a:r>
-          </a:p>
-        </p:txBody>
-      </p:sp>
-    </p:spTree>
-    <p:extLst>
-      <p:ext uri="{BB962C8B-B14F-4D97-AF65-F5344CB8AC3E}">
-        <p14:creationId xmlns:p14="http://schemas.microsoft.com/office/powerpoint/2010/main" val="1929170631"/>
-      </p:ext>
-    </p:extLst>
-  </p:cSld>
-  <p:clrMapOvr>
-    <a:masterClrMapping/>
-  </p:clrMapOvr>
-</p:sld>
-</file>
-
-<file path=ppt/slides/slide30.xml><?xml version="1.0" encoding="utf-8"?>
+<file path=ppt/slides/slide35.xml><?xml version="1.0" encoding="utf-8"?>
 <p:sld xmlns:a="http://schemas.openxmlformats.org/drawingml/2006/main" xmlns:r="http://schemas.openxmlformats.org/officeDocument/2006/relationships" xmlns:p="http://schemas.openxmlformats.org/presentationml/2006/main">
   <p:cSld>
     <p:spTree>
@@ -19097,7 +21169,7 @@
 </p:sld>
 </file>
 
-<file path=ppt/slides/slide31.xml><?xml version="1.0" encoding="utf-8"?>
+<file path=ppt/slides/slide36.xml><?xml version="1.0" encoding="utf-8"?>
 <p:sld xmlns:a="http://schemas.openxmlformats.org/drawingml/2006/main" xmlns:r="http://schemas.openxmlformats.org/officeDocument/2006/relationships" xmlns:p="http://schemas.openxmlformats.org/presentationml/2006/main">
   <p:cSld>
     <p:spTree>
@@ -19592,7 +21664,7 @@
 </p:sld>
 </file>
 
-<file path=ppt/slides/slide32.xml><?xml version="1.0" encoding="utf-8"?>
+<file path=ppt/slides/slide37.xml><?xml version="1.0" encoding="utf-8"?>
 <p:sld xmlns:a="http://schemas.openxmlformats.org/drawingml/2006/main" xmlns:r="http://schemas.openxmlformats.org/officeDocument/2006/relationships" xmlns:p="http://schemas.openxmlformats.org/presentationml/2006/main">
   <p:cSld>
     <p:spTree>
@@ -19695,7 +21767,7 @@
 </p:sld>
 </file>
 
-<file path=ppt/slides/slide33.xml><?xml version="1.0" encoding="utf-8"?>
+<file path=ppt/slides/slide38.xml><?xml version="1.0" encoding="utf-8"?>
 <p:sld xmlns:a="http://schemas.openxmlformats.org/drawingml/2006/main" xmlns:r="http://schemas.openxmlformats.org/officeDocument/2006/relationships" xmlns:p="http://schemas.openxmlformats.org/presentationml/2006/main">
   <p:cSld>
     <p:spTree>
@@ -19740,8 +21812,8 @@
           </a:p>
         </p:txBody>
       </p:sp>
-      <mc:AlternateContent xmlns:mc="http://schemas.openxmlformats.org/markup-compatibility/2006" xmlns:a14="http://schemas.microsoft.com/office/drawing/2010/main">
-        <mc:Choice Requires="a14">
+      <mc:AlternateContent xmlns:mc="http://schemas.openxmlformats.org/markup-compatibility/2006">
+        <mc:Choice xmlns:a14="http://schemas.microsoft.com/office/drawing/2010/main" Requires="a14">
           <p:sp>
             <p:nvSpPr>
               <p:cNvPr id="3" name="Content Placeholder 2">
@@ -19771,15 +21843,7 @@
               <a:p>
                 <a:r>
                   <a:rPr lang="en-US" dirty="0"/>
-                  <a:t>The maximum size of </a:t>
-                </a:r>
-                <a:r>
-                  <a:rPr lang="en-US" i="1" dirty="0"/>
-                  <a:t>Q</a:t>
-                </a:r>
-                <a:r>
-                  <a:rPr lang="en-US" dirty="0"/>
-                  <a:t> is </a:t>
+                  <a:t>The maximum size of the priority-queue is </a:t>
                 </a:r>
                 <a:r>
                   <a:rPr lang="en-US" i="1" dirty="0"/>
@@ -20026,7 +22090,7 @@
             </p:txBody>
           </p:sp>
         </mc:Choice>
-        <mc:Fallback xmlns="">
+        <mc:Fallback>
           <p:sp>
             <p:nvSpPr>
               <p:cNvPr id="3" name="Content Placeholder 2">
@@ -20047,7 +22111,7 @@
               <a:blipFill>
                 <a:blip r:embed="rId2"/>
                 <a:stretch>
-                  <a:fillRect l="-667" t="-1111"/>
+                  <a:fillRect l="-500" t="-1111"/>
                 </a:stretch>
               </a:blipFill>
             </p:spPr>
@@ -20079,7 +22143,1585 @@
 </p:sld>
 </file>
 
-<file path=ppt/slides/slide34.xml><?xml version="1.0" encoding="utf-8"?>
+<file path=ppt/slides/slide39.xml><?xml version="1.0" encoding="utf-8"?>
+<p:sld xmlns:a="http://schemas.openxmlformats.org/drawingml/2006/main" xmlns:r="http://schemas.openxmlformats.org/officeDocument/2006/relationships" xmlns:p="http://schemas.openxmlformats.org/presentationml/2006/main">
+  <p:cSld>
+    <p:spTree>
+      <p:nvGrpSpPr>
+        <p:cNvPr id="1" name="">
+          <a:extLst>
+            <a:ext uri="{FF2B5EF4-FFF2-40B4-BE49-F238E27FC236}">
+              <a16:creationId xmlns:a16="http://schemas.microsoft.com/office/drawing/2014/main" id="{27DA3B9D-0B7D-51D8-F391-BF94B0FB92E9}"/>
+            </a:ext>
+          </a:extLst>
+        </p:cNvPr>
+        <p:cNvGrpSpPr/>
+        <p:nvPr/>
+      </p:nvGrpSpPr>
+      <p:grpSpPr>
+        <a:xfrm>
+          <a:off x="0" y="0"/>
+          <a:ext cx="0" cy="0"/>
+          <a:chOff x="0" y="0"/>
+          <a:chExt cx="0" cy="0"/>
+        </a:xfrm>
+      </p:grpSpPr>
+      <p:sp>
+        <p:nvSpPr>
+          <p:cNvPr id="2" name="Title 1">
+            <a:extLst>
+              <a:ext uri="{FF2B5EF4-FFF2-40B4-BE49-F238E27FC236}">
+                <a16:creationId xmlns:a16="http://schemas.microsoft.com/office/drawing/2014/main" id="{33081D45-D2F8-30A3-1171-64E33063EC6A}"/>
+              </a:ext>
+            </a:extLst>
+          </p:cNvPr>
+          <p:cNvSpPr>
+            <a:spLocks noGrp="1"/>
+          </p:cNvSpPr>
+          <p:nvPr>
+            <p:ph type="title"/>
+          </p:nvPr>
+        </p:nvSpPr>
+        <p:spPr/>
+        <p:txBody>
+          <a:bodyPr/>
+          <a:lstStyle/>
+          <a:p>
+            <a:r>
+              <a:rPr lang="en-US" dirty="0"/>
+              <a:t>Time complexity analysis</a:t>
+            </a:r>
+          </a:p>
+        </p:txBody>
+      </p:sp>
+      <mc:AlternateContent xmlns:mc="http://schemas.openxmlformats.org/markup-compatibility/2006">
+        <mc:Choice xmlns:a14="http://schemas.microsoft.com/office/drawing/2010/main" Requires="a14">
+          <p:sp>
+            <p:nvSpPr>
+              <p:cNvPr id="3" name="Content Placeholder 2">
+                <a:extLst>
+                  <a:ext uri="{FF2B5EF4-FFF2-40B4-BE49-F238E27FC236}">
+                    <a16:creationId xmlns:a16="http://schemas.microsoft.com/office/drawing/2014/main" id="{7AC952D6-E0CF-1BCA-F075-EF750D2C2207}"/>
+                  </a:ext>
+                </a:extLst>
+              </p:cNvPr>
+              <p:cNvSpPr>
+                <a:spLocks noGrp="1"/>
+              </p:cNvSpPr>
+              <p:nvPr>
+                <p:ph sz="quarter" idx="1"/>
+              </p:nvPr>
+            </p:nvSpPr>
+            <p:spPr/>
+            <p:txBody>
+              <a:bodyPr/>
+              <a:lstStyle/>
+              <a:p>
+                <a:r>
+                  <a:rPr lang="en-US" dirty="0"/>
+                  <a:t>We use min-heap to implement the priority queue </a:t>
+                </a:r>
+              </a:p>
+              <a:p>
+                <a:r>
+                  <a:rPr lang="en-US" dirty="0"/>
+                  <a:t>The maximum size of the priority-queue is </a:t>
+                </a:r>
+                <a:r>
+                  <a:rPr lang="en-US" i="1" dirty="0"/>
+                  <a:t>____</a:t>
+                </a:r>
+              </a:p>
+              <a:p>
+                <a:r>
+                  <a:rPr lang="en-US" dirty="0"/>
+                  <a:t># iterations of While-loop? </a:t>
+                </a:r>
+              </a:p>
+              <a:p>
+                <a:pPr lvl="1"/>
+                <a:r>
+                  <a:rPr lang="en-US" i="1" dirty="0"/>
+                  <a:t> </a:t>
+                </a:r>
+              </a:p>
+              <a:p>
+                <a:r>
+                  <a:rPr lang="en-US" dirty="0"/>
+                  <a:t># iterations of each call of the inner for-loop? </a:t>
+                </a:r>
+              </a:p>
+              <a:p>
+                <a:pPr lvl="1"/>
+                <a14:m>
+                  <m:oMath xmlns:m="http://schemas.openxmlformats.org/officeDocument/2006/math">
+                    <m:r>
+                      <a:rPr lang="en-US" b="0" i="1" smtClean="0">
+                        <a:latin typeface="Cambria Math" panose="02040503050406030204" pitchFamily="18" charset="0"/>
+                      </a:rPr>
+                      <m:t> </m:t>
+                    </m:r>
+                  </m:oMath>
+                </a14:m>
+                <a:endParaRPr lang="en-US" dirty="0"/>
+              </a:p>
+              <a:p>
+                <a:r>
+                  <a:rPr lang="en-US" dirty="0"/>
+                  <a:t>Total #times lines 7—10 are executed:</a:t>
+                </a:r>
+              </a:p>
+              <a:p>
+                <a:pPr lvl="1"/>
+                <a14:m>
+                  <m:oMath xmlns:m="http://schemas.openxmlformats.org/officeDocument/2006/math">
+                    <m:r>
+                      <a:rPr lang="en-US" b="0" i="1" smtClean="0">
+                        <a:latin typeface="Cambria Math" panose="02040503050406030204" pitchFamily="18" charset="0"/>
+                      </a:rPr>
+                      <m:t> </m:t>
+                    </m:r>
+                  </m:oMath>
+                </a14:m>
+                <a:endParaRPr lang="en-US" dirty="0"/>
+              </a:p>
+            </p:txBody>
+          </p:sp>
+        </mc:Choice>
+        <mc:Fallback>
+          <p:sp>
+            <p:nvSpPr>
+              <p:cNvPr id="3" name="Content Placeholder 2">
+                <a:extLst>
+                  <a:ext uri="{FF2B5EF4-FFF2-40B4-BE49-F238E27FC236}">
+                    <a16:creationId xmlns:a16="http://schemas.microsoft.com/office/drawing/2014/main" id="{7AC952D6-E0CF-1BCA-F075-EF750D2C2207}"/>
+                  </a:ext>
+                </a:extLst>
+              </p:cNvPr>
+              <p:cNvSpPr>
+                <a:spLocks noGrp="1" noRot="1" noChangeAspect="1" noMove="1" noResize="1" noEditPoints="1" noAdjustHandles="1" noChangeArrowheads="1" noChangeShapeType="1" noTextEdit="1"/>
+              </p:cNvSpPr>
+              <p:nvPr>
+                <p:ph sz="quarter" idx="1"/>
+              </p:nvPr>
+            </p:nvSpPr>
+            <p:spPr>
+              <a:blipFill>
+                <a:blip r:embed="rId2"/>
+                <a:stretch>
+                  <a:fillRect l="-500" t="-1111"/>
+                </a:stretch>
+              </a:blipFill>
+            </p:spPr>
+            <p:txBody>
+              <a:bodyPr/>
+              <a:lstStyle/>
+              <a:p>
+                <a:r>
+                  <a:rPr lang="en-US">
+                    <a:noFill/>
+                  </a:rPr>
+                  <a:t> </a:t>
+                </a:r>
+              </a:p>
+            </p:txBody>
+          </p:sp>
+        </mc:Fallback>
+      </mc:AlternateContent>
+    </p:spTree>
+    <p:extLst>
+      <p:ext uri="{BB962C8B-B14F-4D97-AF65-F5344CB8AC3E}">
+        <p14:creationId xmlns:p14="http://schemas.microsoft.com/office/powerpoint/2010/main" val="1147764649"/>
+      </p:ext>
+    </p:extLst>
+  </p:cSld>
+  <p:clrMapOvr>
+    <a:masterClrMapping/>
+  </p:clrMapOvr>
+</p:sld>
+</file>
+
+<file path=ppt/slides/slide4.xml><?xml version="1.0" encoding="utf-8"?>
+<p:sld xmlns:a="http://schemas.openxmlformats.org/drawingml/2006/main" xmlns:r="http://schemas.openxmlformats.org/officeDocument/2006/relationships" xmlns:p="http://schemas.openxmlformats.org/presentationml/2006/main">
+  <p:cSld>
+    <p:spTree>
+      <p:nvGrpSpPr>
+        <p:cNvPr id="1" name=""/>
+        <p:cNvGrpSpPr/>
+        <p:nvPr/>
+      </p:nvGrpSpPr>
+      <p:grpSpPr>
+        <a:xfrm>
+          <a:off x="0" y="0"/>
+          <a:ext cx="0" cy="0"/>
+          <a:chOff x="0" y="0"/>
+          <a:chExt cx="0" cy="0"/>
+        </a:xfrm>
+      </p:grpSpPr>
+      <p:sp>
+        <p:nvSpPr>
+          <p:cNvPr id="2" name="Title 1">
+            <a:extLst>
+              <a:ext uri="{FF2B5EF4-FFF2-40B4-BE49-F238E27FC236}">
+                <a16:creationId xmlns:a16="http://schemas.microsoft.com/office/drawing/2014/main" id="{F8DCFEB4-B1BE-49D2-B3AD-40D59C0661D4}"/>
+              </a:ext>
+            </a:extLst>
+          </p:cNvPr>
+          <p:cNvSpPr>
+            <a:spLocks noGrp="1"/>
+          </p:cNvSpPr>
+          <p:nvPr>
+            <p:ph type="title"/>
+          </p:nvPr>
+        </p:nvSpPr>
+        <p:spPr/>
+        <p:txBody>
+          <a:bodyPr/>
+          <a:lstStyle/>
+          <a:p>
+            <a:r>
+              <a:rPr lang="en-US" dirty="0"/>
+              <a:t>Trees</a:t>
+            </a:r>
+          </a:p>
+        </p:txBody>
+      </p:sp>
+      <mc:AlternateContent xmlns:mc="http://schemas.openxmlformats.org/markup-compatibility/2006" xmlns:a14="http://schemas.microsoft.com/office/drawing/2010/main">
+        <mc:Choice Requires="a14">
+          <p:sp>
+            <p:nvSpPr>
+              <p:cNvPr id="3" name="Content Placeholder 2">
+                <a:extLst>
+                  <a:ext uri="{FF2B5EF4-FFF2-40B4-BE49-F238E27FC236}">
+                    <a16:creationId xmlns:a16="http://schemas.microsoft.com/office/drawing/2014/main" id="{76CDD15A-FAD1-4CF4-9358-32E9357B9CD6}"/>
+                  </a:ext>
+                </a:extLst>
+              </p:cNvPr>
+              <p:cNvSpPr>
+                <a:spLocks noGrp="1"/>
+              </p:cNvSpPr>
+              <p:nvPr>
+                <p:ph sz="quarter" idx="1"/>
+              </p:nvPr>
+            </p:nvSpPr>
+            <p:spPr>
+              <a:xfrm>
+                <a:off x="609600" y="1219200"/>
+                <a:ext cx="10972800" cy="1447800"/>
+              </a:xfrm>
+            </p:spPr>
+            <p:txBody>
+              <a:bodyPr/>
+              <a:lstStyle/>
+              <a:p>
+                <a:r>
+                  <a:rPr lang="en-US" dirty="0"/>
+                  <a:t>An undirected graph </a:t>
+                </a:r>
+                <a14:m>
+                  <m:oMath xmlns:m="http://schemas.openxmlformats.org/officeDocument/2006/math">
+                    <m:r>
+                      <a:rPr lang="en-US" b="0" i="1" smtClean="0">
+                        <a:latin typeface="Cambria Math" panose="02040503050406030204" pitchFamily="18" charset="0"/>
+                      </a:rPr>
+                      <m:t>𝐺</m:t>
+                    </m:r>
+                    <m:r>
+                      <a:rPr lang="en-US" b="0" i="1" smtClean="0">
+                        <a:latin typeface="Cambria Math" panose="02040503050406030204" pitchFamily="18" charset="0"/>
+                      </a:rPr>
+                      <m:t>=</m:t>
+                    </m:r>
+                    <m:d>
+                      <m:dPr>
+                        <m:ctrlPr>
+                          <a:rPr lang="en-US" b="0" i="1" smtClean="0">
+                            <a:latin typeface="Cambria Math" panose="02040503050406030204" pitchFamily="18" charset="0"/>
+                          </a:rPr>
+                        </m:ctrlPr>
+                      </m:dPr>
+                      <m:e>
+                        <m:r>
+                          <a:rPr lang="en-US" b="0" i="1" smtClean="0">
+                            <a:latin typeface="Cambria Math" panose="02040503050406030204" pitchFamily="18" charset="0"/>
+                          </a:rPr>
+                          <m:t>𝑉</m:t>
+                        </m:r>
+                        <m:r>
+                          <a:rPr lang="en-US" b="0" i="1" smtClean="0">
+                            <a:latin typeface="Cambria Math" panose="02040503050406030204" pitchFamily="18" charset="0"/>
+                          </a:rPr>
+                          <m:t>, </m:t>
+                        </m:r>
+                        <m:r>
+                          <a:rPr lang="en-US" b="0" i="1" smtClean="0">
+                            <a:latin typeface="Cambria Math" panose="02040503050406030204" pitchFamily="18" charset="0"/>
+                          </a:rPr>
+                          <m:t>𝐸</m:t>
+                        </m:r>
+                      </m:e>
+                    </m:d>
+                  </m:oMath>
+                </a14:m>
+                <a:r>
+                  <a:rPr lang="en-US" b="0" dirty="0"/>
+                  <a:t> is a </a:t>
+                </a:r>
+                <a:r>
+                  <a:rPr lang="en-US" dirty="0">
+                    <a:solidFill>
+                      <a:srgbClr val="0070C0"/>
+                    </a:solidFill>
+                  </a:rPr>
+                  <a:t>tree </a:t>
+                </a:r>
+                <a:r>
+                  <a:rPr lang="en-US" dirty="0"/>
+                  <a:t>if and only if</a:t>
+                </a:r>
+                <a:endParaRPr lang="en-US" b="0" dirty="0"/>
+              </a:p>
+              <a:p>
+                <a:pPr lvl="1"/>
+                <a:r>
+                  <a:rPr lang="en-US" dirty="0"/>
+                  <a:t>(</a:t>
+                </a:r>
+                <a:r>
+                  <a:rPr lang="en-US" dirty="0" err="1"/>
+                  <a:t>i</a:t>
+                </a:r>
+                <a:r>
+                  <a:rPr lang="en-US" dirty="0"/>
+                  <a:t>) it is connected; and </a:t>
+                </a:r>
+              </a:p>
+              <a:p>
+                <a:pPr lvl="1"/>
+                <a:r>
+                  <a:rPr lang="en-US" dirty="0"/>
+                  <a:t>(ii) i</a:t>
+                </a:r>
+                <a:r>
+                  <a:rPr lang="en-US" b="0" dirty="0"/>
+                  <a:t>t is acyclic (i.e</a:t>
+                </a:r>
+                <a:r>
+                  <a:rPr lang="en-US" dirty="0"/>
+                  <a:t>., </a:t>
+                </a:r>
+                <a:r>
+                  <a:rPr lang="en-US" b="0" dirty="0"/>
+                  <a:t>does not contain any cycle) </a:t>
+                </a:r>
+              </a:p>
+              <a:p>
+                <a:pPr lvl="1"/>
+                <a:endParaRPr lang="en-US" dirty="0"/>
+              </a:p>
+              <a:p>
+                <a:endParaRPr lang="en-US" b="0" dirty="0"/>
+              </a:p>
+              <a:p>
+                <a:pPr lvl="1"/>
+                <a:endParaRPr lang="en-US" dirty="0"/>
+              </a:p>
+            </p:txBody>
+          </p:sp>
+        </mc:Choice>
+        <mc:Fallback xmlns="">
+          <p:sp>
+            <p:nvSpPr>
+              <p:cNvPr id="3" name="Content Placeholder 2">
+                <a:extLst>
+                  <a:ext uri="{FF2B5EF4-FFF2-40B4-BE49-F238E27FC236}">
+                    <a16:creationId xmlns:a16="http://schemas.microsoft.com/office/drawing/2014/main" id="{76CDD15A-FAD1-4CF4-9358-32E9357B9CD6}"/>
+                  </a:ext>
+                </a:extLst>
+              </p:cNvPr>
+              <p:cNvSpPr>
+                <a:spLocks noGrp="1" noRot="1" noChangeAspect="1" noMove="1" noResize="1" noEditPoints="1" noAdjustHandles="1" noChangeArrowheads="1" noChangeShapeType="1" noTextEdit="1"/>
+              </p:cNvSpPr>
+              <p:nvPr>
+                <p:ph sz="quarter" idx="1"/>
+              </p:nvPr>
+            </p:nvSpPr>
+            <p:spPr>
+              <a:xfrm>
+                <a:off x="609600" y="1219200"/>
+                <a:ext cx="10972800" cy="1447800"/>
+              </a:xfrm>
+              <a:blipFill>
+                <a:blip r:embed="rId2"/>
+                <a:stretch>
+                  <a:fillRect l="-500" t="-3782"/>
+                </a:stretch>
+              </a:blipFill>
+            </p:spPr>
+            <p:txBody>
+              <a:bodyPr/>
+              <a:lstStyle/>
+              <a:p>
+                <a:r>
+                  <a:rPr lang="en-US">
+                    <a:noFill/>
+                  </a:rPr>
+                  <a:t> </a:t>
+                </a:r>
+              </a:p>
+            </p:txBody>
+          </p:sp>
+        </mc:Fallback>
+      </mc:AlternateContent>
+      <mc:AlternateContent xmlns:mc="http://schemas.openxmlformats.org/markup-compatibility/2006" xmlns:a14="http://schemas.microsoft.com/office/drawing/2010/main">
+        <mc:Choice Requires="a14">
+          <p:sp>
+            <p:nvSpPr>
+              <p:cNvPr id="5" name="Content Placeholder 2">
+                <a:extLst>
+                  <a:ext uri="{FF2B5EF4-FFF2-40B4-BE49-F238E27FC236}">
+                    <a16:creationId xmlns:a16="http://schemas.microsoft.com/office/drawing/2014/main" id="{C87AED86-A139-4A1D-B011-CBD1518E674C}"/>
+                  </a:ext>
+                </a:extLst>
+              </p:cNvPr>
+              <p:cNvSpPr txBox="1">
+                <a:spLocks/>
+              </p:cNvSpPr>
+              <p:nvPr/>
+            </p:nvSpPr>
+            <p:spPr bwMode="auto">
+              <a:xfrm>
+                <a:off x="685800" y="2895600"/>
+                <a:ext cx="10820400" cy="1066800"/>
+              </a:xfrm>
+              <a:prstGeom prst="rect">
+                <a:avLst/>
+              </a:prstGeom>
+              <a:noFill/>
+              <a:ln w="12700">
+                <a:solidFill>
+                  <a:schemeClr val="tx1"/>
+                </a:solidFill>
+                <a:miter lim="800000"/>
+                <a:headEnd/>
+                <a:tailEnd/>
+              </a:ln>
+            </p:spPr>
+            <p:txBody>
+              <a:bodyPr vert="horz" wrap="square" lIns="91440" tIns="45720" rIns="91440" bIns="45720" numCol="1" anchor="t" anchorCtr="0" compatLnSpc="1">
+                <a:prstTxWarp prst="textNoShape">
+                  <a:avLst/>
+                </a:prstTxWarp>
+              </a:bodyPr>
+              <a:lstStyle>
+                <a:lvl1pPr marL="273050" indent="-273050" algn="l" rtl="0" eaLnBrk="0" fontAlgn="base" hangingPunct="0">
+                  <a:spcBef>
+                    <a:spcPts val="600"/>
+                  </a:spcBef>
+                  <a:spcAft>
+                    <a:spcPct val="0"/>
+                  </a:spcAft>
+                  <a:buClr>
+                    <a:schemeClr val="accent1"/>
+                  </a:buClr>
+                  <a:buSzPct val="76000"/>
+                  <a:buFont typeface="Wingdings 3" pitchFamily="18" charset="2"/>
+                  <a:buChar char=""/>
+                  <a:defRPr sz="2600" kern="1200">
+                    <a:solidFill>
+                      <a:schemeClr val="tx1"/>
+                    </a:solidFill>
+                    <a:latin typeface="+mn-lt"/>
+                    <a:ea typeface="+mn-ea"/>
+                    <a:cs typeface="+mn-cs"/>
+                  </a:defRPr>
+                </a:lvl1pPr>
+                <a:lvl2pPr marL="547688" indent="-273050" algn="l" rtl="0" eaLnBrk="0" fontAlgn="base" hangingPunct="0">
+                  <a:spcBef>
+                    <a:spcPts val="500"/>
+                  </a:spcBef>
+                  <a:spcAft>
+                    <a:spcPct val="0"/>
+                  </a:spcAft>
+                  <a:buClr>
+                    <a:schemeClr val="accent2"/>
+                  </a:buClr>
+                  <a:buSzPct val="76000"/>
+                  <a:buFont typeface="Wingdings 3" pitchFamily="18" charset="2"/>
+                  <a:buChar char=""/>
+                  <a:defRPr sz="2300" kern="1200">
+                    <a:solidFill>
+                      <a:schemeClr val="tx2"/>
+                    </a:solidFill>
+                    <a:latin typeface="+mn-lt"/>
+                    <a:ea typeface="+mn-ea"/>
+                    <a:cs typeface="+mn-cs"/>
+                  </a:defRPr>
+                </a:lvl2pPr>
+                <a:lvl3pPr marL="822325" indent="-228600" algn="l" rtl="0" eaLnBrk="0" fontAlgn="base" hangingPunct="0">
+                  <a:spcBef>
+                    <a:spcPts val="500"/>
+                  </a:spcBef>
+                  <a:spcAft>
+                    <a:spcPct val="0"/>
+                  </a:spcAft>
+                  <a:buClr>
+                    <a:srgbClr val="BCBCBC"/>
+                  </a:buClr>
+                  <a:buSzPct val="76000"/>
+                  <a:buFont typeface="Wingdings 3" pitchFamily="18" charset="2"/>
+                  <a:buChar char=""/>
+                  <a:defRPr sz="2000" kern="1200">
+                    <a:solidFill>
+                      <a:schemeClr val="tx1"/>
+                    </a:solidFill>
+                    <a:latin typeface="+mn-lt"/>
+                    <a:ea typeface="+mn-ea"/>
+                    <a:cs typeface="+mn-cs"/>
+                  </a:defRPr>
+                </a:lvl3pPr>
+                <a:lvl4pPr marL="1096963" indent="-228600" algn="l" rtl="0" eaLnBrk="0" fontAlgn="base" hangingPunct="0">
+                  <a:spcBef>
+                    <a:spcPts val="400"/>
+                  </a:spcBef>
+                  <a:spcAft>
+                    <a:spcPct val="0"/>
+                  </a:spcAft>
+                  <a:buClr>
+                    <a:srgbClr val="8BA2B4"/>
+                  </a:buClr>
+                  <a:buSzPct val="70000"/>
+                  <a:buFont typeface="Wingdings" pitchFamily="2" charset="2"/>
+                  <a:buChar char=""/>
+                  <a:defRPr sz="2000" kern="1200">
+                    <a:solidFill>
+                      <a:schemeClr val="tx1"/>
+                    </a:solidFill>
+                    <a:latin typeface="+mn-lt"/>
+                    <a:ea typeface="+mn-ea"/>
+                    <a:cs typeface="+mn-cs"/>
+                  </a:defRPr>
+                </a:lvl4pPr>
+                <a:lvl5pPr marL="1371600" indent="-228600" algn="l" rtl="0" eaLnBrk="0" fontAlgn="base" hangingPunct="0">
+                  <a:spcBef>
+                    <a:spcPts val="300"/>
+                  </a:spcBef>
+                  <a:spcAft>
+                    <a:spcPct val="0"/>
+                  </a:spcAft>
+                  <a:buClr>
+                    <a:schemeClr val="accent2"/>
+                  </a:buClr>
+                  <a:buSzPct val="70000"/>
+                  <a:buFont typeface="Wingdings" pitchFamily="2" charset="2"/>
+                  <a:buChar char=""/>
+                  <a:defRPr sz="1600" kern="1200">
+                    <a:solidFill>
+                      <a:schemeClr val="tx1"/>
+                    </a:solidFill>
+                    <a:latin typeface="+mn-lt"/>
+                    <a:ea typeface="+mn-ea"/>
+                    <a:cs typeface="+mn-cs"/>
+                  </a:defRPr>
+                </a:lvl5pPr>
+                <a:lvl6pPr marL="1645920" indent="-182880" algn="l" rtl="0" eaLnBrk="1" latinLnBrk="0" hangingPunct="1">
+                  <a:spcBef>
+                    <a:spcPts val="300"/>
+                  </a:spcBef>
+                  <a:buClr>
+                    <a:srgbClr val="9FB8CD">
+                      <a:shade val="75000"/>
+                    </a:srgbClr>
+                  </a:buClr>
+                  <a:buSzPct val="75000"/>
+                  <a:buFont typeface="Wingdings 3"/>
+                  <a:buChar char=""/>
+                  <a:defRPr kumimoji="0" lang="en-US" sz="1600" kern="1200" smtClean="0">
+                    <a:solidFill>
+                      <a:schemeClr val="tx1"/>
+                    </a:solidFill>
+                    <a:latin typeface="+mn-lt"/>
+                    <a:ea typeface="+mn-ea"/>
+                    <a:cs typeface="+mn-cs"/>
+                  </a:defRPr>
+                </a:lvl6pPr>
+                <a:lvl7pPr marL="1828800" indent="-182880" algn="l" rtl="0" eaLnBrk="1" latinLnBrk="0" hangingPunct="1">
+                  <a:spcBef>
+                    <a:spcPts val="300"/>
+                  </a:spcBef>
+                  <a:buClr>
+                    <a:srgbClr val="727CA3">
+                      <a:shade val="75000"/>
+                    </a:srgbClr>
+                  </a:buClr>
+                  <a:buSzPct val="75000"/>
+                  <a:buFont typeface="Wingdings 3"/>
+                  <a:buChar char=""/>
+                  <a:defRPr kumimoji="0" lang="en-US" sz="1400" kern="1200" smtClean="0">
+                    <a:solidFill>
+                      <a:schemeClr val="tx1"/>
+                    </a:solidFill>
+                    <a:latin typeface="+mn-lt"/>
+                    <a:ea typeface="+mn-ea"/>
+                    <a:cs typeface="+mn-cs"/>
+                  </a:defRPr>
+                </a:lvl7pPr>
+                <a:lvl8pPr marL="2011680" indent="-182880" algn="l" rtl="0" eaLnBrk="1" latinLnBrk="0" hangingPunct="1">
+                  <a:spcBef>
+                    <a:spcPts val="300"/>
+                  </a:spcBef>
+                  <a:buClr>
+                    <a:prstClr val="white">
+                      <a:shade val="50000"/>
+                    </a:prstClr>
+                  </a:buClr>
+                  <a:buSzPct val="75000"/>
+                  <a:buFont typeface="Wingdings 3"/>
+                  <a:buChar char=""/>
+                  <a:defRPr kumimoji="0" lang="en-US" sz="1400" kern="1200" smtClean="0">
+                    <a:solidFill>
+                      <a:schemeClr val="tx1"/>
+                    </a:solidFill>
+                    <a:latin typeface="+mn-lt"/>
+                    <a:ea typeface="+mn-ea"/>
+                    <a:cs typeface="+mn-cs"/>
+                  </a:defRPr>
+                </a:lvl8pPr>
+                <a:lvl9pPr marL="2194560" indent="-182880" algn="l" rtl="0" eaLnBrk="1" latinLnBrk="0" hangingPunct="1">
+                  <a:spcBef>
+                    <a:spcPts val="300"/>
+                  </a:spcBef>
+                  <a:buClr>
+                    <a:srgbClr val="9FB8CD"/>
+                  </a:buClr>
+                  <a:buSzPct val="75000"/>
+                  <a:buFont typeface="Wingdings 3"/>
+                  <a:buChar char=""/>
+                  <a:defRPr kumimoji="0" lang="en-US" sz="1200" kern="1200" smtClean="0">
+                    <a:solidFill>
+                      <a:schemeClr val="tx1"/>
+                    </a:solidFill>
+                    <a:latin typeface="+mn-lt"/>
+                    <a:ea typeface="+mn-ea"/>
+                    <a:cs typeface="+mn-cs"/>
+                  </a:defRPr>
+                </a:lvl9pPr>
+              </a:lstStyle>
+              <a:p>
+                <a:r>
+                  <a:rPr lang="en-US" dirty="0">
+                    <a:latin typeface="Arial Nova Cond" panose="020B0506020202020204" pitchFamily="34" charset="0"/>
+                    <a:cs typeface="Arial" panose="020B0604020202020204" pitchFamily="34" charset="0"/>
+                  </a:rPr>
+                  <a:t>Claim [Tree Edges]</a:t>
+                </a:r>
+                <a:r>
+                  <a:rPr lang="en-US" dirty="0"/>
+                  <a:t>: </a:t>
+                </a:r>
+              </a:p>
+              <a:p>
+                <a:pPr lvl="1"/>
+                <a:r>
+                  <a:rPr lang="en-US" dirty="0"/>
+                  <a:t>If </a:t>
+                </a:r>
+                <a14:m>
+                  <m:oMath xmlns:m="http://schemas.openxmlformats.org/officeDocument/2006/math">
+                    <m:r>
+                      <a:rPr lang="en-US" i="1">
+                        <a:latin typeface="Cambria Math" panose="02040503050406030204" pitchFamily="18" charset="0"/>
+                      </a:rPr>
+                      <m:t>𝑇</m:t>
+                    </m:r>
+                    <m:r>
+                      <a:rPr lang="en-US" i="1">
+                        <a:latin typeface="Cambria Math" panose="02040503050406030204" pitchFamily="18" charset="0"/>
+                      </a:rPr>
+                      <m:t>=</m:t>
+                    </m:r>
+                    <m:d>
+                      <m:dPr>
+                        <m:ctrlPr>
+                          <a:rPr lang="en-US" i="1">
+                            <a:latin typeface="Cambria Math" panose="02040503050406030204" pitchFamily="18" charset="0"/>
+                          </a:rPr>
+                        </m:ctrlPr>
+                      </m:dPr>
+                      <m:e>
+                        <m:r>
+                          <a:rPr lang="en-US" i="1">
+                            <a:latin typeface="Cambria Math" panose="02040503050406030204" pitchFamily="18" charset="0"/>
+                          </a:rPr>
+                          <m:t>𝑉</m:t>
+                        </m:r>
+                        <m:r>
+                          <a:rPr lang="en-US" i="1">
+                            <a:latin typeface="Cambria Math" panose="02040503050406030204" pitchFamily="18" charset="0"/>
+                          </a:rPr>
+                          <m:t>, </m:t>
+                        </m:r>
+                        <m:r>
+                          <a:rPr lang="en-US" i="1">
+                            <a:latin typeface="Cambria Math" panose="02040503050406030204" pitchFamily="18" charset="0"/>
+                          </a:rPr>
+                          <m:t>𝐸</m:t>
+                        </m:r>
+                      </m:e>
+                    </m:d>
+                  </m:oMath>
+                </a14:m>
+                <a:r>
+                  <a:rPr lang="en-US" dirty="0"/>
+                  <a:t> is a tree, then we have that </a:t>
+                </a:r>
+                <a14:m>
+                  <m:oMath xmlns:m="http://schemas.openxmlformats.org/officeDocument/2006/math">
+                    <m:d>
+                      <m:dPr>
+                        <m:begChr m:val="|"/>
+                        <m:endChr m:val="|"/>
+                        <m:ctrlPr>
+                          <a:rPr lang="en-US" i="1">
+                            <a:latin typeface="Cambria Math" panose="02040503050406030204" pitchFamily="18" charset="0"/>
+                          </a:rPr>
+                        </m:ctrlPr>
+                      </m:dPr>
+                      <m:e>
+                        <m:r>
+                          <a:rPr lang="en-US" i="1">
+                            <a:latin typeface="Cambria Math" panose="02040503050406030204" pitchFamily="18" charset="0"/>
+                          </a:rPr>
+                          <m:t>𝐸</m:t>
+                        </m:r>
+                      </m:e>
+                    </m:d>
+                    <m:r>
+                      <a:rPr lang="en-US" i="1">
+                        <a:latin typeface="Cambria Math" panose="02040503050406030204" pitchFamily="18" charset="0"/>
+                      </a:rPr>
+                      <m:t>=</m:t>
+                    </m:r>
+                    <m:d>
+                      <m:dPr>
+                        <m:begChr m:val="|"/>
+                        <m:endChr m:val="|"/>
+                        <m:ctrlPr>
+                          <a:rPr lang="en-US" i="1">
+                            <a:latin typeface="Cambria Math" panose="02040503050406030204" pitchFamily="18" charset="0"/>
+                          </a:rPr>
+                        </m:ctrlPr>
+                      </m:dPr>
+                      <m:e>
+                        <m:r>
+                          <a:rPr lang="en-US" i="1">
+                            <a:latin typeface="Cambria Math" panose="02040503050406030204" pitchFamily="18" charset="0"/>
+                          </a:rPr>
+                          <m:t>𝑉</m:t>
+                        </m:r>
+                      </m:e>
+                    </m:d>
+                    <m:r>
+                      <a:rPr lang="en-US" i="1">
+                        <a:latin typeface="Cambria Math" panose="02040503050406030204" pitchFamily="18" charset="0"/>
+                      </a:rPr>
+                      <m:t>−1</m:t>
+                    </m:r>
+                  </m:oMath>
+                </a14:m>
+                <a:endParaRPr lang="en-US" dirty="0"/>
+              </a:p>
+              <a:p>
+                <a:pPr lvl="1"/>
+                <a:endParaRPr lang="en-US" dirty="0"/>
+              </a:p>
+              <a:p>
+                <a:endParaRPr lang="en-US" dirty="0"/>
+              </a:p>
+              <a:p>
+                <a:pPr lvl="1"/>
+                <a:endParaRPr lang="en-US" dirty="0"/>
+              </a:p>
+            </p:txBody>
+          </p:sp>
+        </mc:Choice>
+        <mc:Fallback xmlns="">
+          <p:sp>
+            <p:nvSpPr>
+              <p:cNvPr id="5" name="Content Placeholder 2">
+                <a:extLst>
+                  <a:ext uri="{FF2B5EF4-FFF2-40B4-BE49-F238E27FC236}">
+                    <a16:creationId xmlns:a16="http://schemas.microsoft.com/office/drawing/2014/main" id="{C87AED86-A139-4A1D-B011-CBD1518E674C}"/>
+                  </a:ext>
+                </a:extLst>
+              </p:cNvPr>
+              <p:cNvSpPr txBox="1">
+                <a:spLocks noRot="1" noChangeAspect="1" noMove="1" noResize="1" noEditPoints="1" noAdjustHandles="1" noChangeArrowheads="1" noChangeShapeType="1" noTextEdit="1"/>
+              </p:cNvSpPr>
+              <p:nvPr/>
+            </p:nvSpPr>
+            <p:spPr bwMode="auto">
+              <a:xfrm>
+                <a:off x="685800" y="2895600"/>
+                <a:ext cx="10820400" cy="1066800"/>
+              </a:xfrm>
+              <a:prstGeom prst="rect">
+                <a:avLst/>
+              </a:prstGeom>
+              <a:blipFill>
+                <a:blip r:embed="rId3"/>
+                <a:stretch>
+                  <a:fillRect l="-450" t="-5085"/>
+                </a:stretch>
+              </a:blipFill>
+              <a:ln w="12700">
+                <a:solidFill>
+                  <a:schemeClr val="tx1"/>
+                </a:solidFill>
+                <a:miter lim="800000"/>
+                <a:headEnd/>
+                <a:tailEnd/>
+              </a:ln>
+            </p:spPr>
+            <p:txBody>
+              <a:bodyPr/>
+              <a:lstStyle/>
+              <a:p>
+                <a:r>
+                  <a:rPr lang="en-US">
+                    <a:noFill/>
+                  </a:rPr>
+                  <a:t> </a:t>
+                </a:r>
+              </a:p>
+            </p:txBody>
+          </p:sp>
+        </mc:Fallback>
+      </mc:AlternateContent>
+      <p:sp>
+        <p:nvSpPr>
+          <p:cNvPr id="6" name="Content Placeholder 2">
+            <a:extLst>
+              <a:ext uri="{FF2B5EF4-FFF2-40B4-BE49-F238E27FC236}">
+                <a16:creationId xmlns:a16="http://schemas.microsoft.com/office/drawing/2014/main" id="{63B4B030-19E0-430B-8349-91F09EDCCB15}"/>
+              </a:ext>
+            </a:extLst>
+          </p:cNvPr>
+          <p:cNvSpPr txBox="1">
+            <a:spLocks/>
+          </p:cNvSpPr>
+          <p:nvPr/>
+        </p:nvSpPr>
+        <p:spPr bwMode="auto">
+          <a:xfrm>
+            <a:off x="2012731" y="4267200"/>
+            <a:ext cx="8229600" cy="2362200"/>
+          </a:xfrm>
+          <a:prstGeom prst="rect">
+            <a:avLst/>
+          </a:prstGeom>
+          <a:noFill/>
+          <a:ln w="9525">
+            <a:noFill/>
+            <a:miter lim="800000"/>
+            <a:headEnd/>
+            <a:tailEnd/>
+          </a:ln>
+        </p:spPr>
+        <p:txBody>
+          <a:bodyPr vert="horz" wrap="square" lIns="91440" tIns="45720" rIns="91440" bIns="45720" numCol="1" anchor="t" anchorCtr="0" compatLnSpc="1">
+            <a:prstTxWarp prst="textNoShape">
+              <a:avLst/>
+            </a:prstTxWarp>
+          </a:bodyPr>
+          <a:lstStyle>
+            <a:lvl1pPr marL="273050" indent="-273050" algn="l" rtl="0" eaLnBrk="0" fontAlgn="base" hangingPunct="0">
+              <a:spcBef>
+                <a:spcPts val="600"/>
+              </a:spcBef>
+              <a:spcAft>
+                <a:spcPct val="0"/>
+              </a:spcAft>
+              <a:buClr>
+                <a:schemeClr val="accent1"/>
+              </a:buClr>
+              <a:buSzPct val="76000"/>
+              <a:buFont typeface="Wingdings 3" pitchFamily="18" charset="2"/>
+              <a:buChar char=""/>
+              <a:defRPr sz="2600" kern="1200">
+                <a:solidFill>
+                  <a:schemeClr val="tx1"/>
+                </a:solidFill>
+                <a:latin typeface="+mn-lt"/>
+                <a:ea typeface="+mn-ea"/>
+                <a:cs typeface="+mn-cs"/>
+              </a:defRPr>
+            </a:lvl1pPr>
+            <a:lvl2pPr marL="547688" indent="-273050" algn="l" rtl="0" eaLnBrk="0" fontAlgn="base" hangingPunct="0">
+              <a:spcBef>
+                <a:spcPts val="500"/>
+              </a:spcBef>
+              <a:spcAft>
+                <a:spcPct val="0"/>
+              </a:spcAft>
+              <a:buClr>
+                <a:schemeClr val="accent2"/>
+              </a:buClr>
+              <a:buSzPct val="76000"/>
+              <a:buFont typeface="Wingdings 3" pitchFamily="18" charset="2"/>
+              <a:buChar char=""/>
+              <a:defRPr sz="2300" kern="1200">
+                <a:solidFill>
+                  <a:schemeClr val="tx2"/>
+                </a:solidFill>
+                <a:latin typeface="+mn-lt"/>
+                <a:ea typeface="+mn-ea"/>
+                <a:cs typeface="+mn-cs"/>
+              </a:defRPr>
+            </a:lvl2pPr>
+            <a:lvl3pPr marL="822325" indent="-228600" algn="l" rtl="0" eaLnBrk="0" fontAlgn="base" hangingPunct="0">
+              <a:spcBef>
+                <a:spcPts val="500"/>
+              </a:spcBef>
+              <a:spcAft>
+                <a:spcPct val="0"/>
+              </a:spcAft>
+              <a:buClr>
+                <a:srgbClr val="BCBCBC"/>
+              </a:buClr>
+              <a:buSzPct val="76000"/>
+              <a:buFont typeface="Wingdings 3" pitchFamily="18" charset="2"/>
+              <a:buChar char=""/>
+              <a:defRPr sz="2000" kern="1200">
+                <a:solidFill>
+                  <a:schemeClr val="tx1"/>
+                </a:solidFill>
+                <a:latin typeface="+mn-lt"/>
+                <a:ea typeface="+mn-ea"/>
+                <a:cs typeface="+mn-cs"/>
+              </a:defRPr>
+            </a:lvl3pPr>
+            <a:lvl4pPr marL="1096963" indent="-228600" algn="l" rtl="0" eaLnBrk="0" fontAlgn="base" hangingPunct="0">
+              <a:spcBef>
+                <a:spcPts val="400"/>
+              </a:spcBef>
+              <a:spcAft>
+                <a:spcPct val="0"/>
+              </a:spcAft>
+              <a:buClr>
+                <a:srgbClr val="8BA2B4"/>
+              </a:buClr>
+              <a:buSzPct val="70000"/>
+              <a:buFont typeface="Wingdings" pitchFamily="2" charset="2"/>
+              <a:buChar char=""/>
+              <a:defRPr sz="2000" kern="1200">
+                <a:solidFill>
+                  <a:schemeClr val="tx1"/>
+                </a:solidFill>
+                <a:latin typeface="+mn-lt"/>
+                <a:ea typeface="+mn-ea"/>
+                <a:cs typeface="+mn-cs"/>
+              </a:defRPr>
+            </a:lvl4pPr>
+            <a:lvl5pPr marL="1371600" indent="-228600" algn="l" rtl="0" eaLnBrk="0" fontAlgn="base" hangingPunct="0">
+              <a:spcBef>
+                <a:spcPts val="300"/>
+              </a:spcBef>
+              <a:spcAft>
+                <a:spcPct val="0"/>
+              </a:spcAft>
+              <a:buClr>
+                <a:schemeClr val="accent2"/>
+              </a:buClr>
+              <a:buSzPct val="70000"/>
+              <a:buFont typeface="Wingdings" pitchFamily="2" charset="2"/>
+              <a:buChar char=""/>
+              <a:defRPr sz="1600" kern="1200">
+                <a:solidFill>
+                  <a:schemeClr val="tx1"/>
+                </a:solidFill>
+                <a:latin typeface="+mn-lt"/>
+                <a:ea typeface="+mn-ea"/>
+                <a:cs typeface="+mn-cs"/>
+              </a:defRPr>
+            </a:lvl5pPr>
+            <a:lvl6pPr marL="1645920" indent="-182880" algn="l" rtl="0" eaLnBrk="1" latinLnBrk="0" hangingPunct="1">
+              <a:spcBef>
+                <a:spcPts val="300"/>
+              </a:spcBef>
+              <a:buClr>
+                <a:srgbClr val="9FB8CD">
+                  <a:shade val="75000"/>
+                </a:srgbClr>
+              </a:buClr>
+              <a:buSzPct val="75000"/>
+              <a:buFont typeface="Wingdings 3"/>
+              <a:buChar char=""/>
+              <a:defRPr kumimoji="0" lang="en-US" sz="1600" kern="1200" smtClean="0">
+                <a:solidFill>
+                  <a:schemeClr val="tx1"/>
+                </a:solidFill>
+                <a:latin typeface="+mn-lt"/>
+                <a:ea typeface="+mn-ea"/>
+                <a:cs typeface="+mn-cs"/>
+              </a:defRPr>
+            </a:lvl6pPr>
+            <a:lvl7pPr marL="1828800" indent="-182880" algn="l" rtl="0" eaLnBrk="1" latinLnBrk="0" hangingPunct="1">
+              <a:spcBef>
+                <a:spcPts val="300"/>
+              </a:spcBef>
+              <a:buClr>
+                <a:srgbClr val="727CA3">
+                  <a:shade val="75000"/>
+                </a:srgbClr>
+              </a:buClr>
+              <a:buSzPct val="75000"/>
+              <a:buFont typeface="Wingdings 3"/>
+              <a:buChar char=""/>
+              <a:defRPr kumimoji="0" lang="en-US" sz="1400" kern="1200" smtClean="0">
+                <a:solidFill>
+                  <a:schemeClr val="tx1"/>
+                </a:solidFill>
+                <a:latin typeface="+mn-lt"/>
+                <a:ea typeface="+mn-ea"/>
+                <a:cs typeface="+mn-cs"/>
+              </a:defRPr>
+            </a:lvl7pPr>
+            <a:lvl8pPr marL="2011680" indent="-182880" algn="l" rtl="0" eaLnBrk="1" latinLnBrk="0" hangingPunct="1">
+              <a:spcBef>
+                <a:spcPts val="300"/>
+              </a:spcBef>
+              <a:buClr>
+                <a:prstClr val="white">
+                  <a:shade val="50000"/>
+                </a:prstClr>
+              </a:buClr>
+              <a:buSzPct val="75000"/>
+              <a:buFont typeface="Wingdings 3"/>
+              <a:buChar char=""/>
+              <a:defRPr kumimoji="0" lang="en-US" sz="1400" kern="1200" smtClean="0">
+                <a:solidFill>
+                  <a:schemeClr val="tx1"/>
+                </a:solidFill>
+                <a:latin typeface="+mn-lt"/>
+                <a:ea typeface="+mn-ea"/>
+                <a:cs typeface="+mn-cs"/>
+              </a:defRPr>
+            </a:lvl8pPr>
+            <a:lvl9pPr marL="2194560" indent="-182880" algn="l" rtl="0" eaLnBrk="1" latinLnBrk="0" hangingPunct="1">
+              <a:spcBef>
+                <a:spcPts val="300"/>
+              </a:spcBef>
+              <a:buClr>
+                <a:srgbClr val="9FB8CD"/>
+              </a:buClr>
+              <a:buSzPct val="75000"/>
+              <a:buFont typeface="Wingdings 3"/>
+              <a:buChar char=""/>
+              <a:defRPr kumimoji="0" lang="en-US" sz="1200" kern="1200" smtClean="0">
+                <a:solidFill>
+                  <a:schemeClr val="tx1"/>
+                </a:solidFill>
+                <a:latin typeface="+mn-lt"/>
+                <a:ea typeface="+mn-ea"/>
+                <a:cs typeface="+mn-cs"/>
+              </a:defRPr>
+            </a:lvl9pPr>
+          </a:lstStyle>
+          <a:p>
+            <a:pPr lvl="1"/>
+            <a:endParaRPr lang="en-US" sz="1000" dirty="0"/>
+          </a:p>
+          <a:p>
+            <a:endParaRPr lang="en-US" dirty="0"/>
+          </a:p>
+          <a:p>
+            <a:pPr lvl="1"/>
+            <a:endParaRPr lang="en-US" dirty="0"/>
+          </a:p>
+          <a:p>
+            <a:endParaRPr lang="en-US" dirty="0"/>
+          </a:p>
+          <a:p>
+            <a:pPr lvl="1"/>
+            <a:endParaRPr lang="en-US" dirty="0"/>
+          </a:p>
+        </p:txBody>
+      </p:sp>
+    </p:spTree>
+    <p:extLst>
+      <p:ext uri="{BB962C8B-B14F-4D97-AF65-F5344CB8AC3E}">
+        <p14:creationId xmlns:p14="http://schemas.microsoft.com/office/powerpoint/2010/main" val="2041192070"/>
+      </p:ext>
+    </p:extLst>
+  </p:cSld>
+  <p:clrMapOvr>
+    <a:masterClrMapping/>
+  </p:clrMapOvr>
+  <p:timing>
+    <p:tnLst>
+      <p:par>
+        <p:cTn id="1" dur="indefinite" restart="never" nodeType="tmRoot">
+          <p:childTnLst>
+            <p:seq concurrent="1" nextAc="seek">
+              <p:cTn id="2" dur="indefinite" nodeType="mainSeq">
+                <p:childTnLst>
+                  <p:par>
+                    <p:cTn id="3" fill="hold">
+                      <p:stCondLst>
+                        <p:cond delay="indefinite"/>
+                      </p:stCondLst>
+                      <p:childTnLst>
+                        <p:par>
+                          <p:cTn id="4" fill="hold">
+                            <p:stCondLst>
+                              <p:cond delay="0"/>
+                            </p:stCondLst>
+                            <p:childTnLst>
+                              <p:par>
+                                <p:cTn id="5" presetID="1" presetClass="entr" presetSubtype="0" fill="hold" grpId="0" nodeType="clickEffect">
+                                  <p:stCondLst>
+                                    <p:cond delay="0"/>
+                                  </p:stCondLst>
+                                  <p:childTnLst>
+                                    <p:set>
+                                      <p:cBhvr>
+                                        <p:cTn id="6" dur="1" fill="hold">
+                                          <p:stCondLst>
+                                            <p:cond delay="0"/>
+                                          </p:stCondLst>
+                                        </p:cTn>
+                                        <p:tgtEl>
+                                          <p:spTgt spid="5"/>
+                                        </p:tgtEl>
+                                        <p:attrNameLst>
+                                          <p:attrName>style.visibility</p:attrName>
+                                        </p:attrNameLst>
+                                      </p:cBhvr>
+                                      <p:to>
+                                        <p:strVal val="visible"/>
+                                      </p:to>
+                                    </p:set>
+                                  </p:childTnLst>
+                                </p:cTn>
+                              </p:par>
+                            </p:childTnLst>
+                          </p:cTn>
+                        </p:par>
+                      </p:childTnLst>
+                    </p:cTn>
+                  </p:par>
+                </p:childTnLst>
+              </p:cTn>
+              <p:prevCondLst>
+                <p:cond evt="onPrev" delay="0">
+                  <p:tgtEl>
+                    <p:sldTgt/>
+                  </p:tgtEl>
+                </p:cond>
+              </p:prevCondLst>
+              <p:nextCondLst>
+                <p:cond evt="onNext" delay="0">
+                  <p:tgtEl>
+                    <p:sldTgt/>
+                  </p:tgtEl>
+                </p:cond>
+              </p:nextCondLst>
+            </p:seq>
+          </p:childTnLst>
+        </p:cTn>
+      </p:par>
+    </p:tnLst>
+    <p:bldLst>
+      <p:bldP spid="5" grpId="0" animBg="1"/>
+    </p:bldLst>
+  </p:timing>
+</p:sld>
+</file>
+
+<file path=ppt/slides/slide40.xml><?xml version="1.0" encoding="utf-8"?>
+<p:sld xmlns:a="http://schemas.openxmlformats.org/drawingml/2006/main" xmlns:r="http://schemas.openxmlformats.org/officeDocument/2006/relationships" xmlns:p="http://schemas.openxmlformats.org/presentationml/2006/main">
+  <p:cSld>
+    <p:spTree>
+      <p:nvGrpSpPr>
+        <p:cNvPr id="1" name="">
+          <a:extLst>
+            <a:ext uri="{FF2B5EF4-FFF2-40B4-BE49-F238E27FC236}">
+              <a16:creationId xmlns:a16="http://schemas.microsoft.com/office/drawing/2014/main" id="{2C8FE8F5-C1F9-9A62-163E-948F60A8F084}"/>
+            </a:ext>
+          </a:extLst>
+        </p:cNvPr>
+        <p:cNvGrpSpPr/>
+        <p:nvPr/>
+      </p:nvGrpSpPr>
+      <p:grpSpPr>
+        <a:xfrm>
+          <a:off x="0" y="0"/>
+          <a:ext cx="0" cy="0"/>
+          <a:chOff x="0" y="0"/>
+          <a:chExt cx="0" cy="0"/>
+        </a:xfrm>
+      </p:grpSpPr>
+      <p:sp>
+        <p:nvSpPr>
+          <p:cNvPr id="2" name="Title 1">
+            <a:extLst>
+              <a:ext uri="{FF2B5EF4-FFF2-40B4-BE49-F238E27FC236}">
+                <a16:creationId xmlns:a16="http://schemas.microsoft.com/office/drawing/2014/main" id="{E3E56BAE-24ED-4BBD-C2B7-7854B62F4382}"/>
+              </a:ext>
+            </a:extLst>
+          </p:cNvPr>
+          <p:cNvSpPr>
+            <a:spLocks noGrp="1"/>
+          </p:cNvSpPr>
+          <p:nvPr>
+            <p:ph type="title"/>
+          </p:nvPr>
+        </p:nvSpPr>
+        <p:spPr/>
+        <p:txBody>
+          <a:bodyPr/>
+          <a:lstStyle/>
+          <a:p>
+            <a:r>
+              <a:rPr lang="en-US" dirty="0"/>
+              <a:t>Time complexity analysis</a:t>
+            </a:r>
+          </a:p>
+        </p:txBody>
+      </p:sp>
+      <mc:AlternateContent xmlns:mc="http://schemas.openxmlformats.org/markup-compatibility/2006">
+        <mc:Choice xmlns:a14="http://schemas.microsoft.com/office/drawing/2010/main" Requires="a14">
+          <p:sp>
+            <p:nvSpPr>
+              <p:cNvPr id="3" name="Content Placeholder 2">
+                <a:extLst>
+                  <a:ext uri="{FF2B5EF4-FFF2-40B4-BE49-F238E27FC236}">
+                    <a16:creationId xmlns:a16="http://schemas.microsoft.com/office/drawing/2014/main" id="{DAE3863D-5D55-6B00-863F-9ECC251D6A5D}"/>
+                  </a:ext>
+                </a:extLst>
+              </p:cNvPr>
+              <p:cNvSpPr>
+                <a:spLocks noGrp="1"/>
+              </p:cNvSpPr>
+              <p:nvPr>
+                <p:ph sz="quarter" idx="1"/>
+              </p:nvPr>
+            </p:nvSpPr>
+            <p:spPr/>
+            <p:txBody>
+              <a:bodyPr/>
+              <a:lstStyle/>
+              <a:p>
+                <a:r>
+                  <a:rPr lang="en-US" dirty="0"/>
+                  <a:t>We use min-heap to implement the priority queue </a:t>
+                </a:r>
+              </a:p>
+              <a:p>
+                <a:r>
+                  <a:rPr lang="en-US" dirty="0"/>
+                  <a:t>The maximum size of the priority-queue is </a:t>
+                </a:r>
+                <a:r>
+                  <a:rPr lang="en-US" i="1" dirty="0"/>
+                  <a:t>V</a:t>
+                </a:r>
+              </a:p>
+              <a:p>
+                <a:r>
+                  <a:rPr lang="en-US" dirty="0"/>
+                  <a:t># iterations of While-loop? </a:t>
+                </a:r>
+              </a:p>
+              <a:p>
+                <a:pPr lvl="1"/>
+                <a:r>
+                  <a:rPr lang="en-US" i="1" dirty="0"/>
+                  <a:t>V</a:t>
+                </a:r>
+              </a:p>
+              <a:p>
+                <a:r>
+                  <a:rPr lang="en-US" dirty="0"/>
+                  <a:t># iterations of each call of the inner for-loop? </a:t>
+                </a:r>
+              </a:p>
+              <a:p>
+                <a:pPr lvl="1"/>
+                <a14:m>
+                  <m:oMath xmlns:m="http://schemas.openxmlformats.org/officeDocument/2006/math">
+                    <m:func>
+                      <m:funcPr>
+                        <m:ctrlPr>
+                          <a:rPr lang="en-US" b="0" i="1" smtClean="0">
+                            <a:latin typeface="Cambria Math" panose="02040503050406030204" pitchFamily="18" charset="0"/>
+                          </a:rPr>
+                        </m:ctrlPr>
+                      </m:funcPr>
+                      <m:fName>
+                        <m:r>
+                          <m:rPr>
+                            <m:sty m:val="p"/>
+                          </m:rPr>
+                          <a:rPr lang="en-US" b="0" i="0" smtClean="0">
+                            <a:latin typeface="Cambria Math"/>
+                          </a:rPr>
+                          <m:t>deg</m:t>
+                        </m:r>
+                      </m:fName>
+                      <m:e>
+                        <m:d>
+                          <m:dPr>
+                            <m:ctrlPr>
+                              <a:rPr lang="en-US" b="0" i="1" smtClean="0">
+                                <a:latin typeface="Cambria Math" panose="02040503050406030204" pitchFamily="18" charset="0"/>
+                              </a:rPr>
+                            </m:ctrlPr>
+                          </m:dPr>
+                          <m:e>
+                            <m:sSub>
+                              <m:sSubPr>
+                                <m:ctrlPr>
+                                  <a:rPr lang="en-US" b="0" i="1" smtClean="0">
+                                    <a:latin typeface="Cambria Math" panose="02040503050406030204" pitchFamily="18" charset="0"/>
+                                  </a:rPr>
+                                </m:ctrlPr>
+                              </m:sSubPr>
+                              <m:e>
+                                <m:r>
+                                  <a:rPr lang="en-US" b="0" i="1" smtClean="0">
+                                    <a:latin typeface="Cambria Math"/>
+                                  </a:rPr>
+                                  <m:t>𝑣</m:t>
+                                </m:r>
+                              </m:e>
+                              <m:sub>
+                                <m:r>
+                                  <a:rPr lang="en-US" b="0" i="1" smtClean="0">
+                                    <a:latin typeface="Cambria Math"/>
+                                  </a:rPr>
+                                  <m:t>𝑗</m:t>
+                                </m:r>
+                              </m:sub>
+                            </m:sSub>
+                          </m:e>
+                        </m:d>
+                      </m:e>
+                    </m:func>
+                  </m:oMath>
+                </a14:m>
+                <a:endParaRPr lang="en-US" dirty="0"/>
+              </a:p>
+              <a:p>
+                <a:r>
+                  <a:rPr lang="en-US" dirty="0"/>
+                  <a:t>Total #times lines 7—10 are executed:</a:t>
+                </a:r>
+              </a:p>
+              <a:p>
+                <a:pPr lvl="1"/>
+                <a14:m>
+                  <m:oMath xmlns:m="http://schemas.openxmlformats.org/officeDocument/2006/math">
+                    <m:nary>
+                      <m:naryPr>
+                        <m:chr m:val="∑"/>
+                        <m:supHide m:val="on"/>
+                        <m:ctrlPr>
+                          <a:rPr lang="en-US" b="0" i="1" smtClean="0">
+                            <a:latin typeface="Cambria Math" panose="02040503050406030204" pitchFamily="18" charset="0"/>
+                          </a:rPr>
+                        </m:ctrlPr>
+                      </m:naryPr>
+                      <m:sub>
+                        <m:sSub>
+                          <m:sSubPr>
+                            <m:ctrlPr>
+                              <a:rPr lang="en-US" b="0" i="1" smtClean="0">
+                                <a:latin typeface="Cambria Math" panose="02040503050406030204" pitchFamily="18" charset="0"/>
+                              </a:rPr>
+                            </m:ctrlPr>
+                          </m:sSubPr>
+                          <m:e>
+                            <m:r>
+                              <a:rPr lang="en-US" b="0" i="1" smtClean="0">
+                                <a:latin typeface="Cambria Math"/>
+                              </a:rPr>
+                              <m:t>𝑣</m:t>
+                            </m:r>
+                          </m:e>
+                          <m:sub>
+                            <m:r>
+                              <a:rPr lang="en-US" b="0" i="1" smtClean="0">
+                                <a:latin typeface="Cambria Math"/>
+                              </a:rPr>
+                              <m:t>𝑗</m:t>
+                            </m:r>
+                          </m:sub>
+                        </m:sSub>
+                        <m:r>
+                          <a:rPr lang="en-US" b="0" i="1" smtClean="0">
+                            <a:latin typeface="Cambria Math"/>
+                          </a:rPr>
+                          <m:t>∈</m:t>
+                        </m:r>
+                        <m:r>
+                          <a:rPr lang="en-US" b="0" i="1" smtClean="0">
+                            <a:latin typeface="Cambria Math"/>
+                          </a:rPr>
+                          <m:t>𝑉</m:t>
+                        </m:r>
+                      </m:sub>
+                      <m:sup/>
+                      <m:e>
+                        <m:func>
+                          <m:funcPr>
+                            <m:ctrlPr>
+                              <a:rPr lang="en-US" b="0" i="1" smtClean="0">
+                                <a:latin typeface="Cambria Math" panose="02040503050406030204" pitchFamily="18" charset="0"/>
+                              </a:rPr>
+                            </m:ctrlPr>
+                          </m:funcPr>
+                          <m:fName>
+                            <m:r>
+                              <m:rPr>
+                                <m:sty m:val="p"/>
+                              </m:rPr>
+                              <a:rPr lang="en-US" b="0" i="0" smtClean="0">
+                                <a:latin typeface="Cambria Math"/>
+                              </a:rPr>
+                              <m:t>deg</m:t>
+                            </m:r>
+                          </m:fName>
+                          <m:e>
+                            <m:d>
+                              <m:dPr>
+                                <m:ctrlPr>
+                                  <a:rPr lang="en-US" b="0" i="1" smtClean="0">
+                                    <a:latin typeface="Cambria Math" panose="02040503050406030204" pitchFamily="18" charset="0"/>
+                                  </a:rPr>
+                                </m:ctrlPr>
+                              </m:dPr>
+                              <m:e>
+                                <m:sSub>
+                                  <m:sSubPr>
+                                    <m:ctrlPr>
+                                      <a:rPr lang="en-US" b="0" i="1" smtClean="0">
+                                        <a:latin typeface="Cambria Math" panose="02040503050406030204" pitchFamily="18" charset="0"/>
+                                      </a:rPr>
+                                    </m:ctrlPr>
+                                  </m:sSubPr>
+                                  <m:e>
+                                    <m:r>
+                                      <a:rPr lang="en-US" b="0" i="1" smtClean="0">
+                                        <a:latin typeface="Cambria Math"/>
+                                      </a:rPr>
+                                      <m:t>𝑣</m:t>
+                                    </m:r>
+                                  </m:e>
+                                  <m:sub>
+                                    <m:r>
+                                      <a:rPr lang="en-US" b="0" i="1" smtClean="0">
+                                        <a:latin typeface="Cambria Math"/>
+                                      </a:rPr>
+                                      <m:t>𝑗</m:t>
+                                    </m:r>
+                                  </m:sub>
+                                </m:sSub>
+                              </m:e>
+                            </m:d>
+                          </m:e>
+                        </m:func>
+                        <m:r>
+                          <a:rPr lang="en-US" b="0" i="1" smtClean="0">
+                            <a:latin typeface="Cambria Math"/>
+                          </a:rPr>
+                          <m:t> </m:t>
+                        </m:r>
+                      </m:e>
+                    </m:nary>
+                    <m:r>
+                      <a:rPr lang="en-US" b="0" i="0" smtClean="0">
+                        <a:latin typeface="Cambria Math" panose="02040503050406030204" pitchFamily="18" charset="0"/>
+                      </a:rPr>
+                      <m:t>=2</m:t>
+                    </m:r>
+                    <m:r>
+                      <m:rPr>
+                        <m:sty m:val="p"/>
+                      </m:rPr>
+                      <a:rPr lang="en-US" b="0" i="0" smtClean="0">
+                        <a:latin typeface="Cambria Math" panose="02040503050406030204" pitchFamily="18" charset="0"/>
+                      </a:rPr>
+                      <m:t>E</m:t>
+                    </m:r>
+                  </m:oMath>
+                </a14:m>
+                <a:r>
+                  <a:rPr lang="en-US" dirty="0"/>
+                  <a:t> </a:t>
+                </a:r>
+              </a:p>
+              <a:p>
+                <a:endParaRPr lang="en-US" dirty="0"/>
+              </a:p>
+            </p:txBody>
+          </p:sp>
+        </mc:Choice>
+        <mc:Fallback>
+          <p:sp>
+            <p:nvSpPr>
+              <p:cNvPr id="3" name="Content Placeholder 2">
+                <a:extLst>
+                  <a:ext uri="{FF2B5EF4-FFF2-40B4-BE49-F238E27FC236}">
+                    <a16:creationId xmlns:a16="http://schemas.microsoft.com/office/drawing/2014/main" id="{DAE3863D-5D55-6B00-863F-9ECC251D6A5D}"/>
+                  </a:ext>
+                </a:extLst>
+              </p:cNvPr>
+              <p:cNvSpPr>
+                <a:spLocks noGrp="1" noRot="1" noChangeAspect="1" noMove="1" noResize="1" noEditPoints="1" noAdjustHandles="1" noChangeArrowheads="1" noChangeShapeType="1" noTextEdit="1"/>
+              </p:cNvSpPr>
+              <p:nvPr>
+                <p:ph sz="quarter" idx="1"/>
+              </p:nvPr>
+            </p:nvSpPr>
+            <p:spPr>
+              <a:blipFill>
+                <a:blip r:embed="rId2"/>
+                <a:stretch>
+                  <a:fillRect l="-500" t="-1111"/>
+                </a:stretch>
+              </a:blipFill>
+            </p:spPr>
+            <p:txBody>
+              <a:bodyPr/>
+              <a:lstStyle/>
+              <a:p>
+                <a:r>
+                  <a:rPr lang="en-US">
+                    <a:noFill/>
+                  </a:rPr>
+                  <a:t> </a:t>
+                </a:r>
+              </a:p>
+            </p:txBody>
+          </p:sp>
+        </mc:Fallback>
+      </mc:AlternateContent>
+    </p:spTree>
+    <p:extLst>
+      <p:ext uri="{BB962C8B-B14F-4D97-AF65-F5344CB8AC3E}">
+        <p14:creationId xmlns:p14="http://schemas.microsoft.com/office/powerpoint/2010/main" val="1820842689"/>
+      </p:ext>
+    </p:extLst>
+  </p:cSld>
+  <p:clrMapOvr>
+    <a:masterClrMapping/>
+  </p:clrMapOvr>
+</p:sld>
+</file>
+
+<file path=ppt/slides/slide41.xml><?xml version="1.0" encoding="utf-8"?>
 <p:sld xmlns:a="http://schemas.openxmlformats.org/drawingml/2006/main" xmlns:r="http://schemas.openxmlformats.org/officeDocument/2006/relationships" xmlns:p="http://schemas.openxmlformats.org/presentationml/2006/main">
   <p:cSld>
     <p:spTree>
@@ -20168,37 +23810,17 @@
                 <a14:m>
                   <m:oMath xmlns:m="http://schemas.openxmlformats.org/officeDocument/2006/math">
                     <m:r>
-                      <m:rPr>
-                        <m:sty m:val="p"/>
-                      </m:rPr>
-                      <a:rPr lang="en-US" sz="2000">
+                      <a:rPr lang="en-US" sz="2000" b="0" i="1" smtClean="0">
                         <a:latin typeface="Cambria Math" panose="02040503050406030204" pitchFamily="18" charset="0"/>
                       </a:rPr>
-                      <m:t>Θ</m:t>
-                    </m:r>
-                    <m:r>
-                      <a:rPr lang="en-US" sz="2000" i="1">
-                        <a:latin typeface="Cambria Math" panose="02040503050406030204" pitchFamily="18" charset="0"/>
-                      </a:rPr>
-                      <m:t>(</m:t>
-                    </m:r>
-                    <m:r>
-                      <a:rPr lang="en-US" sz="2000" i="1">
-                        <a:latin typeface="Cambria Math" panose="02040503050406030204" pitchFamily="18" charset="0"/>
-                      </a:rPr>
-                      <m:t>𝑉</m:t>
-                    </m:r>
-                    <m:r>
-                      <a:rPr lang="en-US" sz="2000" i="1">
-                        <a:latin typeface="Cambria Math" panose="02040503050406030204" pitchFamily="18" charset="0"/>
-                      </a:rPr>
-                      <m:t>)</m:t>
+                      <m:t> </m:t>
                     </m:r>
                   </m:oMath>
                 </a14:m>
-                <a:endParaRPr lang="en-US" sz="2000" dirty="0"/>
+                <a:endParaRPr lang="en-US" sz="2000" b="0" dirty="0"/>
               </a:p>
               <a:p>
+                <a:pPr lvl="1"/>
                 <a:endParaRPr lang="en-US" sz="2400" dirty="0"/>
               </a:p>
               <a:p>
@@ -20212,7 +23834,7 @@
                 <a:pPr lvl="1"/>
                 <a:r>
                   <a:rPr lang="en-US" sz="2000" dirty="0"/>
-                  <a:t>Total #: V</a:t>
+                  <a:t>Total #:  </a:t>
                 </a:r>
               </a:p>
               <a:p>
@@ -20224,60 +23846,11 @@
                 <a14:m>
                   <m:oMath xmlns:m="http://schemas.openxmlformats.org/officeDocument/2006/math">
                     <m:r>
-                      <m:rPr>
-                        <m:sty m:val="p"/>
-                      </m:rPr>
-                      <a:rPr lang="en-US" sz="2000">
+                      <a:rPr lang="en-US" sz="2000" b="0" i="1" smtClean="0">
                         <a:latin typeface="Cambria Math" panose="02040503050406030204" pitchFamily="18" charset="0"/>
                       </a:rPr>
-                      <m:t>Θ</m:t>
+                      <m:t> </m:t>
                     </m:r>
-                    <m:r>
-                      <a:rPr lang="en-US" sz="2000" i="1">
-                        <a:latin typeface="Cambria Math"/>
-                      </a:rPr>
-                      <m:t>(</m:t>
-                    </m:r>
-                    <m:r>
-                      <a:rPr lang="en-US" sz="2000" i="1">
-                        <a:latin typeface="Cambria Math"/>
-                      </a:rPr>
-                      <m:t>𝑉</m:t>
-                    </m:r>
-                    <m:func>
-                      <m:funcPr>
-                        <m:ctrlPr>
-                          <a:rPr lang="en-US" sz="2000" i="1">
-                            <a:latin typeface="Cambria Math" panose="02040503050406030204" pitchFamily="18" charset="0"/>
-                          </a:rPr>
-                        </m:ctrlPr>
-                      </m:funcPr>
-                      <m:fName>
-                        <m:r>
-                          <m:rPr>
-                            <m:sty m:val="p"/>
-                          </m:rPr>
-                          <a:rPr lang="en-US" sz="2000">
-                            <a:latin typeface="Cambria Math"/>
-                          </a:rPr>
-                          <m:t>lg</m:t>
-                        </m:r>
-                      </m:fName>
-                      <m:e>
-                        <m:r>
-                          <a:rPr lang="en-US" sz="2000" i="1">
-                            <a:latin typeface="Cambria Math"/>
-                          </a:rPr>
-                          <m:t>𝑉</m:t>
-                        </m:r>
-                        <m:r>
-                          <a:rPr lang="en-US" sz="2000" i="1">
-                            <a:latin typeface="Cambria Math"/>
-                          </a:rPr>
-                          <m:t>) </m:t>
-                        </m:r>
-                      </m:e>
-                    </m:func>
                   </m:oMath>
                 </a14:m>
                 <a:endParaRPr lang="en-US" sz="2000" dirty="0"/>
@@ -20575,6 +24148,596 @@
                 <a:pPr lvl="1"/>
                 <a:r>
                   <a:rPr lang="en-US" sz="2000" kern="0" dirty="0"/>
+                  <a:t>Total #:  </a:t>
+                </a:r>
+              </a:p>
+              <a:p>
+                <a:pPr lvl="1"/>
+                <a:r>
+                  <a:rPr lang="en-US" sz="2000" kern="0" dirty="0"/>
+                  <a:t>Total cost: </a:t>
+                </a:r>
+                <a14:m>
+                  <m:oMath xmlns:m="http://schemas.openxmlformats.org/officeDocument/2006/math">
+                    <m:r>
+                      <a:rPr lang="en-US" sz="2000" b="0" i="1" kern="0" smtClean="0">
+                        <a:latin typeface="Cambria Math" panose="02040503050406030204" pitchFamily="18" charset="0"/>
+                      </a:rPr>
+                      <m:t> </m:t>
+                    </m:r>
+                  </m:oMath>
+                </a14:m>
+                <a:endParaRPr lang="en-US" sz="2000" dirty="0"/>
+              </a:p>
+            </p:txBody>
+          </p:sp>
+        </mc:Choice>
+        <mc:Fallback>
+          <p:sp>
+            <p:nvSpPr>
+              <p:cNvPr id="4" name="Content Placeholder 2">
+                <a:extLst>
+                  <a:ext uri="{FF2B5EF4-FFF2-40B4-BE49-F238E27FC236}">
+                    <a16:creationId xmlns:a16="http://schemas.microsoft.com/office/drawing/2014/main" id="{41ADF324-F638-4C9A-8005-7F070FCC993C}"/>
+                  </a:ext>
+                </a:extLst>
+              </p:cNvPr>
+              <p:cNvSpPr txBox="1">
+                <a:spLocks noRot="1" noChangeAspect="1" noMove="1" noResize="1" noEditPoints="1" noAdjustHandles="1" noChangeArrowheads="1" noChangeShapeType="1" noTextEdit="1"/>
+              </p:cNvSpPr>
+              <p:nvPr/>
+            </p:nvSpPr>
+            <p:spPr bwMode="auto">
+              <a:xfrm>
+                <a:off x="6477000" y="1295400"/>
+                <a:ext cx="4191000" cy="3657600"/>
+              </a:xfrm>
+              <a:prstGeom prst="rect">
+                <a:avLst/>
+              </a:prstGeom>
+              <a:blipFill>
+                <a:blip r:embed="rId3"/>
+                <a:stretch>
+                  <a:fillRect l="-1019" t="-1333"/>
+                </a:stretch>
+              </a:blipFill>
+              <a:ln w="9525">
+                <a:noFill/>
+                <a:miter lim="800000"/>
+                <a:headEnd/>
+                <a:tailEnd/>
+              </a:ln>
+            </p:spPr>
+            <p:txBody>
+              <a:bodyPr/>
+              <a:lstStyle/>
+              <a:p>
+                <a:r>
+                  <a:rPr lang="en-US">
+                    <a:noFill/>
+                  </a:rPr>
+                  <a:t> </a:t>
+                </a:r>
+              </a:p>
+            </p:txBody>
+          </p:sp>
+        </mc:Fallback>
+      </mc:AlternateContent>
+    </p:spTree>
+    <p:extLst>
+      <p:ext uri="{BB962C8B-B14F-4D97-AF65-F5344CB8AC3E}">
+        <p14:creationId xmlns:p14="http://schemas.microsoft.com/office/powerpoint/2010/main" val="1762485087"/>
+      </p:ext>
+    </p:extLst>
+  </p:cSld>
+  <p:clrMapOvr>
+    <a:masterClrMapping/>
+  </p:clrMapOvr>
+</p:sld>
+</file>
+
+<file path=ppt/slides/slide42.xml><?xml version="1.0" encoding="utf-8"?>
+<p:sld xmlns:a="http://schemas.openxmlformats.org/drawingml/2006/main" xmlns:r="http://schemas.openxmlformats.org/officeDocument/2006/relationships" xmlns:p="http://schemas.openxmlformats.org/presentationml/2006/main">
+  <p:cSld>
+    <p:spTree>
+      <p:nvGrpSpPr>
+        <p:cNvPr id="1" name="">
+          <a:extLst>
+            <a:ext uri="{FF2B5EF4-FFF2-40B4-BE49-F238E27FC236}">
+              <a16:creationId xmlns:a16="http://schemas.microsoft.com/office/drawing/2014/main" id="{F761572E-8327-1F05-737C-3818E9F9AD25}"/>
+            </a:ext>
+          </a:extLst>
+        </p:cNvPr>
+        <p:cNvGrpSpPr/>
+        <p:nvPr/>
+      </p:nvGrpSpPr>
+      <p:grpSpPr>
+        <a:xfrm>
+          <a:off x="0" y="0"/>
+          <a:ext cx="0" cy="0"/>
+          <a:chOff x="0" y="0"/>
+          <a:chExt cx="0" cy="0"/>
+        </a:xfrm>
+      </p:grpSpPr>
+      <p:sp>
+        <p:nvSpPr>
+          <p:cNvPr id="2" name="Title 1">
+            <a:extLst>
+              <a:ext uri="{FF2B5EF4-FFF2-40B4-BE49-F238E27FC236}">
+                <a16:creationId xmlns:a16="http://schemas.microsoft.com/office/drawing/2014/main" id="{8F938AF7-5E4A-1901-F66E-9414302D35D4}"/>
+              </a:ext>
+            </a:extLst>
+          </p:cNvPr>
+          <p:cNvSpPr>
+            <a:spLocks noGrp="1"/>
+          </p:cNvSpPr>
+          <p:nvPr>
+            <p:ph type="title"/>
+          </p:nvPr>
+        </p:nvSpPr>
+        <p:spPr/>
+        <p:txBody>
+          <a:bodyPr/>
+          <a:lstStyle/>
+          <a:p>
+            <a:endParaRPr lang="en-US"/>
+          </a:p>
+        </p:txBody>
+      </p:sp>
+      <mc:AlternateContent xmlns:mc="http://schemas.openxmlformats.org/markup-compatibility/2006">
+        <mc:Choice xmlns:a14="http://schemas.microsoft.com/office/drawing/2010/main" Requires="a14">
+          <p:sp>
+            <p:nvSpPr>
+              <p:cNvPr id="3" name="Content Placeholder 2">
+                <a:extLst>
+                  <a:ext uri="{FF2B5EF4-FFF2-40B4-BE49-F238E27FC236}">
+                    <a16:creationId xmlns:a16="http://schemas.microsoft.com/office/drawing/2014/main" id="{CE0AB5E7-CD49-78EB-193B-8F276FBFD569}"/>
+                  </a:ext>
+                </a:extLst>
+              </p:cNvPr>
+              <p:cNvSpPr>
+                <a:spLocks noGrp="1"/>
+              </p:cNvSpPr>
+              <p:nvPr>
+                <p:ph sz="quarter" idx="1"/>
+              </p:nvPr>
+            </p:nvSpPr>
+            <p:spPr>
+              <a:xfrm>
+                <a:off x="1981200" y="1219200"/>
+                <a:ext cx="4191000" cy="3657600"/>
+              </a:xfrm>
+            </p:spPr>
+            <p:txBody>
+              <a:bodyPr/>
+              <a:lstStyle/>
+              <a:p>
+                <a:r>
+                  <a:rPr lang="en-US" sz="2400" dirty="0"/>
+                  <a:t>Initialize </a:t>
+                </a:r>
+                <a:r>
+                  <a:rPr lang="en-US" sz="2400" dirty="0" err="1"/>
+                  <a:t>priority_queue</a:t>
+                </a:r>
+                <a:endParaRPr lang="en-US" sz="2000" dirty="0"/>
+              </a:p>
+              <a:p>
+                <a:pPr lvl="1"/>
+                <a:r>
+                  <a:rPr lang="en-US" sz="2000" dirty="0"/>
+                  <a:t>Total cost: </a:t>
+                </a:r>
+                <a14:m>
+                  <m:oMath xmlns:m="http://schemas.openxmlformats.org/officeDocument/2006/math">
+                    <m:r>
+                      <m:rPr>
+                        <m:sty m:val="p"/>
+                      </m:rPr>
+                      <a:rPr lang="en-US" sz="2000">
+                        <a:latin typeface="Cambria Math" panose="02040503050406030204" pitchFamily="18" charset="0"/>
+                      </a:rPr>
+                      <m:t>Θ</m:t>
+                    </m:r>
+                    <m:r>
+                      <a:rPr lang="en-US" sz="2000" i="1">
+                        <a:latin typeface="Cambria Math" panose="02040503050406030204" pitchFamily="18" charset="0"/>
+                      </a:rPr>
+                      <m:t>(</m:t>
+                    </m:r>
+                    <m:r>
+                      <a:rPr lang="en-US" sz="2000" i="1">
+                        <a:latin typeface="Cambria Math" panose="02040503050406030204" pitchFamily="18" charset="0"/>
+                      </a:rPr>
+                      <m:t>𝑉</m:t>
+                    </m:r>
+                    <m:r>
+                      <a:rPr lang="en-US" sz="2000" i="1">
+                        <a:latin typeface="Cambria Math" panose="02040503050406030204" pitchFamily="18" charset="0"/>
+                      </a:rPr>
+                      <m:t>)</m:t>
+                    </m:r>
+                  </m:oMath>
+                </a14:m>
+                <a:endParaRPr lang="en-US" sz="2000" dirty="0"/>
+              </a:p>
+              <a:p>
+                <a:endParaRPr lang="en-US" sz="2400" dirty="0"/>
+              </a:p>
+              <a:p>
+                <a:r>
+                  <a:rPr lang="en-US" sz="2400" dirty="0" err="1"/>
+                  <a:t>extract_min</a:t>
+                </a:r>
+                <a:endParaRPr lang="en-US" sz="2400" dirty="0"/>
+              </a:p>
+              <a:p>
+                <a:pPr lvl="1"/>
+                <a:r>
+                  <a:rPr lang="en-US" sz="2000" dirty="0"/>
+                  <a:t>Total #: V</a:t>
+                </a:r>
+              </a:p>
+              <a:p>
+                <a:pPr lvl="1"/>
+                <a:r>
+                  <a:rPr lang="en-US" sz="2000" dirty="0"/>
+                  <a:t>Total cost: </a:t>
+                </a:r>
+                <a14:m>
+                  <m:oMath xmlns:m="http://schemas.openxmlformats.org/officeDocument/2006/math">
+                    <m:r>
+                      <m:rPr>
+                        <m:sty m:val="p"/>
+                      </m:rPr>
+                      <a:rPr lang="en-US" sz="2000">
+                        <a:latin typeface="Cambria Math" panose="02040503050406030204" pitchFamily="18" charset="0"/>
+                      </a:rPr>
+                      <m:t>Θ</m:t>
+                    </m:r>
+                    <m:r>
+                      <a:rPr lang="en-US" sz="2000" i="1">
+                        <a:latin typeface="Cambria Math"/>
+                      </a:rPr>
+                      <m:t>(</m:t>
+                    </m:r>
+                    <m:r>
+                      <a:rPr lang="en-US" sz="2000" i="1">
+                        <a:latin typeface="Cambria Math"/>
+                      </a:rPr>
+                      <m:t>𝑉</m:t>
+                    </m:r>
+                    <m:func>
+                      <m:funcPr>
+                        <m:ctrlPr>
+                          <a:rPr lang="en-US" sz="2000" i="1">
+                            <a:latin typeface="Cambria Math" panose="02040503050406030204" pitchFamily="18" charset="0"/>
+                          </a:rPr>
+                        </m:ctrlPr>
+                      </m:funcPr>
+                      <m:fName>
+                        <m:r>
+                          <m:rPr>
+                            <m:sty m:val="p"/>
+                          </m:rPr>
+                          <a:rPr lang="en-US" sz="2000">
+                            <a:latin typeface="Cambria Math"/>
+                          </a:rPr>
+                          <m:t>lg</m:t>
+                        </m:r>
+                      </m:fName>
+                      <m:e>
+                        <m:r>
+                          <a:rPr lang="en-US" sz="2000" i="1">
+                            <a:latin typeface="Cambria Math"/>
+                          </a:rPr>
+                          <m:t>𝑉</m:t>
+                        </m:r>
+                        <m:r>
+                          <a:rPr lang="en-US" sz="2000" i="1">
+                            <a:latin typeface="Cambria Math"/>
+                          </a:rPr>
+                          <m:t>) </m:t>
+                        </m:r>
+                      </m:e>
+                    </m:func>
+                  </m:oMath>
+                </a14:m>
+                <a:endParaRPr lang="en-US" sz="2000" dirty="0"/>
+              </a:p>
+              <a:p>
+                <a:endParaRPr lang="en-US" dirty="0"/>
+              </a:p>
+            </p:txBody>
+          </p:sp>
+        </mc:Choice>
+        <mc:Fallback>
+          <p:sp>
+            <p:nvSpPr>
+              <p:cNvPr id="3" name="Content Placeholder 2">
+                <a:extLst>
+                  <a:ext uri="{FF2B5EF4-FFF2-40B4-BE49-F238E27FC236}">
+                    <a16:creationId xmlns:a16="http://schemas.microsoft.com/office/drawing/2014/main" id="{CE0AB5E7-CD49-78EB-193B-8F276FBFD569}"/>
+                  </a:ext>
+                </a:extLst>
+              </p:cNvPr>
+              <p:cNvSpPr>
+                <a:spLocks noGrp="1" noRot="1" noChangeAspect="1" noMove="1" noResize="1" noEditPoints="1" noAdjustHandles="1" noChangeArrowheads="1" noChangeShapeType="1" noTextEdit="1"/>
+              </p:cNvSpPr>
+              <p:nvPr>
+                <p:ph sz="quarter" idx="1"/>
+              </p:nvPr>
+            </p:nvSpPr>
+            <p:spPr>
+              <a:xfrm>
+                <a:off x="1981200" y="1219200"/>
+                <a:ext cx="4191000" cy="3657600"/>
+              </a:xfrm>
+              <a:blipFill>
+                <a:blip r:embed="rId2"/>
+                <a:stretch>
+                  <a:fillRect l="-1017" t="-1333"/>
+                </a:stretch>
+              </a:blipFill>
+            </p:spPr>
+            <p:txBody>
+              <a:bodyPr/>
+              <a:lstStyle/>
+              <a:p>
+                <a:r>
+                  <a:rPr lang="en-US">
+                    <a:noFill/>
+                  </a:rPr>
+                  <a:t> </a:t>
+                </a:r>
+              </a:p>
+            </p:txBody>
+          </p:sp>
+        </mc:Fallback>
+      </mc:AlternateContent>
+      <mc:AlternateContent xmlns:mc="http://schemas.openxmlformats.org/markup-compatibility/2006">
+        <mc:Choice xmlns:a14="http://schemas.microsoft.com/office/drawing/2010/main" Requires="a14">
+          <p:sp>
+            <p:nvSpPr>
+              <p:cNvPr id="4" name="Content Placeholder 2">
+                <a:extLst>
+                  <a:ext uri="{FF2B5EF4-FFF2-40B4-BE49-F238E27FC236}">
+                    <a16:creationId xmlns:a16="http://schemas.microsoft.com/office/drawing/2014/main" id="{42D1453B-D5E0-6C96-D2EF-14D39F9E59DE}"/>
+                  </a:ext>
+                </a:extLst>
+              </p:cNvPr>
+              <p:cNvSpPr txBox="1">
+                <a:spLocks/>
+              </p:cNvSpPr>
+              <p:nvPr/>
+            </p:nvSpPr>
+            <p:spPr bwMode="auto">
+              <a:xfrm>
+                <a:off x="6477000" y="1295400"/>
+                <a:ext cx="4191000" cy="3657600"/>
+              </a:xfrm>
+              <a:prstGeom prst="rect">
+                <a:avLst/>
+              </a:prstGeom>
+              <a:noFill/>
+              <a:ln w="9525">
+                <a:noFill/>
+                <a:miter lim="800000"/>
+                <a:headEnd/>
+                <a:tailEnd/>
+              </a:ln>
+            </p:spPr>
+            <p:txBody>
+              <a:bodyPr vert="horz" wrap="square" lIns="91440" tIns="45720" rIns="91440" bIns="45720" numCol="1" anchor="t" anchorCtr="0" compatLnSpc="1">
+                <a:prstTxWarp prst="textNoShape">
+                  <a:avLst/>
+                </a:prstTxWarp>
+              </a:bodyPr>
+              <a:lstStyle>
+                <a:lvl1pPr marL="273050" indent="-273050" algn="l" rtl="0" eaLnBrk="0" fontAlgn="base" hangingPunct="0">
+                  <a:spcBef>
+                    <a:spcPts val="600"/>
+                  </a:spcBef>
+                  <a:spcAft>
+                    <a:spcPct val="0"/>
+                  </a:spcAft>
+                  <a:buClr>
+                    <a:schemeClr val="accent1"/>
+                  </a:buClr>
+                  <a:buSzPct val="76000"/>
+                  <a:buFont typeface="Wingdings 3" pitchFamily="18" charset="2"/>
+                  <a:buChar char=""/>
+                  <a:defRPr sz="2600" kern="1200">
+                    <a:solidFill>
+                      <a:schemeClr val="tx1"/>
+                    </a:solidFill>
+                    <a:latin typeface="+mn-lt"/>
+                    <a:ea typeface="+mn-ea"/>
+                    <a:cs typeface="+mn-cs"/>
+                  </a:defRPr>
+                </a:lvl1pPr>
+                <a:lvl2pPr marL="547688" indent="-273050" algn="l" rtl="0" eaLnBrk="0" fontAlgn="base" hangingPunct="0">
+                  <a:spcBef>
+                    <a:spcPts val="500"/>
+                  </a:spcBef>
+                  <a:spcAft>
+                    <a:spcPct val="0"/>
+                  </a:spcAft>
+                  <a:buClr>
+                    <a:schemeClr val="accent2"/>
+                  </a:buClr>
+                  <a:buSzPct val="76000"/>
+                  <a:buFont typeface="Wingdings 3" pitchFamily="18" charset="2"/>
+                  <a:buChar char=""/>
+                  <a:defRPr sz="2300" kern="1200">
+                    <a:solidFill>
+                      <a:schemeClr val="tx2"/>
+                    </a:solidFill>
+                    <a:latin typeface="+mn-lt"/>
+                    <a:ea typeface="+mn-ea"/>
+                    <a:cs typeface="+mn-cs"/>
+                  </a:defRPr>
+                </a:lvl2pPr>
+                <a:lvl3pPr marL="822325" indent="-228600" algn="l" rtl="0" eaLnBrk="0" fontAlgn="base" hangingPunct="0">
+                  <a:spcBef>
+                    <a:spcPts val="500"/>
+                  </a:spcBef>
+                  <a:spcAft>
+                    <a:spcPct val="0"/>
+                  </a:spcAft>
+                  <a:buClr>
+                    <a:srgbClr val="BCBCBC"/>
+                  </a:buClr>
+                  <a:buSzPct val="76000"/>
+                  <a:buFont typeface="Wingdings 3" pitchFamily="18" charset="2"/>
+                  <a:buChar char=""/>
+                  <a:defRPr sz="2000" kern="1200">
+                    <a:solidFill>
+                      <a:schemeClr val="tx1"/>
+                    </a:solidFill>
+                    <a:latin typeface="+mn-lt"/>
+                    <a:ea typeface="+mn-ea"/>
+                    <a:cs typeface="+mn-cs"/>
+                  </a:defRPr>
+                </a:lvl3pPr>
+                <a:lvl4pPr marL="1096963" indent="-228600" algn="l" rtl="0" eaLnBrk="0" fontAlgn="base" hangingPunct="0">
+                  <a:spcBef>
+                    <a:spcPts val="400"/>
+                  </a:spcBef>
+                  <a:spcAft>
+                    <a:spcPct val="0"/>
+                  </a:spcAft>
+                  <a:buClr>
+                    <a:srgbClr val="8BA2B4"/>
+                  </a:buClr>
+                  <a:buSzPct val="70000"/>
+                  <a:buFont typeface="Wingdings" pitchFamily="2" charset="2"/>
+                  <a:buChar char=""/>
+                  <a:defRPr sz="2000" kern="1200">
+                    <a:solidFill>
+                      <a:schemeClr val="tx1"/>
+                    </a:solidFill>
+                    <a:latin typeface="+mn-lt"/>
+                    <a:ea typeface="+mn-ea"/>
+                    <a:cs typeface="+mn-cs"/>
+                  </a:defRPr>
+                </a:lvl4pPr>
+                <a:lvl5pPr marL="1371600" indent="-228600" algn="l" rtl="0" eaLnBrk="0" fontAlgn="base" hangingPunct="0">
+                  <a:spcBef>
+                    <a:spcPts val="300"/>
+                  </a:spcBef>
+                  <a:spcAft>
+                    <a:spcPct val="0"/>
+                  </a:spcAft>
+                  <a:buClr>
+                    <a:schemeClr val="accent2"/>
+                  </a:buClr>
+                  <a:buSzPct val="70000"/>
+                  <a:buFont typeface="Wingdings" pitchFamily="2" charset="2"/>
+                  <a:buChar char=""/>
+                  <a:defRPr sz="1600" kern="1200">
+                    <a:solidFill>
+                      <a:schemeClr val="tx1"/>
+                    </a:solidFill>
+                    <a:latin typeface="+mn-lt"/>
+                    <a:ea typeface="+mn-ea"/>
+                    <a:cs typeface="+mn-cs"/>
+                  </a:defRPr>
+                </a:lvl5pPr>
+                <a:lvl6pPr marL="1645920" indent="-182880" algn="l" rtl="0" eaLnBrk="1" latinLnBrk="0" hangingPunct="1">
+                  <a:spcBef>
+                    <a:spcPts val="300"/>
+                  </a:spcBef>
+                  <a:buClr>
+                    <a:srgbClr val="9FB8CD">
+                      <a:shade val="75000"/>
+                    </a:srgbClr>
+                  </a:buClr>
+                  <a:buSzPct val="75000"/>
+                  <a:buFont typeface="Wingdings 3"/>
+                  <a:buChar char=""/>
+                  <a:defRPr kumimoji="0" lang="en-US" sz="1600" kern="1200" smtClean="0">
+                    <a:solidFill>
+                      <a:schemeClr val="tx1"/>
+                    </a:solidFill>
+                    <a:latin typeface="+mn-lt"/>
+                    <a:ea typeface="+mn-ea"/>
+                    <a:cs typeface="+mn-cs"/>
+                  </a:defRPr>
+                </a:lvl6pPr>
+                <a:lvl7pPr marL="1828800" indent="-182880" algn="l" rtl="0" eaLnBrk="1" latinLnBrk="0" hangingPunct="1">
+                  <a:spcBef>
+                    <a:spcPts val="300"/>
+                  </a:spcBef>
+                  <a:buClr>
+                    <a:srgbClr val="727CA3">
+                      <a:shade val="75000"/>
+                    </a:srgbClr>
+                  </a:buClr>
+                  <a:buSzPct val="75000"/>
+                  <a:buFont typeface="Wingdings 3"/>
+                  <a:buChar char=""/>
+                  <a:defRPr kumimoji="0" lang="en-US" sz="1400" kern="1200" smtClean="0">
+                    <a:solidFill>
+                      <a:schemeClr val="tx1"/>
+                    </a:solidFill>
+                    <a:latin typeface="+mn-lt"/>
+                    <a:ea typeface="+mn-ea"/>
+                    <a:cs typeface="+mn-cs"/>
+                  </a:defRPr>
+                </a:lvl7pPr>
+                <a:lvl8pPr marL="2011680" indent="-182880" algn="l" rtl="0" eaLnBrk="1" latinLnBrk="0" hangingPunct="1">
+                  <a:spcBef>
+                    <a:spcPts val="300"/>
+                  </a:spcBef>
+                  <a:buClr>
+                    <a:prstClr val="white">
+                      <a:shade val="50000"/>
+                    </a:prstClr>
+                  </a:buClr>
+                  <a:buSzPct val="75000"/>
+                  <a:buFont typeface="Wingdings 3"/>
+                  <a:buChar char=""/>
+                  <a:defRPr kumimoji="0" lang="en-US" sz="1400" kern="1200" smtClean="0">
+                    <a:solidFill>
+                      <a:schemeClr val="tx1"/>
+                    </a:solidFill>
+                    <a:latin typeface="+mn-lt"/>
+                    <a:ea typeface="+mn-ea"/>
+                    <a:cs typeface="+mn-cs"/>
+                  </a:defRPr>
+                </a:lvl8pPr>
+                <a:lvl9pPr marL="2194560" indent="-182880" algn="l" rtl="0" eaLnBrk="1" latinLnBrk="0" hangingPunct="1">
+                  <a:spcBef>
+                    <a:spcPts val="300"/>
+                  </a:spcBef>
+                  <a:buClr>
+                    <a:srgbClr val="9FB8CD"/>
+                  </a:buClr>
+                  <a:buSzPct val="75000"/>
+                  <a:buFont typeface="Wingdings 3"/>
+                  <a:buChar char=""/>
+                  <a:defRPr kumimoji="0" lang="en-US" sz="1200" kern="1200" smtClean="0">
+                    <a:solidFill>
+                      <a:schemeClr val="tx1"/>
+                    </a:solidFill>
+                    <a:latin typeface="+mn-lt"/>
+                    <a:ea typeface="+mn-ea"/>
+                    <a:cs typeface="+mn-cs"/>
+                  </a:defRPr>
+                </a:lvl9pPr>
+              </a:lstStyle>
+              <a:p>
+                <a:r>
+                  <a:rPr lang="en-US" sz="2400" kern="0" dirty="0"/>
+                  <a:t>decrease_priority</a:t>
+                </a:r>
+                <a:endParaRPr lang="en-US" sz="2000" kern="0" dirty="0"/>
+              </a:p>
+              <a:p>
+                <a:pPr lvl="1"/>
+                <a:r>
+                  <a:rPr lang="en-US" sz="2000" kern="0" dirty="0"/>
                   <a:t>Total #: at most 2E</a:t>
                 </a:r>
               </a:p>
@@ -20658,7 +24821,7 @@
               <p:cNvPr id="4" name="Content Placeholder 2">
                 <a:extLst>
                   <a:ext uri="{FF2B5EF4-FFF2-40B4-BE49-F238E27FC236}">
-                    <a16:creationId xmlns:a16="http://schemas.microsoft.com/office/drawing/2014/main" id="{41ADF324-F638-4C9A-8005-7F070FCC993C}"/>
+                    <a16:creationId xmlns:a16="http://schemas.microsoft.com/office/drawing/2014/main" id="{42D1453B-D5E0-6C96-D2EF-14D39F9E59DE}"/>
                   </a:ext>
                 </a:extLst>
               </p:cNvPr>
@@ -20710,7 +24873,7 @@
               <p:cNvPr id="5" name="Rectangle 34">
                 <a:extLst>
                   <a:ext uri="{FF2B5EF4-FFF2-40B4-BE49-F238E27FC236}">
-                    <a16:creationId xmlns:a16="http://schemas.microsoft.com/office/drawing/2014/main" id="{F5BBFBF3-4DE3-454E-BD16-D850D44A8656}"/>
+                    <a16:creationId xmlns:a16="http://schemas.microsoft.com/office/drawing/2014/main" id="{9D7729CD-5C78-6F91-4F39-CF01D95F52FC}"/>
                   </a:ext>
                 </a:extLst>
               </p:cNvPr>
@@ -20857,7 +25020,7 @@
               <p:cNvPr id="5" name="Rectangle 34">
                 <a:extLst>
                   <a:ext uri="{FF2B5EF4-FFF2-40B4-BE49-F238E27FC236}">
-                    <a16:creationId xmlns:a16="http://schemas.microsoft.com/office/drawing/2014/main" id="{F5BBFBF3-4DE3-454E-BD16-D850D44A8656}"/>
+                    <a16:creationId xmlns:a16="http://schemas.microsoft.com/office/drawing/2014/main" id="{9D7729CD-5C78-6F91-4F39-CF01D95F52FC}"/>
                   </a:ext>
                 </a:extLst>
               </p:cNvPr>
@@ -20908,7 +25071,7 @@
     </p:spTree>
     <p:extLst>
       <p:ext uri="{BB962C8B-B14F-4D97-AF65-F5344CB8AC3E}">
-        <p14:creationId xmlns:p14="http://schemas.microsoft.com/office/powerpoint/2010/main" val="1762485087"/>
+        <p14:creationId xmlns:p14="http://schemas.microsoft.com/office/powerpoint/2010/main" val="257746644"/>
       </p:ext>
     </p:extLst>
   </p:cSld>
@@ -20996,7 +25159,7 @@
 </p:sld>
 </file>
 
-<file path=ppt/slides/slide35.xml><?xml version="1.0" encoding="utf-8"?>
+<file path=ppt/slides/slide43.xml><?xml version="1.0" encoding="utf-8"?>
 <p:sld xmlns:a="http://schemas.openxmlformats.org/drawingml/2006/main" xmlns:r="http://schemas.openxmlformats.org/officeDocument/2006/relationships" xmlns:p="http://schemas.openxmlformats.org/presentationml/2006/main">
   <p:cSld>
     <p:spTree>
@@ -21492,7 +25655,7 @@
 </p:sld>
 </file>
 
-<file path=ppt/slides/slide36.xml><?xml version="1.0" encoding="utf-8"?>
+<file path=ppt/slides/slide44.xml><?xml version="1.0" encoding="utf-8"?>
 <p:sld xmlns:a="http://schemas.openxmlformats.org/drawingml/2006/main" xmlns:r="http://schemas.openxmlformats.org/officeDocument/2006/relationships" xmlns:p="http://schemas.openxmlformats.org/presentationml/2006/main">
   <p:cSld>
     <p:spTree>
@@ -21997,7 +26160,7 @@
 </p:sld>
 </file>
 
-<file path=ppt/slides/slide37.xml><?xml version="1.0" encoding="utf-8"?>
+<file path=ppt/slides/slide45.xml><?xml version="1.0" encoding="utf-8"?>
 <p:sld xmlns:a="http://schemas.openxmlformats.org/drawingml/2006/main" xmlns:r="http://schemas.openxmlformats.org/officeDocument/2006/relationships" xmlns:p="http://schemas.openxmlformats.org/presentationml/2006/main">
   <p:cSld>
     <p:spTree>
@@ -22140,7 +26303,7 @@
 </p:sld>
 </file>
 
-<file path=ppt/slides/slide38.xml><?xml version="1.0" encoding="utf-8"?>
+<file path=ppt/slides/slide46.xml><?xml version="1.0" encoding="utf-8"?>
 <p:sld xmlns:a="http://schemas.openxmlformats.org/drawingml/2006/main" xmlns:r="http://schemas.openxmlformats.org/officeDocument/2006/relationships" xmlns:p="http://schemas.openxmlformats.org/presentationml/2006/main">
   <p:cSld>
     <p:spTree>
@@ -22185,8 +26348,8 @@
           </a:p>
         </p:txBody>
       </p:sp>
-      <mc:AlternateContent xmlns:mc="http://schemas.openxmlformats.org/markup-compatibility/2006">
-        <mc:Choice xmlns:a14="http://schemas.microsoft.com/office/drawing/2010/main" Requires="a14">
+      <mc:AlternateContent xmlns:mc="http://schemas.openxmlformats.org/markup-compatibility/2006" xmlns:a14="http://schemas.microsoft.com/office/drawing/2010/main">
+        <mc:Choice Requires="a14">
           <p:sp>
             <p:nvSpPr>
               <p:cNvPr id="3" name="Content Placeholder 2">
@@ -22437,7 +26600,7 @@
             </p:txBody>
           </p:sp>
         </mc:Choice>
-        <mc:Fallback>
+        <mc:Fallback xmlns="">
           <p:sp>
             <p:nvSpPr>
               <p:cNvPr id="3" name="Content Placeholder 2">
@@ -22494,7 +26657,7 @@
 </p:sld>
 </file>
 
-<file path=ppt/slides/slide39.xml><?xml version="1.0" encoding="utf-8"?>
+<file path=ppt/slides/slide47.xml><?xml version="1.0" encoding="utf-8"?>
 <p:sld xmlns:a="http://schemas.openxmlformats.org/drawingml/2006/main" xmlns:r="http://schemas.openxmlformats.org/officeDocument/2006/relationships" xmlns:p="http://schemas.openxmlformats.org/presentationml/2006/main">
   <p:cSld>
     <p:spTree>
@@ -22558,7 +26721,7 @@
 </p:sld>
 </file>
 
-<file path=ppt/slides/slide4.xml><?xml version="1.0" encoding="utf-8"?>
+<file path=ppt/slides/slide5.xml><?xml version="1.0" encoding="utf-8"?>
 <p:sld xmlns:a="http://schemas.openxmlformats.org/drawingml/2006/main" xmlns:r="http://schemas.openxmlformats.org/officeDocument/2006/relationships" xmlns:p="http://schemas.openxmlformats.org/presentationml/2006/main">
   <p:cSld>
     <p:spTree>
@@ -22580,7 +26743,7 @@
           <p:cNvPr id="2" name="Title 1">
             <a:extLst>
               <a:ext uri="{FF2B5EF4-FFF2-40B4-BE49-F238E27FC236}">
-                <a16:creationId xmlns:a16="http://schemas.microsoft.com/office/drawing/2014/main" id="{F8DCFEB4-B1BE-49D2-B3AD-40D59C0661D4}"/>
+                <a16:creationId xmlns:a16="http://schemas.microsoft.com/office/drawing/2014/main" id="{58EDC03E-FC7A-474F-8072-9E60B9D51B2D}"/>
               </a:ext>
             </a:extLst>
           </p:cNvPr>
@@ -22598,19 +26761,19 @@
           <a:p>
             <a:r>
               <a:rPr lang="en-US" dirty="0"/>
-              <a:t>Trees</a:t>
+              <a:t>Alternative definition</a:t>
             </a:r>
           </a:p>
         </p:txBody>
       </p:sp>
-      <mc:AlternateContent xmlns:mc="http://schemas.openxmlformats.org/markup-compatibility/2006">
-        <mc:Choice xmlns:a14="http://schemas.microsoft.com/office/drawing/2010/main" Requires="a14">
+      <mc:AlternateContent xmlns:mc="http://schemas.openxmlformats.org/markup-compatibility/2006" xmlns:a14="http://schemas.microsoft.com/office/drawing/2010/main">
+        <mc:Choice Requires="a14">
           <p:sp>
             <p:nvSpPr>
               <p:cNvPr id="3" name="Content Placeholder 2">
                 <a:extLst>
                   <a:ext uri="{FF2B5EF4-FFF2-40B4-BE49-F238E27FC236}">
-                    <a16:creationId xmlns:a16="http://schemas.microsoft.com/office/drawing/2014/main" id="{76CDD15A-FAD1-4CF4-9358-32E9357B9CD6}"/>
+                    <a16:creationId xmlns:a16="http://schemas.microsoft.com/office/drawing/2014/main" id="{E1244FAB-C61D-4CB3-B264-DA32F990D261}"/>
                   </a:ext>
                 </a:extLst>
               </p:cNvPr>
@@ -22624,13 +26787,20 @@
             <p:spPr>
               <a:xfrm>
                 <a:off x="609600" y="1219200"/>
-                <a:ext cx="10972800" cy="1447800"/>
+                <a:ext cx="10972800" cy="1520658"/>
               </a:xfrm>
             </p:spPr>
             <p:txBody>
               <a:bodyPr/>
               <a:lstStyle/>
               <a:p>
+                <a:r>
+                  <a:rPr lang="en-US" dirty="0"/>
+                  <a:t>Alternative definition: </a:t>
+                </a:r>
+              </a:p>
+              <a:p>
+                <a:pPr lvl="1"/>
                 <a:r>
                   <a:rPr lang="en-US" dirty="0"/>
                   <a:t>An undirected graph </a:t>
@@ -22644,7 +26814,7 @@
                       <m:t>𝐺</m:t>
                     </m:r>
                     <m:r>
-                      <a:rPr lang="en-US" b="0" i="1" smtClean="0">
+                      <a:rPr lang="en-US" i="1" smtClean="0">
                         <a:latin typeface="Cambria Math" panose="02040503050406030204" pitchFamily="18" charset="0"/>
                       </a:rPr>
                       <m:t>=</m:t>
@@ -22652,26 +26822,26 @@
                     <m:d>
                       <m:dPr>
                         <m:ctrlPr>
-                          <a:rPr lang="en-US" b="0" i="1" smtClean="0">
+                          <a:rPr lang="en-US" i="1" smtClean="0">
                             <a:latin typeface="Cambria Math" panose="02040503050406030204" pitchFamily="18" charset="0"/>
                           </a:rPr>
                         </m:ctrlPr>
                       </m:dPr>
                       <m:e>
                         <m:r>
-                          <a:rPr lang="en-US" b="0" i="1" smtClean="0">
+                          <a:rPr lang="en-US" i="1" smtClean="0">
                             <a:latin typeface="Cambria Math" panose="02040503050406030204" pitchFamily="18" charset="0"/>
                           </a:rPr>
                           <m:t>𝑉</m:t>
                         </m:r>
                         <m:r>
-                          <a:rPr lang="en-US" b="0" i="1" smtClean="0">
+                          <a:rPr lang="en-US" i="1" smtClean="0">
                             <a:latin typeface="Cambria Math" panose="02040503050406030204" pitchFamily="18" charset="0"/>
                           </a:rPr>
                           <m:t>, </m:t>
                         </m:r>
                         <m:r>
-                          <a:rPr lang="en-US" b="0" i="1" smtClean="0">
+                          <a:rPr lang="en-US" i="1" smtClean="0">
                             <a:latin typeface="Cambria Math" panose="02040503050406030204" pitchFamily="18" charset="0"/>
                           </a:rPr>
                           <m:t>𝐸</m:t>
@@ -22681,7 +26851,7 @@
                   </m:oMath>
                 </a14:m>
                 <a:r>
-                  <a:rPr lang="en-US" b="0" dirty="0"/>
+                  <a:rPr lang="en-US" dirty="0"/>
                   <a:t> is a </a:t>
                 </a:r>
                 <a:r>
@@ -22690,19 +26860,11 @@
                       <a:srgbClr val="0070C0"/>
                     </a:solidFill>
                   </a:rPr>
-                  <a:t>tree </a:t>
+                  <a:t>tree</a:t>
                 </a:r>
                 <a:r>
                   <a:rPr lang="en-US" dirty="0"/>
-                  <a:t>if and only if</a:t>
-                </a:r>
-                <a:endParaRPr lang="en-US" b="0" dirty="0"/>
-              </a:p>
-              <a:p>
-                <a:pPr lvl="1"/>
-                <a:r>
-                  <a:rPr lang="en-US" dirty="0"/>
-                  <a:t>(</a:t>
+                  <a:t> if and only if that (</a:t>
                 </a:r>
                 <a:r>
                   <a:rPr lang="en-US" dirty="0" err="1"/>
@@ -22710,387 +26872,7 @@
                 </a:r>
                 <a:r>
                   <a:rPr lang="en-US" dirty="0"/>
-                  <a:t>) it is connected; and </a:t>
-                </a:r>
-              </a:p>
-              <a:p>
-                <a:pPr lvl="1"/>
-                <a:r>
-                  <a:rPr lang="en-US" dirty="0"/>
-                  <a:t>(ii) i</a:t>
-                </a:r>
-                <a:r>
-                  <a:rPr lang="en-US" b="0" dirty="0"/>
-                  <a:t>t is acyclic (i.e</a:t>
-                </a:r>
-                <a:r>
-                  <a:rPr lang="en-US" dirty="0"/>
-                  <a:t>., </a:t>
-                </a:r>
-                <a:r>
-                  <a:rPr lang="en-US" b="0" dirty="0"/>
-                  <a:t>does not contain any cycle) </a:t>
-                </a:r>
-              </a:p>
-              <a:p>
-                <a:pPr lvl="1"/>
-                <a:endParaRPr lang="en-US" dirty="0"/>
-              </a:p>
-              <a:p>
-                <a:endParaRPr lang="en-US" b="0" dirty="0"/>
-              </a:p>
-              <a:p>
-                <a:pPr lvl="1"/>
-                <a:endParaRPr lang="en-US" dirty="0"/>
-              </a:p>
-            </p:txBody>
-          </p:sp>
-        </mc:Choice>
-        <mc:Fallback>
-          <p:sp>
-            <p:nvSpPr>
-              <p:cNvPr id="3" name="Content Placeholder 2">
-                <a:extLst>
-                  <a:ext uri="{FF2B5EF4-FFF2-40B4-BE49-F238E27FC236}">
-                    <a16:creationId xmlns:a16="http://schemas.microsoft.com/office/drawing/2014/main" id="{76CDD15A-FAD1-4CF4-9358-32E9357B9CD6}"/>
-                  </a:ext>
-                </a:extLst>
-              </p:cNvPr>
-              <p:cNvSpPr>
-                <a:spLocks noGrp="1" noRot="1" noChangeAspect="1" noMove="1" noResize="1" noEditPoints="1" noAdjustHandles="1" noChangeArrowheads="1" noChangeShapeType="1" noTextEdit="1"/>
-              </p:cNvSpPr>
-              <p:nvPr>
-                <p:ph sz="quarter" idx="1"/>
-              </p:nvPr>
-            </p:nvSpPr>
-            <p:spPr>
-              <a:xfrm>
-                <a:off x="609600" y="1219200"/>
-                <a:ext cx="10972800" cy="1447800"/>
-              </a:xfrm>
-              <a:blipFill>
-                <a:blip r:embed="rId2"/>
-                <a:stretch>
-                  <a:fillRect l="-500" t="-3782"/>
-                </a:stretch>
-              </a:blipFill>
-            </p:spPr>
-            <p:txBody>
-              <a:bodyPr/>
-              <a:lstStyle/>
-              <a:p>
-                <a:r>
-                  <a:rPr lang="en-US">
-                    <a:noFill/>
-                  </a:rPr>
-                  <a:t> </a:t>
-                </a:r>
-              </a:p>
-            </p:txBody>
-          </p:sp>
-        </mc:Fallback>
-      </mc:AlternateContent>
-      <mc:AlternateContent xmlns:mc="http://schemas.openxmlformats.org/markup-compatibility/2006">
-        <mc:Choice xmlns:a14="http://schemas.microsoft.com/office/drawing/2010/main" Requires="a14">
-          <p:sp>
-            <p:nvSpPr>
-              <p:cNvPr id="5" name="Content Placeholder 2">
-                <a:extLst>
-                  <a:ext uri="{FF2B5EF4-FFF2-40B4-BE49-F238E27FC236}">
-                    <a16:creationId xmlns:a16="http://schemas.microsoft.com/office/drawing/2014/main" id="{C87AED86-A139-4A1D-B011-CBD1518E674C}"/>
-                  </a:ext>
-                </a:extLst>
-              </p:cNvPr>
-              <p:cNvSpPr txBox="1">
-                <a:spLocks/>
-              </p:cNvSpPr>
-              <p:nvPr/>
-            </p:nvSpPr>
-            <p:spPr bwMode="auto">
-              <a:xfrm>
-                <a:off x="685800" y="2895600"/>
-                <a:ext cx="10820400" cy="1066800"/>
-              </a:xfrm>
-              <a:prstGeom prst="rect">
-                <a:avLst/>
-              </a:prstGeom>
-              <a:noFill/>
-              <a:ln w="12700">
-                <a:solidFill>
-                  <a:schemeClr val="tx1"/>
-                </a:solidFill>
-                <a:miter lim="800000"/>
-                <a:headEnd/>
-                <a:tailEnd/>
-              </a:ln>
-            </p:spPr>
-            <p:txBody>
-              <a:bodyPr vert="horz" wrap="square" lIns="91440" tIns="45720" rIns="91440" bIns="45720" numCol="1" anchor="t" anchorCtr="0" compatLnSpc="1">
-                <a:prstTxWarp prst="textNoShape">
-                  <a:avLst/>
-                </a:prstTxWarp>
-              </a:bodyPr>
-              <a:lstStyle>
-                <a:lvl1pPr marL="273050" indent="-273050" algn="l" rtl="0" eaLnBrk="0" fontAlgn="base" hangingPunct="0">
-                  <a:spcBef>
-                    <a:spcPts val="600"/>
-                  </a:spcBef>
-                  <a:spcAft>
-                    <a:spcPct val="0"/>
-                  </a:spcAft>
-                  <a:buClr>
-                    <a:schemeClr val="accent1"/>
-                  </a:buClr>
-                  <a:buSzPct val="76000"/>
-                  <a:buFont typeface="Wingdings 3" pitchFamily="18" charset="2"/>
-                  <a:buChar char=""/>
-                  <a:defRPr sz="2600" kern="1200">
-                    <a:solidFill>
-                      <a:schemeClr val="tx1"/>
-                    </a:solidFill>
-                    <a:latin typeface="+mn-lt"/>
-                    <a:ea typeface="+mn-ea"/>
-                    <a:cs typeface="+mn-cs"/>
-                  </a:defRPr>
-                </a:lvl1pPr>
-                <a:lvl2pPr marL="547688" indent="-273050" algn="l" rtl="0" eaLnBrk="0" fontAlgn="base" hangingPunct="0">
-                  <a:spcBef>
-                    <a:spcPts val="500"/>
-                  </a:spcBef>
-                  <a:spcAft>
-                    <a:spcPct val="0"/>
-                  </a:spcAft>
-                  <a:buClr>
-                    <a:schemeClr val="accent2"/>
-                  </a:buClr>
-                  <a:buSzPct val="76000"/>
-                  <a:buFont typeface="Wingdings 3" pitchFamily="18" charset="2"/>
-                  <a:buChar char=""/>
-                  <a:defRPr sz="2300" kern="1200">
-                    <a:solidFill>
-                      <a:schemeClr val="tx2"/>
-                    </a:solidFill>
-                    <a:latin typeface="+mn-lt"/>
-                    <a:ea typeface="+mn-ea"/>
-                    <a:cs typeface="+mn-cs"/>
-                  </a:defRPr>
-                </a:lvl2pPr>
-                <a:lvl3pPr marL="822325" indent="-228600" algn="l" rtl="0" eaLnBrk="0" fontAlgn="base" hangingPunct="0">
-                  <a:spcBef>
-                    <a:spcPts val="500"/>
-                  </a:spcBef>
-                  <a:spcAft>
-                    <a:spcPct val="0"/>
-                  </a:spcAft>
-                  <a:buClr>
-                    <a:srgbClr val="BCBCBC"/>
-                  </a:buClr>
-                  <a:buSzPct val="76000"/>
-                  <a:buFont typeface="Wingdings 3" pitchFamily="18" charset="2"/>
-                  <a:buChar char=""/>
-                  <a:defRPr sz="2000" kern="1200">
-                    <a:solidFill>
-                      <a:schemeClr val="tx1"/>
-                    </a:solidFill>
-                    <a:latin typeface="+mn-lt"/>
-                    <a:ea typeface="+mn-ea"/>
-                    <a:cs typeface="+mn-cs"/>
-                  </a:defRPr>
-                </a:lvl3pPr>
-                <a:lvl4pPr marL="1096963" indent="-228600" algn="l" rtl="0" eaLnBrk="0" fontAlgn="base" hangingPunct="0">
-                  <a:spcBef>
-                    <a:spcPts val="400"/>
-                  </a:spcBef>
-                  <a:spcAft>
-                    <a:spcPct val="0"/>
-                  </a:spcAft>
-                  <a:buClr>
-                    <a:srgbClr val="8BA2B4"/>
-                  </a:buClr>
-                  <a:buSzPct val="70000"/>
-                  <a:buFont typeface="Wingdings" pitchFamily="2" charset="2"/>
-                  <a:buChar char=""/>
-                  <a:defRPr sz="2000" kern="1200">
-                    <a:solidFill>
-                      <a:schemeClr val="tx1"/>
-                    </a:solidFill>
-                    <a:latin typeface="+mn-lt"/>
-                    <a:ea typeface="+mn-ea"/>
-                    <a:cs typeface="+mn-cs"/>
-                  </a:defRPr>
-                </a:lvl4pPr>
-                <a:lvl5pPr marL="1371600" indent="-228600" algn="l" rtl="0" eaLnBrk="0" fontAlgn="base" hangingPunct="0">
-                  <a:spcBef>
-                    <a:spcPts val="300"/>
-                  </a:spcBef>
-                  <a:spcAft>
-                    <a:spcPct val="0"/>
-                  </a:spcAft>
-                  <a:buClr>
-                    <a:schemeClr val="accent2"/>
-                  </a:buClr>
-                  <a:buSzPct val="70000"/>
-                  <a:buFont typeface="Wingdings" pitchFamily="2" charset="2"/>
-                  <a:buChar char=""/>
-                  <a:defRPr sz="1600" kern="1200">
-                    <a:solidFill>
-                      <a:schemeClr val="tx1"/>
-                    </a:solidFill>
-                    <a:latin typeface="+mn-lt"/>
-                    <a:ea typeface="+mn-ea"/>
-                    <a:cs typeface="+mn-cs"/>
-                  </a:defRPr>
-                </a:lvl5pPr>
-                <a:lvl6pPr marL="1645920" indent="-182880" algn="l" rtl="0" eaLnBrk="1" latinLnBrk="0" hangingPunct="1">
-                  <a:spcBef>
-                    <a:spcPts val="300"/>
-                  </a:spcBef>
-                  <a:buClr>
-                    <a:srgbClr val="9FB8CD">
-                      <a:shade val="75000"/>
-                    </a:srgbClr>
-                  </a:buClr>
-                  <a:buSzPct val="75000"/>
-                  <a:buFont typeface="Wingdings 3"/>
-                  <a:buChar char=""/>
-                  <a:defRPr kumimoji="0" lang="en-US" sz="1600" kern="1200" smtClean="0">
-                    <a:solidFill>
-                      <a:schemeClr val="tx1"/>
-                    </a:solidFill>
-                    <a:latin typeface="+mn-lt"/>
-                    <a:ea typeface="+mn-ea"/>
-                    <a:cs typeface="+mn-cs"/>
-                  </a:defRPr>
-                </a:lvl6pPr>
-                <a:lvl7pPr marL="1828800" indent="-182880" algn="l" rtl="0" eaLnBrk="1" latinLnBrk="0" hangingPunct="1">
-                  <a:spcBef>
-                    <a:spcPts val="300"/>
-                  </a:spcBef>
-                  <a:buClr>
-                    <a:srgbClr val="727CA3">
-                      <a:shade val="75000"/>
-                    </a:srgbClr>
-                  </a:buClr>
-                  <a:buSzPct val="75000"/>
-                  <a:buFont typeface="Wingdings 3"/>
-                  <a:buChar char=""/>
-                  <a:defRPr kumimoji="0" lang="en-US" sz="1400" kern="1200" smtClean="0">
-                    <a:solidFill>
-                      <a:schemeClr val="tx1"/>
-                    </a:solidFill>
-                    <a:latin typeface="+mn-lt"/>
-                    <a:ea typeface="+mn-ea"/>
-                    <a:cs typeface="+mn-cs"/>
-                  </a:defRPr>
-                </a:lvl7pPr>
-                <a:lvl8pPr marL="2011680" indent="-182880" algn="l" rtl="0" eaLnBrk="1" latinLnBrk="0" hangingPunct="1">
-                  <a:spcBef>
-                    <a:spcPts val="300"/>
-                  </a:spcBef>
-                  <a:buClr>
-                    <a:prstClr val="white">
-                      <a:shade val="50000"/>
-                    </a:prstClr>
-                  </a:buClr>
-                  <a:buSzPct val="75000"/>
-                  <a:buFont typeface="Wingdings 3"/>
-                  <a:buChar char=""/>
-                  <a:defRPr kumimoji="0" lang="en-US" sz="1400" kern="1200" smtClean="0">
-                    <a:solidFill>
-                      <a:schemeClr val="tx1"/>
-                    </a:solidFill>
-                    <a:latin typeface="+mn-lt"/>
-                    <a:ea typeface="+mn-ea"/>
-                    <a:cs typeface="+mn-cs"/>
-                  </a:defRPr>
-                </a:lvl8pPr>
-                <a:lvl9pPr marL="2194560" indent="-182880" algn="l" rtl="0" eaLnBrk="1" latinLnBrk="0" hangingPunct="1">
-                  <a:spcBef>
-                    <a:spcPts val="300"/>
-                  </a:spcBef>
-                  <a:buClr>
-                    <a:srgbClr val="9FB8CD"/>
-                  </a:buClr>
-                  <a:buSzPct val="75000"/>
-                  <a:buFont typeface="Wingdings 3"/>
-                  <a:buChar char=""/>
-                  <a:defRPr kumimoji="0" lang="en-US" sz="1200" kern="1200" smtClean="0">
-                    <a:solidFill>
-                      <a:schemeClr val="tx1"/>
-                    </a:solidFill>
-                    <a:latin typeface="+mn-lt"/>
-                    <a:ea typeface="+mn-ea"/>
-                    <a:cs typeface="+mn-cs"/>
-                  </a:defRPr>
-                </a:lvl9pPr>
-              </a:lstStyle>
-              <a:p>
-                <a:r>
-                  <a:rPr lang="en-US" dirty="0">
-                    <a:latin typeface="Arial Nova Cond" panose="020B0506020202020204" pitchFamily="34" charset="0"/>
-                    <a:cs typeface="Arial" panose="020B0604020202020204" pitchFamily="34" charset="0"/>
-                  </a:rPr>
-                  <a:t>Claim [Tree Edges]</a:t>
-                </a:r>
-                <a:r>
-                  <a:rPr lang="en-US" dirty="0"/>
-                  <a:t>: </a:t>
-                </a:r>
-              </a:p>
-              <a:p>
-                <a:pPr lvl="1"/>
-                <a:r>
-                  <a:rPr lang="en-US" dirty="0"/>
-                  <a:t>If </a:t>
-                </a:r>
-                <a14:m>
-                  <m:oMath xmlns:m="http://schemas.openxmlformats.org/officeDocument/2006/math">
-                    <m:r>
-                      <a:rPr lang="en-US" i="1">
-                        <a:latin typeface="Cambria Math" panose="02040503050406030204" pitchFamily="18" charset="0"/>
-                      </a:rPr>
-                      <m:t>𝑇</m:t>
-                    </m:r>
-                    <m:r>
-                      <a:rPr lang="en-US" i="1">
-                        <a:latin typeface="Cambria Math" panose="02040503050406030204" pitchFamily="18" charset="0"/>
-                      </a:rPr>
-                      <m:t>=</m:t>
-                    </m:r>
-                    <m:d>
-                      <m:dPr>
-                        <m:ctrlPr>
-                          <a:rPr lang="en-US" i="1">
-                            <a:latin typeface="Cambria Math" panose="02040503050406030204" pitchFamily="18" charset="0"/>
-                          </a:rPr>
-                        </m:ctrlPr>
-                      </m:dPr>
-                      <m:e>
-                        <m:r>
-                          <a:rPr lang="en-US" i="1">
-                            <a:latin typeface="Cambria Math" panose="02040503050406030204" pitchFamily="18" charset="0"/>
-                          </a:rPr>
-                          <m:t>𝑉</m:t>
-                        </m:r>
-                        <m:r>
-                          <a:rPr lang="en-US" i="1">
-                            <a:latin typeface="Cambria Math" panose="02040503050406030204" pitchFamily="18" charset="0"/>
-                          </a:rPr>
-                          <m:t>, </m:t>
-                        </m:r>
-                        <m:r>
-                          <a:rPr lang="en-US" i="1">
-                            <a:latin typeface="Cambria Math" panose="02040503050406030204" pitchFamily="18" charset="0"/>
-                          </a:rPr>
-                          <m:t>𝐸</m:t>
-                        </m:r>
-                      </m:e>
-                    </m:d>
-                  </m:oMath>
-                </a14:m>
-                <a:r>
-                  <a:rPr lang="en-US" dirty="0"/>
-                  <a:t> is a tree, then we have that </a:t>
+                  <a:t>) it is connected; and (ii) </a:t>
                 </a:r>
                 <a14:m>
                   <m:oMath xmlns:m="http://schemas.openxmlformats.org/officeDocument/2006/math">
@@ -23149,56 +26931,39 @@
                 <a:endParaRPr lang="en-US" dirty="0"/>
               </a:p>
               <a:p>
-                <a:pPr lvl="1"/>
-                <a:endParaRPr lang="en-US" dirty="0"/>
-              </a:p>
-              <a:p>
-                <a:endParaRPr lang="en-US" dirty="0"/>
-              </a:p>
-              <a:p>
-                <a:pPr lvl="1"/>
                 <a:endParaRPr lang="en-US" dirty="0"/>
               </a:p>
             </p:txBody>
           </p:sp>
         </mc:Choice>
-        <mc:Fallback>
+        <mc:Fallback xmlns="">
           <p:sp>
             <p:nvSpPr>
-              <p:cNvPr id="5" name="Content Placeholder 2">
+              <p:cNvPr id="3" name="Content Placeholder 2">
                 <a:extLst>
                   <a:ext uri="{FF2B5EF4-FFF2-40B4-BE49-F238E27FC236}">
-                    <a16:creationId xmlns:a16="http://schemas.microsoft.com/office/drawing/2014/main" id="{C87AED86-A139-4A1D-B011-CBD1518E674C}"/>
+                    <a16:creationId xmlns:a16="http://schemas.microsoft.com/office/drawing/2014/main" id="{E1244FAB-C61D-4CB3-B264-DA32F990D261}"/>
                   </a:ext>
                 </a:extLst>
               </p:cNvPr>
-              <p:cNvSpPr txBox="1">
-                <a:spLocks noRot="1" noChangeAspect="1" noMove="1" noResize="1" noEditPoints="1" noAdjustHandles="1" noChangeArrowheads="1" noChangeShapeType="1" noTextEdit="1"/>
+              <p:cNvSpPr>
+                <a:spLocks noGrp="1" noRot="1" noChangeAspect="1" noMove="1" noResize="1" noEditPoints="1" noAdjustHandles="1" noChangeArrowheads="1" noChangeShapeType="1" noTextEdit="1"/>
               </p:cNvSpPr>
-              <p:nvPr/>
+              <p:nvPr>
+                <p:ph sz="quarter" idx="1"/>
+              </p:nvPr>
             </p:nvSpPr>
-            <p:spPr bwMode="auto">
+            <p:spPr>
               <a:xfrm>
-                <a:off x="685800" y="2895600"/>
-                <a:ext cx="10820400" cy="1066800"/>
+                <a:off x="609600" y="1219200"/>
+                <a:ext cx="10972800" cy="1520658"/>
               </a:xfrm>
-              <a:prstGeom prst="rect">
-                <a:avLst/>
-              </a:prstGeom>
               <a:blipFill>
-                <a:blip r:embed="rId3"/>
+                <a:blip r:embed="rId2"/>
                 <a:stretch>
-                  <a:fillRect l="-450" t="-5085"/>
+                  <a:fillRect l="-500" t="-3614"/>
                 </a:stretch>
               </a:blipFill>
-              <a:ln w="12700">
-                <a:solidFill>
-                  <a:schemeClr val="tx1"/>
-                </a:solidFill>
-                <a:miter lim="800000"/>
-                <a:headEnd/>
-                <a:tailEnd/>
-              </a:ln>
             </p:spPr>
             <p:txBody>
               <a:bodyPr/>
@@ -23215,260 +26980,158 @@
           </p:sp>
         </mc:Fallback>
       </mc:AlternateContent>
-      <p:sp>
-        <p:nvSpPr>
-          <p:cNvPr id="6" name="Content Placeholder 2">
+      <p:pic>
+        <p:nvPicPr>
+          <p:cNvPr id="5" name="Picture 4">
             <a:extLst>
               <a:ext uri="{FF2B5EF4-FFF2-40B4-BE49-F238E27FC236}">
-                <a16:creationId xmlns:a16="http://schemas.microsoft.com/office/drawing/2014/main" id="{63B4B030-19E0-430B-8349-91F09EDCCB15}"/>
+                <a16:creationId xmlns:a16="http://schemas.microsoft.com/office/drawing/2014/main" id="{BD3518D7-3767-4F0C-A0CF-D92E692E84D1}"/>
               </a:ext>
             </a:extLst>
           </p:cNvPr>
-          <p:cNvSpPr txBox="1">
-            <a:spLocks/>
-          </p:cNvSpPr>
+          <p:cNvPicPr>
+            <a:picLocks noChangeAspect="1"/>
+          </p:cNvPicPr>
           <p:nvPr/>
-        </p:nvSpPr>
-        <p:spPr bwMode="auto">
+        </p:nvPicPr>
+        <p:blipFill>
+          <a:blip r:embed="rId3"/>
+          <a:stretch>
+            <a:fillRect/>
+          </a:stretch>
+        </p:blipFill>
+        <p:spPr>
           <a:xfrm>
-            <a:off x="2012731" y="4267200"/>
-            <a:ext cx="8229600" cy="2362200"/>
+            <a:off x="1871249" y="3638347"/>
+            <a:ext cx="2014554" cy="1529255"/>
           </a:xfrm>
           <a:prstGeom prst="rect">
             <a:avLst/>
           </a:prstGeom>
-          <a:noFill/>
-          <a:ln w="9525">
-            <a:noFill/>
-            <a:miter lim="800000"/>
-            <a:headEnd/>
-            <a:tailEnd/>
+          <a:ln>
+            <a:solidFill>
+              <a:schemeClr val="accent1">
+                <a:shade val="50000"/>
+              </a:schemeClr>
+            </a:solidFill>
           </a:ln>
         </p:spPr>
-        <p:txBody>
-          <a:bodyPr vert="horz" wrap="square" lIns="91440" tIns="45720" rIns="91440" bIns="45720" numCol="1" anchor="t" anchorCtr="0" compatLnSpc="1">
-            <a:prstTxWarp prst="textNoShape">
-              <a:avLst/>
-            </a:prstTxWarp>
-          </a:bodyPr>
-          <a:lstStyle>
-            <a:lvl1pPr marL="273050" indent="-273050" algn="l" rtl="0" eaLnBrk="0" fontAlgn="base" hangingPunct="0">
-              <a:spcBef>
-                <a:spcPts val="600"/>
-              </a:spcBef>
-              <a:spcAft>
-                <a:spcPct val="0"/>
-              </a:spcAft>
-              <a:buClr>
-                <a:schemeClr val="accent1"/>
-              </a:buClr>
-              <a:buSzPct val="76000"/>
-              <a:buFont typeface="Wingdings 3" pitchFamily="18" charset="2"/>
-              <a:buChar char=""/>
-              <a:defRPr sz="2600" kern="1200">
-                <a:solidFill>
-                  <a:schemeClr val="tx1"/>
-                </a:solidFill>
-                <a:latin typeface="+mn-lt"/>
-                <a:ea typeface="+mn-ea"/>
-                <a:cs typeface="+mn-cs"/>
-              </a:defRPr>
-            </a:lvl1pPr>
-            <a:lvl2pPr marL="547688" indent="-273050" algn="l" rtl="0" eaLnBrk="0" fontAlgn="base" hangingPunct="0">
-              <a:spcBef>
-                <a:spcPts val="500"/>
-              </a:spcBef>
-              <a:spcAft>
-                <a:spcPct val="0"/>
-              </a:spcAft>
-              <a:buClr>
-                <a:schemeClr val="accent2"/>
-              </a:buClr>
-              <a:buSzPct val="76000"/>
-              <a:buFont typeface="Wingdings 3" pitchFamily="18" charset="2"/>
-              <a:buChar char=""/>
-              <a:defRPr sz="2300" kern="1200">
-                <a:solidFill>
-                  <a:schemeClr val="tx2"/>
-                </a:solidFill>
-                <a:latin typeface="+mn-lt"/>
-                <a:ea typeface="+mn-ea"/>
-                <a:cs typeface="+mn-cs"/>
-              </a:defRPr>
-            </a:lvl2pPr>
-            <a:lvl3pPr marL="822325" indent="-228600" algn="l" rtl="0" eaLnBrk="0" fontAlgn="base" hangingPunct="0">
-              <a:spcBef>
-                <a:spcPts val="500"/>
-              </a:spcBef>
-              <a:spcAft>
-                <a:spcPct val="0"/>
-              </a:spcAft>
-              <a:buClr>
-                <a:srgbClr val="BCBCBC"/>
-              </a:buClr>
-              <a:buSzPct val="76000"/>
-              <a:buFont typeface="Wingdings 3" pitchFamily="18" charset="2"/>
-              <a:buChar char=""/>
-              <a:defRPr sz="2000" kern="1200">
-                <a:solidFill>
-                  <a:schemeClr val="tx1"/>
-                </a:solidFill>
-                <a:latin typeface="+mn-lt"/>
-                <a:ea typeface="+mn-ea"/>
-                <a:cs typeface="+mn-cs"/>
-              </a:defRPr>
-            </a:lvl3pPr>
-            <a:lvl4pPr marL="1096963" indent="-228600" algn="l" rtl="0" eaLnBrk="0" fontAlgn="base" hangingPunct="0">
-              <a:spcBef>
-                <a:spcPts val="400"/>
-              </a:spcBef>
-              <a:spcAft>
-                <a:spcPct val="0"/>
-              </a:spcAft>
-              <a:buClr>
-                <a:srgbClr val="8BA2B4"/>
-              </a:buClr>
-              <a:buSzPct val="70000"/>
-              <a:buFont typeface="Wingdings" pitchFamily="2" charset="2"/>
-              <a:buChar char=""/>
-              <a:defRPr sz="2000" kern="1200">
-                <a:solidFill>
-                  <a:schemeClr val="tx1"/>
-                </a:solidFill>
-                <a:latin typeface="+mn-lt"/>
-                <a:ea typeface="+mn-ea"/>
-                <a:cs typeface="+mn-cs"/>
-              </a:defRPr>
-            </a:lvl4pPr>
-            <a:lvl5pPr marL="1371600" indent="-228600" algn="l" rtl="0" eaLnBrk="0" fontAlgn="base" hangingPunct="0">
-              <a:spcBef>
-                <a:spcPts val="300"/>
-              </a:spcBef>
-              <a:spcAft>
-                <a:spcPct val="0"/>
-              </a:spcAft>
-              <a:buClr>
-                <a:schemeClr val="accent2"/>
-              </a:buClr>
-              <a:buSzPct val="70000"/>
-              <a:buFont typeface="Wingdings" pitchFamily="2" charset="2"/>
-              <a:buChar char=""/>
-              <a:defRPr sz="1600" kern="1200">
-                <a:solidFill>
-                  <a:schemeClr val="tx1"/>
-                </a:solidFill>
-                <a:latin typeface="+mn-lt"/>
-                <a:ea typeface="+mn-ea"/>
-                <a:cs typeface="+mn-cs"/>
-              </a:defRPr>
-            </a:lvl5pPr>
-            <a:lvl6pPr marL="1645920" indent="-182880" algn="l" rtl="0" eaLnBrk="1" latinLnBrk="0" hangingPunct="1">
-              <a:spcBef>
-                <a:spcPts val="300"/>
-              </a:spcBef>
-              <a:buClr>
-                <a:srgbClr val="9FB8CD">
-                  <a:shade val="75000"/>
-                </a:srgbClr>
-              </a:buClr>
-              <a:buSzPct val="75000"/>
-              <a:buFont typeface="Wingdings 3"/>
-              <a:buChar char=""/>
-              <a:defRPr kumimoji="0" lang="en-US" sz="1600" kern="1200" smtClean="0">
-                <a:solidFill>
-                  <a:schemeClr val="tx1"/>
-                </a:solidFill>
-                <a:latin typeface="+mn-lt"/>
-                <a:ea typeface="+mn-ea"/>
-                <a:cs typeface="+mn-cs"/>
-              </a:defRPr>
-            </a:lvl6pPr>
-            <a:lvl7pPr marL="1828800" indent="-182880" algn="l" rtl="0" eaLnBrk="1" latinLnBrk="0" hangingPunct="1">
-              <a:spcBef>
-                <a:spcPts val="300"/>
-              </a:spcBef>
-              <a:buClr>
-                <a:srgbClr val="727CA3">
-                  <a:shade val="75000"/>
-                </a:srgbClr>
-              </a:buClr>
-              <a:buSzPct val="75000"/>
-              <a:buFont typeface="Wingdings 3"/>
-              <a:buChar char=""/>
-              <a:defRPr kumimoji="0" lang="en-US" sz="1400" kern="1200" smtClean="0">
-                <a:solidFill>
-                  <a:schemeClr val="tx1"/>
-                </a:solidFill>
-                <a:latin typeface="+mn-lt"/>
-                <a:ea typeface="+mn-ea"/>
-                <a:cs typeface="+mn-cs"/>
-              </a:defRPr>
-            </a:lvl7pPr>
-            <a:lvl8pPr marL="2011680" indent="-182880" algn="l" rtl="0" eaLnBrk="1" latinLnBrk="0" hangingPunct="1">
-              <a:spcBef>
-                <a:spcPts val="300"/>
-              </a:spcBef>
-              <a:buClr>
-                <a:prstClr val="white">
-                  <a:shade val="50000"/>
-                </a:prstClr>
-              </a:buClr>
-              <a:buSzPct val="75000"/>
-              <a:buFont typeface="Wingdings 3"/>
-              <a:buChar char=""/>
-              <a:defRPr kumimoji="0" lang="en-US" sz="1400" kern="1200" smtClean="0">
-                <a:solidFill>
-                  <a:schemeClr val="tx1"/>
-                </a:solidFill>
-                <a:latin typeface="+mn-lt"/>
-                <a:ea typeface="+mn-ea"/>
-                <a:cs typeface="+mn-cs"/>
-              </a:defRPr>
-            </a:lvl8pPr>
-            <a:lvl9pPr marL="2194560" indent="-182880" algn="l" rtl="0" eaLnBrk="1" latinLnBrk="0" hangingPunct="1">
-              <a:spcBef>
-                <a:spcPts val="300"/>
-              </a:spcBef>
-              <a:buClr>
-                <a:srgbClr val="9FB8CD"/>
-              </a:buClr>
-              <a:buSzPct val="75000"/>
-              <a:buFont typeface="Wingdings 3"/>
-              <a:buChar char=""/>
-              <a:defRPr kumimoji="0" lang="en-US" sz="1200" kern="1200" smtClean="0">
-                <a:solidFill>
-                  <a:schemeClr val="tx1"/>
-                </a:solidFill>
-                <a:latin typeface="+mn-lt"/>
-                <a:ea typeface="+mn-ea"/>
-                <a:cs typeface="+mn-cs"/>
-              </a:defRPr>
-            </a:lvl9pPr>
-          </a:lstStyle>
-          <a:p>
-            <a:pPr lvl="1"/>
-            <a:endParaRPr lang="en-US" sz="1000" dirty="0"/>
-          </a:p>
-          <a:p>
-            <a:endParaRPr lang="en-US" dirty="0"/>
-          </a:p>
-          <a:p>
-            <a:pPr lvl="1"/>
-            <a:endParaRPr lang="en-US" dirty="0"/>
-          </a:p>
-          <a:p>
-            <a:endParaRPr lang="en-US" dirty="0"/>
-          </a:p>
-          <a:p>
-            <a:pPr lvl="1"/>
-            <a:endParaRPr lang="en-US" dirty="0"/>
-          </a:p>
-        </p:txBody>
-      </p:sp>
+      </p:pic>
+      <p:pic>
+        <p:nvPicPr>
+          <p:cNvPr id="8" name="Picture 7">
+            <a:extLst>
+              <a:ext uri="{FF2B5EF4-FFF2-40B4-BE49-F238E27FC236}">
+                <a16:creationId xmlns:a16="http://schemas.microsoft.com/office/drawing/2014/main" id="{2F532638-70BB-47F9-88E9-EAD5F1B91C20}"/>
+              </a:ext>
+            </a:extLst>
+          </p:cNvPr>
+          <p:cNvPicPr>
+            <a:picLocks noChangeAspect="1"/>
+          </p:cNvPicPr>
+          <p:nvPr/>
+        </p:nvPicPr>
+        <p:blipFill>
+          <a:blip r:embed="rId4"/>
+          <a:stretch>
+            <a:fillRect/>
+          </a:stretch>
+        </p:blipFill>
+        <p:spPr>
+          <a:xfrm>
+            <a:off x="4191001" y="3638346"/>
+            <a:ext cx="1905000" cy="1520658"/>
+          </a:xfrm>
+          <a:prstGeom prst="rect">
+            <a:avLst/>
+          </a:prstGeom>
+          <a:ln>
+            <a:solidFill>
+              <a:schemeClr val="accent1">
+                <a:shade val="50000"/>
+              </a:schemeClr>
+            </a:solidFill>
+          </a:ln>
+        </p:spPr>
+      </p:pic>
+      <p:pic>
+        <p:nvPicPr>
+          <p:cNvPr id="11" name="Picture 10">
+            <a:extLst>
+              <a:ext uri="{FF2B5EF4-FFF2-40B4-BE49-F238E27FC236}">
+                <a16:creationId xmlns:a16="http://schemas.microsoft.com/office/drawing/2014/main" id="{2B19DA4C-EE43-4640-A5F0-C37A529FF81C}"/>
+              </a:ext>
+            </a:extLst>
+          </p:cNvPr>
+          <p:cNvPicPr>
+            <a:picLocks noChangeAspect="1"/>
+          </p:cNvPicPr>
+          <p:nvPr/>
+        </p:nvPicPr>
+        <p:blipFill>
+          <a:blip r:embed="rId5"/>
+          <a:stretch>
+            <a:fillRect/>
+          </a:stretch>
+        </p:blipFill>
+        <p:spPr>
+          <a:xfrm>
+            <a:off x="6326959" y="3638347"/>
+            <a:ext cx="1856549" cy="1529255"/>
+          </a:xfrm>
+          <a:prstGeom prst="rect">
+            <a:avLst/>
+          </a:prstGeom>
+          <a:ln>
+            <a:solidFill>
+              <a:schemeClr val="accent1">
+                <a:shade val="50000"/>
+              </a:schemeClr>
+            </a:solidFill>
+          </a:ln>
+        </p:spPr>
+      </p:pic>
+      <p:pic>
+        <p:nvPicPr>
+          <p:cNvPr id="14" name="Picture 13">
+            <a:extLst>
+              <a:ext uri="{FF2B5EF4-FFF2-40B4-BE49-F238E27FC236}">
+                <a16:creationId xmlns:a16="http://schemas.microsoft.com/office/drawing/2014/main" id="{622E6EF9-F89A-4622-8F1B-B1D5E185B594}"/>
+              </a:ext>
+            </a:extLst>
+          </p:cNvPr>
+          <p:cNvPicPr>
+            <a:picLocks noChangeAspect="1"/>
+          </p:cNvPicPr>
+          <p:nvPr/>
+        </p:nvPicPr>
+        <p:blipFill>
+          <a:blip r:embed="rId6"/>
+          <a:stretch>
+            <a:fillRect/>
+          </a:stretch>
+        </p:blipFill>
+        <p:spPr>
+          <a:xfrm>
+            <a:off x="8411481" y="3638346"/>
+            <a:ext cx="1920064" cy="1529255"/>
+          </a:xfrm>
+          <a:prstGeom prst="rect">
+            <a:avLst/>
+          </a:prstGeom>
+          <a:ln>
+            <a:solidFill>
+              <a:schemeClr val="accent1">
+                <a:shade val="50000"/>
+              </a:schemeClr>
+            </a:solidFill>
+          </a:ln>
+        </p:spPr>
+      </p:pic>
     </p:spTree>
     <p:extLst>
       <p:ext uri="{BB962C8B-B14F-4D97-AF65-F5344CB8AC3E}">
-        <p14:creationId xmlns:p14="http://schemas.microsoft.com/office/powerpoint/2010/main" val="2041192070"/>
+        <p14:creationId xmlns:p14="http://schemas.microsoft.com/office/powerpoint/2010/main" val="728338377"/>
       </p:ext>
     </p:extLst>
   </p:cSld>
@@ -23496,7 +27159,7 @@
                             </p:stCondLst>
                             <p:childTnLst>
                               <p:par>
-                                <p:cTn id="5" presetID="1" presetClass="entr" presetSubtype="0" fill="hold" grpId="0" nodeType="clickEffect">
+                                <p:cTn id="5" presetID="1" presetClass="entr" presetSubtype="0" fill="hold" nodeType="clickEffect">
                                   <p:stCondLst>
                                     <p:cond delay="0"/>
                                   </p:stCondLst>
@@ -23509,7 +27172,52 @@
                                           </p:stCondLst>
                                         </p:cTn>
                                         <p:tgtEl>
-                                          <p:spTgt spid="5"/>
+                                          <p:spTgt spid="11"/>
+                                        </p:tgtEl>
+                                        <p:attrNameLst>
+                                          <p:attrName>style.visibility</p:attrName>
+                                        </p:attrNameLst>
+                                      </p:cBhvr>
+                                      <p:to>
+                                        <p:strVal val="visible"/>
+                                      </p:to>
+                                    </p:set>
+                                  </p:childTnLst>
+                                </p:cTn>
+                              </p:par>
+                            </p:childTnLst>
+                          </p:cTn>
+                        </p:par>
+                      </p:childTnLst>
+                    </p:cTn>
+                  </p:par>
+                  <p:par>
+                    <p:cTn id="7" fill="hold">
+                      <p:stCondLst>
+                        <p:cond delay="indefinite"/>
+                      </p:stCondLst>
+                      <p:childTnLst>
+                        <p:par>
+                          <p:cTn id="8" fill="hold">
+                            <p:stCondLst>
+                              <p:cond delay="0"/>
+                            </p:stCondLst>
+                            <p:childTnLst>
+                              <p:par>
+                                <p:cTn id="9" presetID="1" presetClass="entr" presetSubtype="0" fill="hold" nodeType="clickEffect">
+                                  <p:stCondLst>
+                                    <p:cond delay="0"/>
+                                  </p:stCondLst>
+                                  <p:childTnLst>
+                                    <p:set>
+                                      <p:cBhvr>
+                                        <p:cTn id="10" dur="1" fill="hold">
+                                          <p:stCondLst>
+                                            <p:cond delay="0"/>
+                                          </p:stCondLst>
+                                        </p:cTn>
+                                        <p:tgtEl>
+                                          <p:spTgt spid="14"/>
                                         </p:tgtEl>
                                         <p:attrNameLst>
                                           <p:attrName>style.visibility</p:attrName>
@@ -23549,19 +27257,22 @@
         </p:cTn>
       </p:par>
     </p:tnLst>
-    <p:bldLst>
-      <p:bldP spid="5" grpId="0" animBg="1"/>
-    </p:bldLst>
   </p:timing>
 </p:sld>
 </file>
 
-<file path=ppt/slides/slide5.xml><?xml version="1.0" encoding="utf-8"?>
+<file path=ppt/slides/slide6.xml><?xml version="1.0" encoding="utf-8"?>
 <p:sld xmlns:a="http://schemas.openxmlformats.org/drawingml/2006/main" xmlns:r="http://schemas.openxmlformats.org/officeDocument/2006/relationships" xmlns:p="http://schemas.openxmlformats.org/presentationml/2006/main">
   <p:cSld>
     <p:spTree>
       <p:nvGrpSpPr>
-        <p:cNvPr id="1" name=""/>
+        <p:cNvPr id="1" name="">
+          <a:extLst>
+            <a:ext uri="{FF2B5EF4-FFF2-40B4-BE49-F238E27FC236}">
+              <a16:creationId xmlns:a16="http://schemas.microsoft.com/office/drawing/2014/main" id="{84A0A137-946A-38EC-A8E6-B30CA854D49F}"/>
+            </a:ext>
+          </a:extLst>
+        </p:cNvPr>
         <p:cNvGrpSpPr/>
         <p:nvPr/>
       </p:nvGrpSpPr>
@@ -23578,7 +27289,7 @@
           <p:cNvPr id="2" name="Title 1">
             <a:extLst>
               <a:ext uri="{FF2B5EF4-FFF2-40B4-BE49-F238E27FC236}">
-                <a16:creationId xmlns:a16="http://schemas.microsoft.com/office/drawing/2014/main" id="{58EDC03E-FC7A-474F-8072-9E60B9D51B2D}"/>
+                <a16:creationId xmlns:a16="http://schemas.microsoft.com/office/drawing/2014/main" id="{FB85212D-5503-C7F9-40ED-E6DA802FE62C}"/>
               </a:ext>
             </a:extLst>
           </p:cNvPr>
@@ -23608,7 +27319,7 @@
               <p:cNvPr id="3" name="Content Placeholder 2">
                 <a:extLst>
                   <a:ext uri="{FF2B5EF4-FFF2-40B4-BE49-F238E27FC236}">
-                    <a16:creationId xmlns:a16="http://schemas.microsoft.com/office/drawing/2014/main" id="{E1244FAB-C61D-4CB3-B264-DA32F990D261}"/>
+                    <a16:creationId xmlns:a16="http://schemas.microsoft.com/office/drawing/2014/main" id="{3D59CDF7-9E9D-38E4-56F9-A6D7F537D8C5}"/>
                   </a:ext>
                 </a:extLst>
               </p:cNvPr>
@@ -23777,7 +27488,7 @@
               <p:cNvPr id="3" name="Content Placeholder 2">
                 <a:extLst>
                   <a:ext uri="{FF2B5EF4-FFF2-40B4-BE49-F238E27FC236}">
-                    <a16:creationId xmlns:a16="http://schemas.microsoft.com/office/drawing/2014/main" id="{E1244FAB-C61D-4CB3-B264-DA32F990D261}"/>
+                    <a16:creationId xmlns:a16="http://schemas.microsoft.com/office/drawing/2014/main" id="{3D59CDF7-9E9D-38E4-56F9-A6D7F537D8C5}"/>
                   </a:ext>
                 </a:extLst>
               </p:cNvPr>
@@ -23820,7 +27531,7 @@
           <p:cNvPr id="16" name="Group 15">
             <a:extLst>
               <a:ext uri="{FF2B5EF4-FFF2-40B4-BE49-F238E27FC236}">
-                <a16:creationId xmlns:a16="http://schemas.microsoft.com/office/drawing/2014/main" id="{A047D2FF-B07E-48A5-9E4F-5E5F85C453F2}"/>
+                <a16:creationId xmlns:a16="http://schemas.microsoft.com/office/drawing/2014/main" id="{3A664C26-A8AA-3978-FFDE-C0E5DAC012D2}"/>
               </a:ext>
             </a:extLst>
           </p:cNvPr>
@@ -23840,7 +27551,7 @@
             <p:cNvPr id="5" name="Picture 4">
               <a:extLst>
                 <a:ext uri="{FF2B5EF4-FFF2-40B4-BE49-F238E27FC236}">
-                  <a16:creationId xmlns:a16="http://schemas.microsoft.com/office/drawing/2014/main" id="{BD3518D7-3767-4F0C-A0CF-D92E692E84D1}"/>
+                  <a16:creationId xmlns:a16="http://schemas.microsoft.com/office/drawing/2014/main" id="{6D9B836A-E672-DBBC-ED95-1EA70389D1CA}"/>
                 </a:ext>
               </a:extLst>
             </p:cNvPr>
@@ -23877,7 +27588,7 @@
             <p:cNvPr id="6" name="TextBox 5">
               <a:extLst>
                 <a:ext uri="{FF2B5EF4-FFF2-40B4-BE49-F238E27FC236}">
-                  <a16:creationId xmlns:a16="http://schemas.microsoft.com/office/drawing/2014/main" id="{329D5BC6-C701-4F8E-AD6E-F4CF5A90E9EF}"/>
+                  <a16:creationId xmlns:a16="http://schemas.microsoft.com/office/drawing/2014/main" id="{BCF27963-95A2-3929-A07C-D8A2716147A8}"/>
                 </a:ext>
               </a:extLst>
             </p:cNvPr>
@@ -23918,7 +27629,7 @@
           <p:cNvPr id="17" name="Group 16">
             <a:extLst>
               <a:ext uri="{FF2B5EF4-FFF2-40B4-BE49-F238E27FC236}">
-                <a16:creationId xmlns:a16="http://schemas.microsoft.com/office/drawing/2014/main" id="{E8024FA7-A1F6-4088-9AD7-248AF603590B}"/>
+                <a16:creationId xmlns:a16="http://schemas.microsoft.com/office/drawing/2014/main" id="{13F0DD71-0EC8-AAF0-9DC6-D8AE47B2A7A0}"/>
               </a:ext>
             </a:extLst>
           </p:cNvPr>
@@ -23938,7 +27649,7 @@
             <p:cNvPr id="8" name="Picture 7">
               <a:extLst>
                 <a:ext uri="{FF2B5EF4-FFF2-40B4-BE49-F238E27FC236}">
-                  <a16:creationId xmlns:a16="http://schemas.microsoft.com/office/drawing/2014/main" id="{2F532638-70BB-47F9-88E9-EAD5F1B91C20}"/>
+                  <a16:creationId xmlns:a16="http://schemas.microsoft.com/office/drawing/2014/main" id="{2A55B301-379D-A193-1F1D-E9888A74879A}"/>
                 </a:ext>
               </a:extLst>
             </p:cNvPr>
@@ -23975,7 +27686,7 @@
             <p:cNvPr id="9" name="TextBox 8">
               <a:extLst>
                 <a:ext uri="{FF2B5EF4-FFF2-40B4-BE49-F238E27FC236}">
-                  <a16:creationId xmlns:a16="http://schemas.microsoft.com/office/drawing/2014/main" id="{D29A126A-C893-4CC0-8330-46E5136317B1}"/>
+                  <a16:creationId xmlns:a16="http://schemas.microsoft.com/office/drawing/2014/main" id="{CBBD42F8-CDAD-E8C1-9B69-1C9BF556A5DE}"/>
                 </a:ext>
               </a:extLst>
             </p:cNvPr>
@@ -24016,7 +27727,7 @@
           <p:cNvPr id="11" name="Picture 10">
             <a:extLst>
               <a:ext uri="{FF2B5EF4-FFF2-40B4-BE49-F238E27FC236}">
-                <a16:creationId xmlns:a16="http://schemas.microsoft.com/office/drawing/2014/main" id="{2B19DA4C-EE43-4640-A5F0-C37A529FF81C}"/>
+                <a16:creationId xmlns:a16="http://schemas.microsoft.com/office/drawing/2014/main" id="{58C28618-8BBD-7B50-BD65-76FC719A9462}"/>
               </a:ext>
             </a:extLst>
           </p:cNvPr>
@@ -24053,7 +27764,7 @@
           <p:cNvPr id="12" name="TextBox 11">
             <a:extLst>
               <a:ext uri="{FF2B5EF4-FFF2-40B4-BE49-F238E27FC236}">
-                <a16:creationId xmlns:a16="http://schemas.microsoft.com/office/drawing/2014/main" id="{BB97CA31-1502-4D2E-87A4-E69339E299CA}"/>
+                <a16:creationId xmlns:a16="http://schemas.microsoft.com/office/drawing/2014/main" id="{C1A729ED-D857-C231-270C-D053316B2DCA}"/>
               </a:ext>
             </a:extLst>
           </p:cNvPr>
@@ -24093,7 +27804,7 @@
           <p:cNvPr id="14" name="Picture 13">
             <a:extLst>
               <a:ext uri="{FF2B5EF4-FFF2-40B4-BE49-F238E27FC236}">
-                <a16:creationId xmlns:a16="http://schemas.microsoft.com/office/drawing/2014/main" id="{622E6EF9-F89A-4622-8F1B-B1D5E185B594}"/>
+                <a16:creationId xmlns:a16="http://schemas.microsoft.com/office/drawing/2014/main" id="{11E67CFB-8944-C96D-349A-F478A57E8B1F}"/>
               </a:ext>
             </a:extLst>
           </p:cNvPr>
@@ -24130,7 +27841,7 @@
           <p:cNvPr id="15" name="TextBox 14">
             <a:extLst>
               <a:ext uri="{FF2B5EF4-FFF2-40B4-BE49-F238E27FC236}">
-                <a16:creationId xmlns:a16="http://schemas.microsoft.com/office/drawing/2014/main" id="{54E03511-C5A8-4F0D-8F66-D93A20933547}"/>
+                <a16:creationId xmlns:a16="http://schemas.microsoft.com/office/drawing/2014/main" id="{E2D93831-973B-FF7F-51AB-DCE4F6CC789D}"/>
               </a:ext>
             </a:extLst>
           </p:cNvPr>
@@ -24168,7 +27879,7 @@
     </p:spTree>
     <p:extLst>
       <p:ext uri="{BB962C8B-B14F-4D97-AF65-F5344CB8AC3E}">
-        <p14:creationId xmlns:p14="http://schemas.microsoft.com/office/powerpoint/2010/main" val="728338377"/>
+        <p14:creationId xmlns:p14="http://schemas.microsoft.com/office/powerpoint/2010/main" val="2599811339"/>
       </p:ext>
     </p:extLst>
   </p:cSld>
@@ -24482,7 +28193,7 @@
 </p:sld>
 </file>
 
-<file path=ppt/slides/slide6.xml><?xml version="1.0" encoding="utf-8"?>
+<file path=ppt/slides/slide7.xml><?xml version="1.0" encoding="utf-8"?>
 <p:sld xmlns:a="http://schemas.openxmlformats.org/drawingml/2006/main" xmlns:r="http://schemas.openxmlformats.org/officeDocument/2006/relationships" xmlns:p="http://schemas.openxmlformats.org/presentationml/2006/main">
   <p:cSld>
     <p:spTree>
@@ -24560,8 +28271,8 @@
           </a:p>
         </p:txBody>
       </p:sp>
-      <mc:AlternateContent xmlns:mc="http://schemas.openxmlformats.org/markup-compatibility/2006">
-        <mc:Choice xmlns:a14="http://schemas.microsoft.com/office/drawing/2010/main" Requires="a14">
+      <mc:AlternateContent xmlns:mc="http://schemas.openxmlformats.org/markup-compatibility/2006" xmlns:a14="http://schemas.microsoft.com/office/drawing/2010/main">
+        <mc:Choice Requires="a14">
           <p:sp>
             <p:nvSpPr>
               <p:cNvPr id="4" name="Content Placeholder 2">
@@ -25062,7 +28773,7 @@
             </p:txBody>
           </p:sp>
         </mc:Choice>
-        <mc:Fallback>
+        <mc:Fallback xmlns="">
           <p:sp>
             <p:nvSpPr>
               <p:cNvPr id="4" name="Content Placeholder 2">
@@ -29277,12 +32988,18 @@
 </p:sld>
 </file>
 
-<file path=ppt/slides/slide7.xml><?xml version="1.0" encoding="utf-8"?>
+<file path=ppt/slides/slide8.xml><?xml version="1.0" encoding="utf-8"?>
 <p:sld xmlns:a="http://schemas.openxmlformats.org/drawingml/2006/main" xmlns:r="http://schemas.openxmlformats.org/officeDocument/2006/relationships" xmlns:p="http://schemas.openxmlformats.org/presentationml/2006/main">
   <p:cSld>
     <p:spTree>
       <p:nvGrpSpPr>
-        <p:cNvPr id="1" name=""/>
+        <p:cNvPr id="1" name="">
+          <a:extLst>
+            <a:ext uri="{FF2B5EF4-FFF2-40B4-BE49-F238E27FC236}">
+              <a16:creationId xmlns:a16="http://schemas.microsoft.com/office/drawing/2014/main" id="{48AE5661-C35C-D988-50B0-5D36FC624402}"/>
+            </a:ext>
+          </a:extLst>
+        </p:cNvPr>
         <p:cNvGrpSpPr/>
         <p:nvPr/>
       </p:nvGrpSpPr>
@@ -29299,7 +33016,7 @@
           <p:cNvPr id="2" name="Title 1">
             <a:extLst>
               <a:ext uri="{FF2B5EF4-FFF2-40B4-BE49-F238E27FC236}">
-                <a16:creationId xmlns:a16="http://schemas.microsoft.com/office/drawing/2014/main" id="{E5C49D63-6238-42D1-A567-4950AC8CC29F}"/>
+                <a16:creationId xmlns:a16="http://schemas.microsoft.com/office/drawing/2014/main" id="{CF1BA7E3-E203-2A42-7171-03015DA59EE0}"/>
               </a:ext>
             </a:extLst>
           </p:cNvPr>
@@ -29329,7 +33046,7 @@
               <p:cNvPr id="3" name="Content Placeholder 2">
                 <a:extLst>
                   <a:ext uri="{FF2B5EF4-FFF2-40B4-BE49-F238E27FC236}">
-                    <a16:creationId xmlns:a16="http://schemas.microsoft.com/office/drawing/2014/main" id="{346E8BEB-DA79-41D6-8DFF-2363CD098428}"/>
+                    <a16:creationId xmlns:a16="http://schemas.microsoft.com/office/drawing/2014/main" id="{0BA2D616-0A83-9102-1135-703E6B76387D}"/>
                   </a:ext>
                 </a:extLst>
               </p:cNvPr>
@@ -29551,7 +33268,7 @@
               <p:cNvPr id="3" name="Content Placeholder 2">
                 <a:extLst>
                   <a:ext uri="{FF2B5EF4-FFF2-40B4-BE49-F238E27FC236}">
-                    <a16:creationId xmlns:a16="http://schemas.microsoft.com/office/drawing/2014/main" id="{346E8BEB-DA79-41D6-8DFF-2363CD098428}"/>
+                    <a16:creationId xmlns:a16="http://schemas.microsoft.com/office/drawing/2014/main" id="{0BA2D616-0A83-9102-1135-703E6B76387D}"/>
                   </a:ext>
                 </a:extLst>
               </p:cNvPr>
@@ -29594,7 +33311,7 @@
           <p:cNvPr id="5" name="Picture 4">
             <a:extLst>
               <a:ext uri="{FF2B5EF4-FFF2-40B4-BE49-F238E27FC236}">
-                <a16:creationId xmlns:a16="http://schemas.microsoft.com/office/drawing/2014/main" id="{65255B67-BB43-46FC-B23A-663F2740DF94}"/>
+                <a16:creationId xmlns:a16="http://schemas.microsoft.com/office/drawing/2014/main" id="{3612F618-377C-46C4-8C06-A0209920EAED}"/>
               </a:ext>
             </a:extLst>
           </p:cNvPr>
@@ -29624,7 +33341,7 @@
           <p:cNvPr id="6" name="TextBox 5">
             <a:extLst>
               <a:ext uri="{FF2B5EF4-FFF2-40B4-BE49-F238E27FC236}">
-                <a16:creationId xmlns:a16="http://schemas.microsoft.com/office/drawing/2014/main" id="{A88E83C5-4F02-4534-BBF6-35B53425C927}"/>
+                <a16:creationId xmlns:a16="http://schemas.microsoft.com/office/drawing/2014/main" id="{21BFF05E-2A36-7578-72D7-1C18A2F623FE}"/>
               </a:ext>
             </a:extLst>
           </p:cNvPr>
@@ -29666,7 +33383,7 @@
           <p:cNvPr id="11" name="Picture 10">
             <a:extLst>
               <a:ext uri="{FF2B5EF4-FFF2-40B4-BE49-F238E27FC236}">
-                <a16:creationId xmlns:a16="http://schemas.microsoft.com/office/drawing/2014/main" id="{9FC083E5-4191-4455-BF54-1B0E216B2B5A}"/>
+                <a16:creationId xmlns:a16="http://schemas.microsoft.com/office/drawing/2014/main" id="{582AE5E7-B212-9F47-CEB4-305AE6880682}"/>
               </a:ext>
             </a:extLst>
           </p:cNvPr>
@@ -29694,7 +33411,7 @@
     </p:spTree>
     <p:extLst>
       <p:ext uri="{BB962C8B-B14F-4D97-AF65-F5344CB8AC3E}">
-        <p14:creationId xmlns:p14="http://schemas.microsoft.com/office/powerpoint/2010/main" val="1556041517"/>
+        <p14:creationId xmlns:p14="http://schemas.microsoft.com/office/powerpoint/2010/main" val="2981076170"/>
       </p:ext>
     </p:extLst>
   </p:cSld>
@@ -29872,7 +33589,7 @@
 </p:sld>
 </file>
 
-<file path=ppt/slides/slide8.xml><?xml version="1.0" encoding="utf-8"?>
+<file path=ppt/slides/slide9.xml><?xml version="1.0" encoding="utf-8"?>
 <p:sld xmlns:a="http://schemas.openxmlformats.org/drawingml/2006/main" xmlns:r="http://schemas.openxmlformats.org/officeDocument/2006/relationships" xmlns:p="http://schemas.openxmlformats.org/presentationml/2006/main">
   <p:cSld>
     <p:spTree>
@@ -30386,839 +34103,6 @@
         </p:cTn>
       </p:par>
     </p:tnLst>
-  </p:timing>
-</p:sld>
-</file>
-
-<file path=ppt/slides/slide9.xml><?xml version="1.0" encoding="utf-8"?>
-<p:sld xmlns:a="http://schemas.openxmlformats.org/drawingml/2006/main" xmlns:r="http://schemas.openxmlformats.org/officeDocument/2006/relationships" xmlns:p="http://schemas.openxmlformats.org/presentationml/2006/main">
-  <p:cSld>
-    <p:spTree>
-      <p:nvGrpSpPr>
-        <p:cNvPr id="1" name=""/>
-        <p:cNvGrpSpPr/>
-        <p:nvPr/>
-      </p:nvGrpSpPr>
-      <p:grpSpPr>
-        <a:xfrm>
-          <a:off x="0" y="0"/>
-          <a:ext cx="0" cy="0"/>
-          <a:chOff x="0" y="0"/>
-          <a:chExt cx="0" cy="0"/>
-        </a:xfrm>
-      </p:grpSpPr>
-      <p:sp>
-        <p:nvSpPr>
-          <p:cNvPr id="2" name="Title 1">
-            <a:extLst>
-              <a:ext uri="{FF2B5EF4-FFF2-40B4-BE49-F238E27FC236}">
-                <a16:creationId xmlns:a16="http://schemas.microsoft.com/office/drawing/2014/main" id="{67070C5B-346D-45CA-B66B-C458D94F4EAD}"/>
-              </a:ext>
-            </a:extLst>
-          </p:cNvPr>
-          <p:cNvSpPr>
-            <a:spLocks noGrp="1"/>
-          </p:cNvSpPr>
-          <p:nvPr>
-            <p:ph type="title"/>
-          </p:nvPr>
-        </p:nvSpPr>
-        <p:spPr/>
-        <p:txBody>
-          <a:bodyPr/>
-          <a:lstStyle/>
-          <a:p>
-            <a:r>
-              <a:rPr lang="en-US" dirty="0"/>
-              <a:t>Minimum spanning tree (MST)</a:t>
-            </a:r>
-          </a:p>
-        </p:txBody>
-      </p:sp>
-      <mc:AlternateContent xmlns:mc="http://schemas.openxmlformats.org/markup-compatibility/2006" xmlns:a14="http://schemas.microsoft.com/office/drawing/2010/main">
-        <mc:Choice Requires="a14">
-          <p:sp>
-            <p:nvSpPr>
-              <p:cNvPr id="3" name="Content Placeholder 2">
-                <a:extLst>
-                  <a:ext uri="{FF2B5EF4-FFF2-40B4-BE49-F238E27FC236}">
-                    <a16:creationId xmlns:a16="http://schemas.microsoft.com/office/drawing/2014/main" id="{7A339A9B-13BF-444A-A85E-74A779CB4C43}"/>
-                  </a:ext>
-                </a:extLst>
-              </p:cNvPr>
-              <p:cNvSpPr>
-                <a:spLocks noGrp="1"/>
-              </p:cNvSpPr>
-              <p:nvPr>
-                <p:ph sz="quarter" idx="1"/>
-              </p:nvPr>
-            </p:nvSpPr>
-            <p:spPr/>
-            <p:txBody>
-              <a:bodyPr/>
-              <a:lstStyle/>
-              <a:p>
-                <a:r>
-                  <a:rPr lang="en-US" sz="2400" dirty="0">
-                    <a:solidFill>
-                      <a:srgbClr val="0070C0"/>
-                    </a:solidFill>
-                  </a:rPr>
-                  <a:t>Weight of spanning tree </a:t>
-                </a:r>
-                <a14:m>
-                  <m:oMath xmlns:m="http://schemas.openxmlformats.org/officeDocument/2006/math">
-                    <m:r>
-                      <a:rPr lang="en-US" sz="2400" i="1">
-                        <a:solidFill>
-                          <a:srgbClr val="0070C0"/>
-                        </a:solidFill>
-                        <a:latin typeface="Cambria Math" panose="02040503050406030204" pitchFamily="18" charset="0"/>
-                      </a:rPr>
-                      <m:t>𝑇</m:t>
-                    </m:r>
-                  </m:oMath>
-                </a14:m>
-                <a:r>
-                  <a:rPr lang="en-US" sz="2400" dirty="0">
-                    <a:solidFill>
-                      <a:srgbClr val="0070C0"/>
-                    </a:solidFill>
-                  </a:rPr>
-                  <a:t> </a:t>
-                </a:r>
-                <a:r>
-                  <a:rPr lang="en-US" sz="2400" dirty="0"/>
-                  <a:t>of a weighted graph </a:t>
-                </a:r>
-                <a14:m>
-                  <m:oMath xmlns:m="http://schemas.openxmlformats.org/officeDocument/2006/math">
-                    <m:r>
-                      <a:rPr lang="en-US" sz="2400" i="1">
-                        <a:latin typeface="Cambria Math" panose="02040503050406030204" pitchFamily="18" charset="0"/>
-                      </a:rPr>
-                      <m:t>𝐺</m:t>
-                    </m:r>
-                    <m:r>
-                      <a:rPr lang="en-US" sz="2400" i="1">
-                        <a:latin typeface="Cambria Math" panose="02040503050406030204" pitchFamily="18" charset="0"/>
-                      </a:rPr>
-                      <m:t>=</m:t>
-                    </m:r>
-                    <m:d>
-                      <m:dPr>
-                        <m:ctrlPr>
-                          <a:rPr lang="en-US" sz="2400" i="1">
-                            <a:latin typeface="Cambria Math" panose="02040503050406030204" pitchFamily="18" charset="0"/>
-                          </a:rPr>
-                        </m:ctrlPr>
-                      </m:dPr>
-                      <m:e>
-                        <m:r>
-                          <a:rPr lang="en-US" sz="2400" i="1">
-                            <a:latin typeface="Cambria Math" panose="02040503050406030204" pitchFamily="18" charset="0"/>
-                          </a:rPr>
-                          <m:t>𝑉</m:t>
-                        </m:r>
-                        <m:r>
-                          <a:rPr lang="en-US" sz="2400" i="1">
-                            <a:latin typeface="Cambria Math" panose="02040503050406030204" pitchFamily="18" charset="0"/>
-                          </a:rPr>
-                          <m:t>, </m:t>
-                        </m:r>
-                        <m:r>
-                          <a:rPr lang="en-US" sz="2400" i="1">
-                            <a:latin typeface="Cambria Math" panose="02040503050406030204" pitchFamily="18" charset="0"/>
-                          </a:rPr>
-                          <m:t>𝐸</m:t>
-                        </m:r>
-                      </m:e>
-                    </m:d>
-                  </m:oMath>
-                </a14:m>
-                <a:r>
-                  <a:rPr lang="en-US" sz="2400" dirty="0"/>
-                  <a:t> is</a:t>
-                </a:r>
-              </a:p>
-              <a:p>
-                <a:pPr lvl="1"/>
-                <a:r>
-                  <a:rPr lang="en-US" sz="2200" dirty="0"/>
-                  <a:t>the total weights of all edges in </a:t>
-                </a:r>
-                <a14:m>
-                  <m:oMath xmlns:m="http://schemas.openxmlformats.org/officeDocument/2006/math">
-                    <m:r>
-                      <a:rPr lang="en-US" sz="2200" i="1">
-                        <a:latin typeface="Cambria Math" panose="02040503050406030204" pitchFamily="18" charset="0"/>
-                      </a:rPr>
-                      <m:t>𝑇</m:t>
-                    </m:r>
-                  </m:oMath>
-                </a14:m>
-                <a:r>
-                  <a:rPr lang="en-US" sz="2200" dirty="0"/>
-                  <a:t>, i.e.,  </a:t>
-                </a:r>
-                <a14:m>
-                  <m:oMath xmlns:m="http://schemas.openxmlformats.org/officeDocument/2006/math">
-                    <m:r>
-                      <a:rPr lang="en-US" sz="2200" i="1">
-                        <a:latin typeface="Cambria Math" panose="02040503050406030204" pitchFamily="18" charset="0"/>
-                      </a:rPr>
-                      <m:t>𝜔</m:t>
-                    </m:r>
-                    <m:d>
-                      <m:dPr>
-                        <m:ctrlPr>
-                          <a:rPr lang="en-US" sz="2200" i="1">
-                            <a:latin typeface="Cambria Math" panose="02040503050406030204" pitchFamily="18" charset="0"/>
-                          </a:rPr>
-                        </m:ctrlPr>
-                      </m:dPr>
-                      <m:e>
-                        <m:r>
-                          <a:rPr lang="en-US" sz="2200" i="1">
-                            <a:latin typeface="Cambria Math" panose="02040503050406030204" pitchFamily="18" charset="0"/>
-                          </a:rPr>
-                          <m:t>𝑇</m:t>
-                        </m:r>
-                      </m:e>
-                    </m:d>
-                    <m:r>
-                      <a:rPr lang="en-US" sz="2200" i="1">
-                        <a:latin typeface="Cambria Math" panose="02040503050406030204" pitchFamily="18" charset="0"/>
-                      </a:rPr>
-                      <m:t>=</m:t>
-                    </m:r>
-                    <m:nary>
-                      <m:naryPr>
-                        <m:chr m:val="∑"/>
-                        <m:supHide m:val="on"/>
-                        <m:ctrlPr>
-                          <a:rPr lang="en-US" sz="2200" i="1">
-                            <a:latin typeface="Cambria Math" panose="02040503050406030204" pitchFamily="18" charset="0"/>
-                          </a:rPr>
-                        </m:ctrlPr>
-                      </m:naryPr>
-                      <m:sub>
-                        <m:r>
-                          <a:rPr lang="en-US" sz="2200" i="1">
-                            <a:latin typeface="Cambria Math" panose="02040503050406030204" pitchFamily="18" charset="0"/>
-                          </a:rPr>
-                          <m:t>𝑒</m:t>
-                        </m:r>
-                        <m:r>
-                          <a:rPr lang="en-US" sz="2200" i="1">
-                            <a:latin typeface="Cambria Math" panose="02040503050406030204" pitchFamily="18" charset="0"/>
-                          </a:rPr>
-                          <m:t>∈</m:t>
-                        </m:r>
-                        <m:r>
-                          <a:rPr lang="en-US" sz="2200" i="1">
-                            <a:latin typeface="Cambria Math" panose="02040503050406030204" pitchFamily="18" charset="0"/>
-                          </a:rPr>
-                          <m:t>𝑇</m:t>
-                        </m:r>
-                      </m:sub>
-                      <m:sup/>
-                      <m:e>
-                        <m:r>
-                          <a:rPr lang="en-US" sz="2200" i="1">
-                            <a:latin typeface="Cambria Math" panose="02040503050406030204" pitchFamily="18" charset="0"/>
-                          </a:rPr>
-                          <m:t>𝜔</m:t>
-                        </m:r>
-                        <m:r>
-                          <a:rPr lang="en-US" sz="2200" i="1">
-                            <a:latin typeface="Cambria Math" panose="02040503050406030204" pitchFamily="18" charset="0"/>
-                          </a:rPr>
-                          <m:t>(</m:t>
-                        </m:r>
-                        <m:r>
-                          <a:rPr lang="en-US" sz="2200" i="1">
-                            <a:latin typeface="Cambria Math" panose="02040503050406030204" pitchFamily="18" charset="0"/>
-                          </a:rPr>
-                          <m:t>𝑒</m:t>
-                        </m:r>
-                        <m:r>
-                          <a:rPr lang="en-US" sz="2200" i="1">
-                            <a:latin typeface="Cambria Math" panose="02040503050406030204" pitchFamily="18" charset="0"/>
-                          </a:rPr>
-                          <m:t>)</m:t>
-                        </m:r>
-                      </m:e>
-                    </m:nary>
-                    <m:r>
-                      <a:rPr lang="en-US" sz="2200">
-                        <a:latin typeface="Cambria Math" panose="02040503050406030204" pitchFamily="18" charset="0"/>
-                      </a:rPr>
-                      <m:t>, </m:t>
-                    </m:r>
-                  </m:oMath>
-                </a14:m>
-                <a:endParaRPr lang="en-US" sz="2200" dirty="0"/>
-              </a:p>
-              <a:p>
-                <a:pPr lvl="1"/>
-                <a:r>
-                  <a:rPr lang="en-US" sz="2200" dirty="0"/>
-                  <a:t>where </a:t>
-                </a:r>
-                <a14:m>
-                  <m:oMath xmlns:m="http://schemas.openxmlformats.org/officeDocument/2006/math">
-                    <m:r>
-                      <a:rPr lang="en-US" sz="2200" i="1">
-                        <a:latin typeface="Cambria Math" panose="02040503050406030204" pitchFamily="18" charset="0"/>
-                      </a:rPr>
-                      <m:t>𝜔</m:t>
-                    </m:r>
-                    <m:r>
-                      <a:rPr lang="en-US" sz="2200" i="1">
-                        <a:latin typeface="Cambria Math" panose="02040503050406030204" pitchFamily="18" charset="0"/>
-                      </a:rPr>
-                      <m:t>:</m:t>
-                    </m:r>
-                    <m:r>
-                      <a:rPr lang="en-US" sz="2200" i="1">
-                        <a:latin typeface="Cambria Math" panose="02040503050406030204" pitchFamily="18" charset="0"/>
-                      </a:rPr>
-                      <m:t>𝐸</m:t>
-                    </m:r>
-                    <m:r>
-                      <a:rPr lang="en-US" sz="2200" i="1">
-                        <a:latin typeface="Cambria Math" panose="02040503050406030204" pitchFamily="18" charset="0"/>
-                      </a:rPr>
-                      <m:t>→</m:t>
-                    </m:r>
-                    <m:r>
-                      <a:rPr lang="en-US" sz="2200" i="1">
-                        <a:latin typeface="Cambria Math" panose="02040503050406030204" pitchFamily="18" charset="0"/>
-                      </a:rPr>
-                      <m:t>𝑅</m:t>
-                    </m:r>
-                  </m:oMath>
-                </a14:m>
-                <a:r>
-                  <a:rPr lang="en-US" sz="2000" dirty="0"/>
-                  <a:t> is the edge weights associated to </a:t>
-                </a:r>
-                <a14:m>
-                  <m:oMath xmlns:m="http://schemas.openxmlformats.org/officeDocument/2006/math">
-                    <m:r>
-                      <a:rPr lang="en-US" sz="2000" i="1">
-                        <a:latin typeface="Cambria Math" panose="02040503050406030204" pitchFamily="18" charset="0"/>
-                      </a:rPr>
-                      <m:t>𝐺</m:t>
-                    </m:r>
-                    <m:r>
-                      <a:rPr lang="en-US" sz="2000" i="1">
-                        <a:latin typeface="Cambria Math" panose="02040503050406030204" pitchFamily="18" charset="0"/>
-                      </a:rPr>
-                      <m:t>. </m:t>
-                    </m:r>
-                  </m:oMath>
-                </a14:m>
-                <a:endParaRPr lang="en-US" sz="2200" dirty="0"/>
-              </a:p>
-              <a:p>
-                <a:pPr lvl="1"/>
-                <a:endParaRPr lang="en-US" sz="1000" dirty="0"/>
-              </a:p>
-              <a:p>
-                <a:r>
-                  <a:rPr lang="en-US" sz="2500" dirty="0"/>
-                  <a:t>A </a:t>
-                </a:r>
-                <a:r>
-                  <a:rPr lang="en-US" sz="2500" dirty="0">
-                    <a:solidFill>
-                      <a:srgbClr val="0070C0"/>
-                    </a:solidFill>
-                  </a:rPr>
-                  <a:t>minimum spanning tree</a:t>
-                </a:r>
-                <a:r>
-                  <a:rPr lang="en-US" sz="2500" dirty="0"/>
-                  <a:t> (</a:t>
-                </a:r>
-                <a:r>
-                  <a:rPr lang="en-US" sz="2500" dirty="0">
-                    <a:solidFill>
-                      <a:srgbClr val="0070C0"/>
-                    </a:solidFill>
-                  </a:rPr>
-                  <a:t>MST</a:t>
-                </a:r>
-                <a:r>
-                  <a:rPr lang="en-US" sz="2500" dirty="0"/>
-                  <a:t>) </a:t>
-                </a:r>
-                <a:r>
-                  <a:rPr lang="en-US" sz="2400" dirty="0"/>
-                  <a:t>of a weighted graph </a:t>
-                </a:r>
-                <a14:m>
-                  <m:oMath xmlns:m="http://schemas.openxmlformats.org/officeDocument/2006/math">
-                    <m:r>
-                      <a:rPr lang="en-US" sz="2400" i="1">
-                        <a:latin typeface="Cambria Math" panose="02040503050406030204" pitchFamily="18" charset="0"/>
-                      </a:rPr>
-                      <m:t>𝐺</m:t>
-                    </m:r>
-                    <m:r>
-                      <a:rPr lang="en-US" sz="2400" i="1">
-                        <a:latin typeface="Cambria Math" panose="02040503050406030204" pitchFamily="18" charset="0"/>
-                      </a:rPr>
-                      <m:t>=</m:t>
-                    </m:r>
-                    <m:d>
-                      <m:dPr>
-                        <m:ctrlPr>
-                          <a:rPr lang="en-US" sz="2400" i="1">
-                            <a:latin typeface="Cambria Math" panose="02040503050406030204" pitchFamily="18" charset="0"/>
-                          </a:rPr>
-                        </m:ctrlPr>
-                      </m:dPr>
-                      <m:e>
-                        <m:r>
-                          <a:rPr lang="en-US" sz="2400" i="1">
-                            <a:latin typeface="Cambria Math" panose="02040503050406030204" pitchFamily="18" charset="0"/>
-                          </a:rPr>
-                          <m:t>𝑉</m:t>
-                        </m:r>
-                        <m:r>
-                          <a:rPr lang="en-US" sz="2400" i="1">
-                            <a:latin typeface="Cambria Math" panose="02040503050406030204" pitchFamily="18" charset="0"/>
-                          </a:rPr>
-                          <m:t>, </m:t>
-                        </m:r>
-                        <m:r>
-                          <a:rPr lang="en-US" sz="2400" i="1">
-                            <a:latin typeface="Cambria Math" panose="02040503050406030204" pitchFamily="18" charset="0"/>
-                          </a:rPr>
-                          <m:t>𝐸</m:t>
-                        </m:r>
-                      </m:e>
-                    </m:d>
-                  </m:oMath>
-                </a14:m>
-                <a:r>
-                  <a:rPr lang="en-US" sz="2400" dirty="0"/>
-                  <a:t> is a spanning tree with smallest possible weight. </a:t>
-                </a:r>
-              </a:p>
-              <a:p>
-                <a:pPr lvl="1"/>
-                <a:endParaRPr lang="en-US" sz="2200" dirty="0"/>
-              </a:p>
-              <a:p>
-                <a:endParaRPr lang="en-US" sz="2500" dirty="0"/>
-              </a:p>
-              <a:p>
-                <a:endParaRPr lang="en-US" sz="2100" dirty="0"/>
-              </a:p>
-              <a:p>
-                <a:endParaRPr lang="en-US" sz="2100" dirty="0"/>
-              </a:p>
-            </p:txBody>
-          </p:sp>
-        </mc:Choice>
-        <mc:Fallback xmlns="">
-          <p:sp>
-            <p:nvSpPr>
-              <p:cNvPr id="3" name="Content Placeholder 2">
-                <a:extLst>
-                  <a:ext uri="{FF2B5EF4-FFF2-40B4-BE49-F238E27FC236}">
-                    <a16:creationId xmlns:a16="http://schemas.microsoft.com/office/drawing/2014/main" id="{7A339A9B-13BF-444A-A85E-74A779CB4C43}"/>
-                  </a:ext>
-                </a:extLst>
-              </p:cNvPr>
-              <p:cNvSpPr>
-                <a:spLocks noGrp="1" noRot="1" noChangeAspect="1" noMove="1" noResize="1" noEditPoints="1" noAdjustHandles="1" noChangeArrowheads="1" noChangeShapeType="1" noTextEdit="1"/>
-              </p:cNvSpPr>
-              <p:nvPr>
-                <p:ph sz="quarter" idx="1"/>
-              </p:nvPr>
-            </p:nvSpPr>
-            <p:spPr>
-              <a:blipFill>
-                <a:blip r:embed="rId2"/>
-                <a:stretch>
-                  <a:fillRect l="-593" t="-2346"/>
-                </a:stretch>
-              </a:blipFill>
-            </p:spPr>
-            <p:txBody>
-              <a:bodyPr/>
-              <a:lstStyle/>
-              <a:p>
-                <a:r>
-                  <a:rPr lang="en-US">
-                    <a:noFill/>
-                  </a:rPr>
-                  <a:t> </a:t>
-                </a:r>
-              </a:p>
-            </p:txBody>
-          </p:sp>
-        </mc:Fallback>
-      </mc:AlternateContent>
-      <p:pic>
-        <p:nvPicPr>
-          <p:cNvPr id="4" name="Picture 3">
-            <a:extLst>
-              <a:ext uri="{FF2B5EF4-FFF2-40B4-BE49-F238E27FC236}">
-                <a16:creationId xmlns:a16="http://schemas.microsoft.com/office/drawing/2014/main" id="{CAEFCEBE-F103-4678-959D-8311653C67CA}"/>
-              </a:ext>
-            </a:extLst>
-          </p:cNvPr>
-          <p:cNvPicPr>
-            <a:picLocks noChangeAspect="1" noChangeArrowheads="1"/>
-          </p:cNvPicPr>
-          <p:nvPr/>
-        </p:nvPicPr>
-        <p:blipFill>
-          <a:blip r:embed="rId3">
-            <a:extLst>
-              <a:ext uri="{28A0092B-C50C-407E-A947-70E740481C1C}">
-                <a14:useLocalDpi xmlns:a14="http://schemas.microsoft.com/office/drawing/2010/main" val="0"/>
-              </a:ext>
-            </a:extLst>
-          </a:blip>
-          <a:srcRect/>
-          <a:stretch>
-            <a:fillRect/>
-          </a:stretch>
-        </p:blipFill>
-        <p:spPr bwMode="auto">
-          <a:xfrm>
-            <a:off x="1676400" y="3646011"/>
-            <a:ext cx="6203950" cy="2887436"/>
-          </a:xfrm>
-          <a:prstGeom prst="rect">
-            <a:avLst/>
-          </a:prstGeom>
-          <a:noFill/>
-          <a:extLst>
-            <a:ext uri="{909E8E84-426E-40DD-AFC4-6F175D3DCCD1}">
-              <a14:hiddenFill xmlns:a14="http://schemas.microsoft.com/office/drawing/2010/main">
-                <a:solidFill>
-                  <a:srgbClr val="FFFFFF"/>
-                </a:solidFill>
-              </a14:hiddenFill>
-            </a:ext>
-          </a:extLst>
-        </p:spPr>
-      </p:pic>
-      <p:sp>
-        <p:nvSpPr>
-          <p:cNvPr id="5" name="TextBox 4">
-            <a:extLst>
-              <a:ext uri="{FF2B5EF4-FFF2-40B4-BE49-F238E27FC236}">
-                <a16:creationId xmlns:a16="http://schemas.microsoft.com/office/drawing/2014/main" id="{C1E6197E-9A25-411F-8690-F061E475FB0A}"/>
-              </a:ext>
-            </a:extLst>
-          </p:cNvPr>
-          <p:cNvSpPr txBox="1"/>
-          <p:nvPr/>
-        </p:nvSpPr>
-        <p:spPr>
-          <a:xfrm>
-            <a:off x="8035378" y="4038601"/>
-            <a:ext cx="2209800" cy="646331"/>
-          </a:xfrm>
-          <a:prstGeom prst="rect">
-            <a:avLst/>
-          </a:prstGeom>
-          <a:noFill/>
-          <a:ln w="15875">
-            <a:solidFill>
-              <a:schemeClr val="tx1"/>
-            </a:solidFill>
-          </a:ln>
-        </p:spPr>
-        <p:txBody>
-          <a:bodyPr wrap="square" rtlCol="0">
-            <a:spAutoFit/>
-          </a:bodyPr>
-          <a:lstStyle/>
-          <a:p>
-            <a:r>
-              <a:rPr lang="en-US" dirty="0"/>
-              <a:t>Weight of this spanning tree:  43</a:t>
-            </a:r>
-          </a:p>
-        </p:txBody>
-      </p:sp>
-      <p:sp>
-        <p:nvSpPr>
-          <p:cNvPr id="6" name="TextBox 5">
-            <a:extLst>
-              <a:ext uri="{FF2B5EF4-FFF2-40B4-BE49-F238E27FC236}">
-                <a16:creationId xmlns:a16="http://schemas.microsoft.com/office/drawing/2014/main" id="{CE0051AE-C1BA-4DDA-A532-3F89D1F3FCAF}"/>
-              </a:ext>
-            </a:extLst>
-          </p:cNvPr>
-          <p:cNvSpPr txBox="1"/>
-          <p:nvPr/>
-        </p:nvSpPr>
-        <p:spPr>
-          <a:xfrm>
-            <a:off x="8035378" y="5131939"/>
-            <a:ext cx="2209800" cy="923330"/>
-          </a:xfrm>
-          <a:prstGeom prst="rect">
-            <a:avLst/>
-          </a:prstGeom>
-          <a:noFill/>
-          <a:ln w="15875">
-            <a:solidFill>
-              <a:schemeClr val="tx1"/>
-            </a:solidFill>
-          </a:ln>
-        </p:spPr>
-        <p:txBody>
-          <a:bodyPr wrap="square" rtlCol="0">
-            <a:spAutoFit/>
-          </a:bodyPr>
-          <a:lstStyle/>
-          <a:p>
-            <a:r>
-              <a:rPr lang="en-US" dirty="0"/>
-              <a:t>Turns out this is also a minimum spanning tree. </a:t>
-            </a:r>
-          </a:p>
-        </p:txBody>
-      </p:sp>
-    </p:spTree>
-    <p:extLst>
-      <p:ext uri="{BB962C8B-B14F-4D97-AF65-F5344CB8AC3E}">
-        <p14:creationId xmlns:p14="http://schemas.microsoft.com/office/powerpoint/2010/main" val="2401366680"/>
-      </p:ext>
-    </p:extLst>
-  </p:cSld>
-  <p:clrMapOvr>
-    <a:masterClrMapping/>
-  </p:clrMapOvr>
-  <p:timing>
-    <p:tnLst>
-      <p:par>
-        <p:cTn id="1" dur="indefinite" restart="never" nodeType="tmRoot">
-          <p:childTnLst>
-            <p:seq concurrent="1" nextAc="seek">
-              <p:cTn id="2" dur="indefinite" nodeType="mainSeq">
-                <p:childTnLst>
-                  <p:par>
-                    <p:cTn id="3" fill="hold">
-                      <p:stCondLst>
-                        <p:cond delay="indefinite"/>
-                      </p:stCondLst>
-                      <p:childTnLst>
-                        <p:par>
-                          <p:cTn id="4" fill="hold">
-                            <p:stCondLst>
-                              <p:cond delay="0"/>
-                            </p:stCondLst>
-                            <p:childTnLst>
-                              <p:par>
-                                <p:cTn id="5" presetID="1" presetClass="entr" presetSubtype="0" fill="hold" nodeType="clickEffect">
-                                  <p:stCondLst>
-                                    <p:cond delay="0"/>
-                                  </p:stCondLst>
-                                  <p:childTnLst>
-                                    <p:set>
-                                      <p:cBhvr>
-                                        <p:cTn id="6" dur="1" fill="hold">
-                                          <p:stCondLst>
-                                            <p:cond delay="0"/>
-                                          </p:stCondLst>
-                                        </p:cTn>
-                                        <p:tgtEl>
-                                          <p:spTgt spid="4"/>
-                                        </p:tgtEl>
-                                        <p:attrNameLst>
-                                          <p:attrName>style.visibility</p:attrName>
-                                        </p:attrNameLst>
-                                      </p:cBhvr>
-                                      <p:to>
-                                        <p:strVal val="visible"/>
-                                      </p:to>
-                                    </p:set>
-                                  </p:childTnLst>
-                                </p:cTn>
-                              </p:par>
-                            </p:childTnLst>
-                          </p:cTn>
-                        </p:par>
-                      </p:childTnLst>
-                    </p:cTn>
-                  </p:par>
-                  <p:par>
-                    <p:cTn id="7" fill="hold">
-                      <p:stCondLst>
-                        <p:cond delay="indefinite"/>
-                      </p:stCondLst>
-                      <p:childTnLst>
-                        <p:par>
-                          <p:cTn id="8" fill="hold">
-                            <p:stCondLst>
-                              <p:cond delay="0"/>
-                            </p:stCondLst>
-                            <p:childTnLst>
-                              <p:par>
-                                <p:cTn id="9" presetID="1" presetClass="entr" presetSubtype="0" fill="hold" grpId="0" nodeType="clickEffect">
-                                  <p:stCondLst>
-                                    <p:cond delay="0"/>
-                                  </p:stCondLst>
-                                  <p:childTnLst>
-                                    <p:set>
-                                      <p:cBhvr>
-                                        <p:cTn id="10" dur="1" fill="hold">
-                                          <p:stCondLst>
-                                            <p:cond delay="0"/>
-                                          </p:stCondLst>
-                                        </p:cTn>
-                                        <p:tgtEl>
-                                          <p:spTgt spid="5"/>
-                                        </p:tgtEl>
-                                        <p:attrNameLst>
-                                          <p:attrName>style.visibility</p:attrName>
-                                        </p:attrNameLst>
-                                      </p:cBhvr>
-                                      <p:to>
-                                        <p:strVal val="visible"/>
-                                      </p:to>
-                                    </p:set>
-                                  </p:childTnLst>
-                                </p:cTn>
-                              </p:par>
-                            </p:childTnLst>
-                          </p:cTn>
-                        </p:par>
-                      </p:childTnLst>
-                    </p:cTn>
-                  </p:par>
-                  <p:par>
-                    <p:cTn id="11" fill="hold">
-                      <p:stCondLst>
-                        <p:cond delay="indefinite"/>
-                      </p:stCondLst>
-                      <p:childTnLst>
-                        <p:par>
-                          <p:cTn id="12" fill="hold">
-                            <p:stCondLst>
-                              <p:cond delay="0"/>
-                            </p:stCondLst>
-                            <p:childTnLst>
-                              <p:par>
-                                <p:cTn id="13" presetID="1" presetClass="entr" presetSubtype="0" fill="hold" nodeType="clickEffect">
-                                  <p:stCondLst>
-                                    <p:cond delay="0"/>
-                                  </p:stCondLst>
-                                  <p:childTnLst>
-                                    <p:set>
-                                      <p:cBhvr>
-                                        <p:cTn id="14" dur="1" fill="hold">
-                                          <p:stCondLst>
-                                            <p:cond delay="0"/>
-                                          </p:stCondLst>
-                                        </p:cTn>
-                                        <p:tgtEl>
-                                          <p:spTgt spid="3">
-                                            <p:txEl>
-                                              <p:pRg st="4" end="4"/>
-                                            </p:txEl>
-                                          </p:spTgt>
-                                        </p:tgtEl>
-                                        <p:attrNameLst>
-                                          <p:attrName>style.visibility</p:attrName>
-                                        </p:attrNameLst>
-                                      </p:cBhvr>
-                                      <p:to>
-                                        <p:strVal val="visible"/>
-                                      </p:to>
-                                    </p:set>
-                                  </p:childTnLst>
-                                </p:cTn>
-                              </p:par>
-                            </p:childTnLst>
-                          </p:cTn>
-                        </p:par>
-                      </p:childTnLst>
-                    </p:cTn>
-                  </p:par>
-                  <p:par>
-                    <p:cTn id="15" fill="hold">
-                      <p:stCondLst>
-                        <p:cond delay="indefinite"/>
-                      </p:stCondLst>
-                      <p:childTnLst>
-                        <p:par>
-                          <p:cTn id="16" fill="hold">
-                            <p:stCondLst>
-                              <p:cond delay="0"/>
-                            </p:stCondLst>
-                            <p:childTnLst>
-                              <p:par>
-                                <p:cTn id="17" presetID="1" presetClass="entr" presetSubtype="0" fill="hold" grpId="0" nodeType="clickEffect">
-                                  <p:stCondLst>
-                                    <p:cond delay="0"/>
-                                  </p:stCondLst>
-                                  <p:childTnLst>
-                                    <p:set>
-                                      <p:cBhvr>
-                                        <p:cTn id="18" dur="1" fill="hold">
-                                          <p:stCondLst>
-                                            <p:cond delay="0"/>
-                                          </p:stCondLst>
-                                        </p:cTn>
-                                        <p:tgtEl>
-                                          <p:spTgt spid="6"/>
-                                        </p:tgtEl>
-                                        <p:attrNameLst>
-                                          <p:attrName>style.visibility</p:attrName>
-                                        </p:attrNameLst>
-                                      </p:cBhvr>
-                                      <p:to>
-                                        <p:strVal val="visible"/>
-                                      </p:to>
-                                    </p:set>
-                                  </p:childTnLst>
-                                </p:cTn>
-                              </p:par>
-                            </p:childTnLst>
-                          </p:cTn>
-                        </p:par>
-                      </p:childTnLst>
-                    </p:cTn>
-                  </p:par>
-                </p:childTnLst>
-              </p:cTn>
-              <p:prevCondLst>
-                <p:cond evt="onPrev" delay="0">
-                  <p:tgtEl>
-                    <p:sldTgt/>
-                  </p:tgtEl>
-                </p:cond>
-              </p:prevCondLst>
-              <p:nextCondLst>
-                <p:cond evt="onNext" delay="0">
-                  <p:tgtEl>
-                    <p:sldTgt/>
-                  </p:tgtEl>
-                </p:cond>
-              </p:nextCondLst>
-            </p:seq>
-          </p:childTnLst>
-        </p:cTn>
-      </p:par>
-    </p:tnLst>
-    <p:bldLst>
-      <p:bldP spid="5" grpId="0" animBg="1"/>
-      <p:bldP spid="6" grpId="0" animBg="1"/>
-    </p:bldLst>
   </p:timing>
 </p:sld>
 </file>
